--- a/replication/my_answers/Can Warm Behavior Mitigate the Negative Effect.pptx
+++ b/replication/my_answers/Can Warm Behavior Mitigate the Negative Effect.pptx
@@ -5863,8 +5863,8 @@
         </p:nvSpPr>
         <p:spPr>
           <a:xfrm>
-            <a:off x="789038" y="2369573"/>
-            <a:ext cx="10321413" cy="4198794"/>
+            <a:off x="789038" y="2153265"/>
+            <a:ext cx="10321413" cy="4415102"/>
           </a:xfrm>
         </p:spPr>
         <p:txBody>
@@ -5946,12 +5946,22 @@
         </p:blipFill>
         <p:spPr>
           <a:xfrm>
-            <a:off x="4301194" y="289659"/>
-            <a:ext cx="7737035" cy="1165487"/>
+            <a:off x="4660490" y="653482"/>
+            <a:ext cx="6886125" cy="1037308"/>
           </a:xfrm>
           <a:prstGeom prst="rect">
             <a:avLst/>
           </a:prstGeom>
+          <a:solidFill>
+            <a:schemeClr val="accent2"/>
+          </a:solidFill>
+          <a:ln w="38100">
+            <a:solidFill>
+              <a:schemeClr val="accent5">
+                <a:lumMod val="75000"/>
+              </a:schemeClr>
+            </a:solidFill>
+          </a:ln>
         </p:spPr>
       </p:pic>
       <p:sp>
@@ -5970,7 +5980,7 @@
         </p:nvSpPr>
         <p:spPr>
           <a:xfrm>
-            <a:off x="232430" y="555104"/>
+            <a:off x="576559" y="653482"/>
             <a:ext cx="3936448" cy="988561"/>
           </a:xfrm>
           <a:prstGeom prst="rect">
@@ -6006,13 +6016,7 @@
           </a:lstStyle>
           <a:p>
             <a:r>
-              <a:rPr lang="en-GB" sz="4800" dirty="0">
-                <a:solidFill>
-                  <a:schemeClr val="accent2">
-                    <a:lumMod val="75000"/>
-                  </a:schemeClr>
-                </a:solidFill>
-              </a:rPr>
+              <a:rPr lang="en-GB" sz="4800" dirty="0"/>
               <a:t>Marginal Effects</a:t>
             </a:r>
           </a:p>
@@ -6145,8 +6149,8 @@
           <a:lstStyle/>
           <a:p>
             <a:r>
-              <a:rPr lang="en-GB" sz="5400"/>
-              <a:t>Findings + Conclusion</a:t>
+              <a:rPr lang="en-GB" sz="5400" dirty="0"/>
+              <a:t>Conclusion</a:t>
             </a:r>
           </a:p>
         </p:txBody>
@@ -6833,23 +6837,7 @@
                 <a:ea typeface="CMU Sans Serif" panose="02000603000000000000" pitchFamily="2" charset="0"/>
                 <a:cs typeface="CMU Sans Serif" panose="02000603000000000000" pitchFamily="2" charset="0"/>
               </a:rPr>
-              <a:t>Firstly, I </a:t>
-            </a:r>
-            <a:r>
-              <a:rPr lang="en-GB" sz="2000">
-                <a:latin typeface="CMU Sans Serif" panose="02000603000000000000" pitchFamily="2" charset="0"/>
-                <a:ea typeface="CMU Sans Serif" panose="02000603000000000000" pitchFamily="2" charset="0"/>
-                <a:cs typeface="CMU Sans Serif" panose="02000603000000000000" pitchFamily="2" charset="0"/>
-              </a:rPr>
-              <a:t>assessed an </a:t>
-            </a:r>
-            <a:r>
-              <a:rPr lang="en-GB" sz="2000" dirty="0">
-                <a:latin typeface="CMU Sans Serif" panose="02000603000000000000" pitchFamily="2" charset="0"/>
-                <a:ea typeface="CMU Sans Serif" panose="02000603000000000000" pitchFamily="2" charset="0"/>
-                <a:cs typeface="CMU Sans Serif" panose="02000603000000000000" pitchFamily="2" charset="0"/>
-              </a:rPr>
-              <a:t>ordinal multinomial which was designed to reflect the ordinal nature of the data. </a:t>
+              <a:t>Firstly, I assessed an ordinal multinomial which was designed to reflect the ordinal nature of the data. </a:t>
             </a:r>
           </a:p>
           <a:p>
@@ -12219,8 +12207,8 @@
           </a:prstGeom>
         </p:spPr>
       </p:pic>
-      <mc:AlternateContent xmlns:mc="http://schemas.openxmlformats.org/markup-compatibility/2006">
-        <mc:Choice xmlns:a14="http://schemas.microsoft.com/office/drawing/2010/main" Requires="a14">
+      <mc:AlternateContent xmlns:mc="http://schemas.openxmlformats.org/markup-compatibility/2006" xmlns:a14="http://schemas.microsoft.com/office/drawing/2010/main">
+        <mc:Choice Requires="a14">
           <p:sp>
             <p:nvSpPr>
               <p:cNvPr id="3" name="Content Placeholder 2">
@@ -12291,34 +12279,46 @@
                 <a14:m>
                   <m:oMath xmlns:m="http://schemas.openxmlformats.org/officeDocument/2006/math">
                     <m:r>
-                      <a:rPr lang="en-GB" sz="1600"/>
+                      <a:rPr lang="en-GB" sz="1600">
+                        <a:latin typeface="Cambria Math" panose="02040503050406030204" pitchFamily="18" charset="0"/>
+                      </a:rPr>
                       <m:t>𝑂𝑅</m:t>
                     </m:r>
                     <m:r>
-                      <a:rPr lang="en-GB" sz="1600"/>
+                      <a:rPr lang="en-GB" sz="1600">
+                        <a:latin typeface="Cambria Math" panose="02040503050406030204" pitchFamily="18" charset="0"/>
+                      </a:rPr>
                       <m:t> = </m:t>
                     </m:r>
                     <m:sSup>
                       <m:sSupPr>
                         <m:ctrlPr>
-                          <a:rPr lang="en-GB" sz="1600"/>
+                          <a:rPr lang="en-GB" sz="1600" i="1">
+                            <a:latin typeface="Cambria Math" panose="02040503050406030204" pitchFamily="18" charset="0"/>
+                          </a:rPr>
                         </m:ctrlPr>
                       </m:sSupPr>
                       <m:e>
                         <m:r>
-                          <a:rPr lang="en-GB" sz="1600"/>
+                          <a:rPr lang="en-GB" sz="1600">
+                            <a:latin typeface="Cambria Math" panose="02040503050406030204" pitchFamily="18" charset="0"/>
+                          </a:rPr>
                           <m:t>𝑒</m:t>
                         </m:r>
                       </m:e>
                       <m:sup>
                         <m:r>
-                          <a:rPr lang="en-GB" sz="1600"/>
+                          <a:rPr lang="en-GB" sz="1600">
+                            <a:latin typeface="Cambria Math" panose="02040503050406030204" pitchFamily="18" charset="0"/>
+                          </a:rPr>
                           <m:t>0.692</m:t>
                         </m:r>
                       </m:sup>
                     </m:sSup>
                     <m:r>
-                      <a:rPr lang="en-GB" sz="1600"/>
+                      <a:rPr lang="en-GB" sz="1600">
+                        <a:latin typeface="Cambria Math" panose="02040503050406030204" pitchFamily="18" charset="0"/>
+                      </a:rPr>
                       <m:t> ≈ 1.99</m:t>
                     </m:r>
                   </m:oMath>
@@ -12376,7 +12376,7 @@
             </p:txBody>
           </p:sp>
         </mc:Choice>
-        <mc:Fallback>
+        <mc:Fallback xmlns="">
           <p:sp>
             <p:nvSpPr>
               <p:cNvPr id="3" name="Content Placeholder 2">
@@ -12611,13 +12611,7 @@
           <a:lstStyle/>
           <a:p>
             <a:r>
-              <a:rPr lang="en-GB" sz="5400" dirty="0">
-                <a:solidFill>
-                  <a:schemeClr val="accent2">
-                    <a:lumMod val="75000"/>
-                  </a:schemeClr>
-                </a:solidFill>
-              </a:rPr>
+              <a:rPr lang="en-GB" sz="5400" dirty="0"/>
               <a:t>Ordered Beta Regression</a:t>
             </a:r>
           </a:p>

--- a/replication/my_answers/Can Warm Behavior Mitigate the Negative Effect.pptx
+++ b/replication/my_answers/Can Warm Behavior Mitigate the Negative Effect.pptx
@@ -6837,7 +6837,7 @@
                 <a:ea typeface="CMU Sans Serif" panose="02000603000000000000" pitchFamily="2" charset="0"/>
                 <a:cs typeface="CMU Sans Serif" panose="02000603000000000000" pitchFamily="2" charset="0"/>
               </a:rPr>
-              <a:t>Firstly, I assessed an ordinal multinomial which was designed to reflect the ordinal nature of the data. </a:t>
+              <a:t>Two alternative methods were applied: an ordered multinomial and an ordered beta regression</a:t>
             </a:r>
           </a:p>
           <a:p>
@@ -6847,7 +6847,7 @@
                 <a:ea typeface="CMU Sans Serif" panose="02000603000000000000" pitchFamily="2" charset="0"/>
                 <a:cs typeface="CMU Sans Serif" panose="02000603000000000000" pitchFamily="2" charset="0"/>
               </a:rPr>
-              <a:t>This showed similar results to the OLS models, made similar predictions and further supported the lack of significant interaction. </a:t>
+              <a:t>The ordered multinomial was designed to reflect the ordinal nature of the data, looking at predicting the levels of trust </a:t>
             </a:r>
           </a:p>
           <a:p>
@@ -6857,7 +6857,7 @@
                 <a:ea typeface="CMU Sans Serif" panose="02000603000000000000" pitchFamily="2" charset="0"/>
                 <a:cs typeface="CMU Sans Serif" panose="02000603000000000000" pitchFamily="2" charset="0"/>
               </a:rPr>
-              <a:t>Secondly, I ran an ordered beta regression as it respected both the ordinal and bounded structure of the rescaled outcome measures.</a:t>
+              <a:t>The results were similar to the OLS models, the treatment effects and predicted average scores were similar, and the lack of a significant interaction further supported the original findings</a:t>
             </a:r>
           </a:p>
           <a:p>
@@ -6867,7 +6867,33 @@
                 <a:ea typeface="CMU Sans Serif" panose="02000603000000000000" pitchFamily="2" charset="0"/>
                 <a:cs typeface="CMU Sans Serif" panose="02000603000000000000" pitchFamily="2" charset="0"/>
               </a:rPr>
-              <a:t>This approach reaffirmed the results from the original OLS study, finding a consistent marginal effect of warmth for both outcome conditions, but with an approach that is specifically designed for bounded ordinal nature of the outcome variable.</a:t>
+              <a:t>The ordered beta regression was used as it respected both the ordinal and bounded structure of the rescaled trust measures on a 0-1 scale. </a:t>
+            </a:r>
+          </a:p>
+          <a:p>
+            <a:r>
+              <a:rPr lang="en-GB" sz="2000" dirty="0">
+                <a:latin typeface="CMU Sans Serif" panose="02000603000000000000" pitchFamily="2" charset="0"/>
+                <a:ea typeface="CMU Sans Serif" panose="02000603000000000000" pitchFamily="2" charset="0"/>
+                <a:cs typeface="CMU Sans Serif" panose="02000603000000000000" pitchFamily="2" charset="0"/>
+              </a:rPr>
+              <a:t>This </a:t>
+            </a:r>
+            <a:r>
+              <a:rPr lang="en-GB" sz="2000">
+                <a:latin typeface="CMU Sans Serif" panose="02000603000000000000" pitchFamily="2" charset="0"/>
+                <a:ea typeface="CMU Sans Serif" panose="02000603000000000000" pitchFamily="2" charset="0"/>
+                <a:cs typeface="CMU Sans Serif" panose="02000603000000000000" pitchFamily="2" charset="0"/>
+              </a:rPr>
+              <a:t>approach also </a:t>
+            </a:r>
+            <a:r>
+              <a:rPr lang="en-GB" sz="2000" dirty="0">
+                <a:latin typeface="CMU Sans Serif" panose="02000603000000000000" pitchFamily="2" charset="0"/>
+                <a:ea typeface="CMU Sans Serif" panose="02000603000000000000" pitchFamily="2" charset="0"/>
+                <a:cs typeface="CMU Sans Serif" panose="02000603000000000000" pitchFamily="2" charset="0"/>
+              </a:rPr>
+              <a:t>reaffirmed the results from the original OLS study, finding a consistent marginal effect of warmth for both outcome conditions, but with an approach that is specifically designed for bounded ordinal nature of the outcome variable.</a:t>
             </a:r>
           </a:p>
         </p:txBody>

--- a/replication/my_answers/Can Warm Behavior Mitigate the Negative Effect.pptx
+++ b/replication/my_answers/Can Warm Behavior Mitigate the Negative Effect.pptx
@@ -5,7 +5,7 @@
     <p:sldMasterId id="2147483708" r:id="rId1"/>
   </p:sldMasterIdLst>
   <p:notesMasterIdLst>
-    <p:notesMasterId r:id="rId14"/>
+    <p:notesMasterId r:id="rId15"/>
   </p:notesMasterIdLst>
   <p:sldIdLst>
     <p:sldId id="264" r:id="rId2"/>
@@ -13,13 +13,14 @@
     <p:sldId id="257" r:id="rId4"/>
     <p:sldId id="258" r:id="rId5"/>
     <p:sldId id="259" r:id="rId6"/>
-    <p:sldId id="269" r:id="rId7"/>
-    <p:sldId id="270" r:id="rId8"/>
+    <p:sldId id="270" r:id="rId7"/>
+    <p:sldId id="269" r:id="rId8"/>
     <p:sldId id="266" r:id="rId9"/>
-    <p:sldId id="261" r:id="rId10"/>
-    <p:sldId id="271" r:id="rId11"/>
-    <p:sldId id="263" r:id="rId12"/>
-    <p:sldId id="267" r:id="rId13"/>
+    <p:sldId id="272" r:id="rId10"/>
+    <p:sldId id="261" r:id="rId11"/>
+    <p:sldId id="271" r:id="rId12"/>
+    <p:sldId id="263" r:id="rId13"/>
+    <p:sldId id="267" r:id="rId14"/>
   </p:sldIdLst>
   <p:sldSz cx="12192000" cy="6858000"/>
   <p:notesSz cx="6858000" cy="9144000"/>
@@ -128,9 +129,10 @@
             <p14:sldId id="257"/>
             <p14:sldId id="258"/>
             <p14:sldId id="259"/>
+            <p14:sldId id="270"/>
             <p14:sldId id="269"/>
-            <p14:sldId id="270"/>
             <p14:sldId id="266"/>
+            <p14:sldId id="272"/>
             <p14:sldId id="261"/>
             <p14:sldId id="271"/>
             <p14:sldId id="263"/>
@@ -980,7 +982,17 @@
               <a:ea typeface="CMU Sans Serif" panose="02000603000000000000" pitchFamily="2" charset="0"/>
               <a:cs typeface="CMU Sans Serif" panose="02000603000000000000" pitchFamily="2" charset="0"/>
             </a:rPr>
-            <a:t>H2: The effect of decision favourability on citizens’ trust in government depends on whether bureaucrats show warmth in the decision-making process. The negative effect of unfavourable decisions is weaker when bureaucrats show high warmth compared to showing low warmth.</a:t>
+            <a:t>H2: The effect of decision favourability on citizens’ trust in government depends on whether bureaucrats show warmth in the decision-making process. </a:t>
+          </a:r>
+        </a:p>
+        <a:p>
+          <a:r>
+            <a:rPr lang="en-GB" dirty="0">
+              <a:latin typeface="CMU Sans Serif" panose="02000603000000000000" pitchFamily="2" charset="0"/>
+              <a:ea typeface="CMU Sans Serif" panose="02000603000000000000" pitchFamily="2" charset="0"/>
+              <a:cs typeface="CMU Sans Serif" panose="02000603000000000000" pitchFamily="2" charset="0"/>
+            </a:rPr>
+            <a:t>The negative effect of unfavourable decisions is weaker when bureaucrats show high warmth compared to showing low warmth.</a:t>
           </a:r>
         </a:p>
       </dgm:t>
@@ -1017,7 +1029,7 @@
       <dgm:spPr/>
     </dgm:pt>
     <dgm:pt modelId="{B95B3C59-BB79-4009-B912-BEE76D279524}" type="pres">
-      <dgm:prSet presAssocID="{A0727C92-95DF-47BF-A434-D4DE49308730}" presName="parentText" presStyleLbl="node1" presStyleIdx="0" presStyleCnt="2" custScaleY="56102">
+      <dgm:prSet presAssocID="{A0727C92-95DF-47BF-A434-D4DE49308730}" presName="parentText" presStyleLbl="node1" presStyleIdx="0" presStyleCnt="2" custScaleY="32586">
         <dgm:presLayoutVars>
           <dgm:chMax val="0"/>
           <dgm:bulletEnabled val="1"/>
@@ -1030,7 +1042,7 @@
       <dgm:spPr/>
     </dgm:pt>
     <dgm:pt modelId="{050818C9-837F-4530-B1C6-C9D697EDE9C4}" type="pres">
-      <dgm:prSet presAssocID="{9C37F673-3743-47FA-B742-EDFA8C7B48EF}" presName="parentText" presStyleLbl="node1" presStyleIdx="1" presStyleCnt="2">
+      <dgm:prSet presAssocID="{9C37F673-3743-47FA-B742-EDFA8C7B48EF}" presName="parentText" presStyleLbl="node1" presStyleIdx="1" presStyleCnt="2" custScaleY="95817">
         <dgm:presLayoutVars>
           <dgm:chMax val="0"/>
           <dgm:bulletEnabled val="1"/>
@@ -1074,8 +1086,8 @@
       </dsp:nvSpPr>
       <dsp:spPr>
         <a:xfrm>
-          <a:off x="0" y="56821"/>
-          <a:ext cx="5734664" cy="1604061"/>
+          <a:off x="0" y="28331"/>
+          <a:ext cx="5388077" cy="1000797"/>
         </a:xfrm>
         <a:prstGeom prst="roundRect">
           <a:avLst/>
@@ -1115,12 +1127,12 @@
         </a:fontRef>
       </dsp:style>
       <dsp:txBody>
-        <a:bodyPr spcFirstLastPara="0" vert="horz" wrap="square" lIns="87630" tIns="87630" rIns="87630" bIns="87630" numCol="1" spcCol="1270" anchor="ctr" anchorCtr="0">
+        <a:bodyPr spcFirstLastPara="0" vert="horz" wrap="square" lIns="72390" tIns="72390" rIns="72390" bIns="72390" numCol="1" spcCol="1270" anchor="ctr" anchorCtr="0">
           <a:noAutofit/>
         </a:bodyPr>
         <a:lstStyle/>
         <a:p>
-          <a:pPr marL="0" lvl="0" indent="0" algn="l" defTabSz="1022350">
+          <a:pPr marL="0" lvl="0" indent="0" algn="l" defTabSz="844550">
             <a:lnSpc>
               <a:spcPct val="90000"/>
             </a:lnSpc>
@@ -1133,7 +1145,7 @@
             <a:buNone/>
           </a:pPr>
           <a:r>
-            <a:rPr lang="en-GB" sz="2300" kern="1200" dirty="0">
+            <a:rPr lang="en-GB" sz="1900" kern="1200" dirty="0">
               <a:latin typeface="CMU Sans Serif" panose="02000603000000000000" pitchFamily="2" charset="0"/>
               <a:ea typeface="CMU Sans Serif" panose="02000603000000000000" pitchFamily="2" charset="0"/>
               <a:cs typeface="CMU Sans Serif" panose="02000603000000000000" pitchFamily="2" charset="0"/>
@@ -1143,8 +1155,8 @@
         </a:p>
       </dsp:txBody>
       <dsp:txXfrm>
-        <a:off x="78304" y="135125"/>
-        <a:ext cx="5578056" cy="1447453"/>
+        <a:off x="48855" y="77186"/>
+        <a:ext cx="5290367" cy="903087"/>
       </dsp:txXfrm>
     </dsp:sp>
     <dsp:sp modelId="{050818C9-837F-4530-B1C6-C9D697EDE9C4}">
@@ -1154,8 +1166,8 @@
       </dsp:nvSpPr>
       <dsp:spPr>
         <a:xfrm>
-          <a:off x="0" y="1727122"/>
-          <a:ext cx="5734664" cy="2859187"/>
+          <a:off x="0" y="1089609"/>
+          <a:ext cx="5388077" cy="2942779"/>
         </a:xfrm>
         <a:prstGeom prst="roundRect">
           <a:avLst/>
@@ -1191,12 +1203,12 @@
         </a:fontRef>
       </dsp:style>
       <dsp:txBody>
-        <a:bodyPr spcFirstLastPara="0" vert="horz" wrap="square" lIns="87630" tIns="87630" rIns="87630" bIns="87630" numCol="1" spcCol="1270" anchor="ctr" anchorCtr="0">
+        <a:bodyPr spcFirstLastPara="0" vert="horz" wrap="square" lIns="72390" tIns="72390" rIns="72390" bIns="72390" numCol="1" spcCol="1270" anchor="ctr" anchorCtr="0">
           <a:noAutofit/>
         </a:bodyPr>
         <a:lstStyle/>
         <a:p>
-          <a:pPr marL="0" lvl="0" indent="0" algn="l" defTabSz="1022350">
+          <a:pPr marL="0" lvl="0" indent="0" algn="l" defTabSz="844550">
             <a:lnSpc>
               <a:spcPct val="90000"/>
             </a:lnSpc>
@@ -1209,18 +1221,40 @@
             <a:buNone/>
           </a:pPr>
           <a:r>
-            <a:rPr lang="en-GB" sz="2300" kern="1200" dirty="0">
+            <a:rPr lang="en-GB" sz="1900" kern="1200" dirty="0">
               <a:latin typeface="CMU Sans Serif" panose="02000603000000000000" pitchFamily="2" charset="0"/>
               <a:ea typeface="CMU Sans Serif" panose="02000603000000000000" pitchFamily="2" charset="0"/>
               <a:cs typeface="CMU Sans Serif" panose="02000603000000000000" pitchFamily="2" charset="0"/>
             </a:rPr>
-            <a:t>H2: The effect of decision favourability on citizens’ trust in government depends on whether bureaucrats show warmth in the decision-making process. The negative effect of unfavourable decisions is weaker when bureaucrats show high warmth compared to showing low warmth.</a:t>
+            <a:t>H2: The effect of decision favourability on citizens’ trust in government depends on whether bureaucrats show warmth in the decision-making process. </a:t>
+          </a:r>
+        </a:p>
+        <a:p>
+          <a:pPr marL="0" lvl="0" indent="0" algn="l" defTabSz="844550">
+            <a:lnSpc>
+              <a:spcPct val="90000"/>
+            </a:lnSpc>
+            <a:spcBef>
+              <a:spcPct val="0"/>
+            </a:spcBef>
+            <a:spcAft>
+              <a:spcPct val="35000"/>
+            </a:spcAft>
+            <a:buNone/>
+          </a:pPr>
+          <a:r>
+            <a:rPr lang="en-GB" sz="1900" kern="1200" dirty="0">
+              <a:latin typeface="CMU Sans Serif" panose="02000603000000000000" pitchFamily="2" charset="0"/>
+              <a:ea typeface="CMU Sans Serif" panose="02000603000000000000" pitchFamily="2" charset="0"/>
+              <a:cs typeface="CMU Sans Serif" panose="02000603000000000000" pitchFamily="2" charset="0"/>
+            </a:rPr>
+            <a:t>The negative effect of unfavourable decisions is weaker when bureaucrats show high warmth compared to showing low warmth.</a:t>
           </a:r>
         </a:p>
       </dsp:txBody>
       <dsp:txXfrm>
-        <a:off x="139574" y="1866696"/>
-        <a:ext cx="5455516" cy="2580039"/>
+        <a:off x="143655" y="1233264"/>
+        <a:ext cx="5100767" cy="2655469"/>
       </dsp:txXfrm>
     </dsp:sp>
   </dsp:spTree>
@@ -2510,7 +2544,7 @@
           <a:p>
             <a:fld id="{13BA421F-398B-4DAA-8CA6-E5168223F3C6}" type="datetimeFigureOut">
               <a:rPr lang="en-GB" smtClean="0"/>
-              <a:t>01/04/2026</a:t>
+              <a:t>07/04/2026</a:t>
             </a:fld>
             <a:endParaRPr lang="en-GB"/>
           </a:p>
@@ -2882,6 +2916,1258 @@
 </p:notes>
 </file>
 
+<file path=ppt/notesSlides/notesSlide2.xml><?xml version="1.0" encoding="utf-8"?>
+<p:notes xmlns:a="http://schemas.openxmlformats.org/drawingml/2006/main" xmlns:r="http://schemas.openxmlformats.org/officeDocument/2006/relationships" xmlns:p="http://schemas.openxmlformats.org/presentationml/2006/main">
+  <p:cSld>
+    <p:spTree>
+      <p:nvGrpSpPr>
+        <p:cNvPr id="1" name=""/>
+        <p:cNvGrpSpPr/>
+        <p:nvPr/>
+      </p:nvGrpSpPr>
+      <p:grpSpPr>
+        <a:xfrm>
+          <a:off x="0" y="0"/>
+          <a:ext cx="0" cy="0"/>
+          <a:chOff x="0" y="0"/>
+          <a:chExt cx="0" cy="0"/>
+        </a:xfrm>
+      </p:grpSpPr>
+      <p:sp>
+        <p:nvSpPr>
+          <p:cNvPr id="2" name="Slide Image Placeholder 1"/>
+          <p:cNvSpPr>
+            <a:spLocks noGrp="1" noRot="1" noChangeAspect="1"/>
+          </p:cNvSpPr>
+          <p:nvPr>
+            <p:ph type="sldImg"/>
+          </p:nvPr>
+        </p:nvSpPr>
+        <p:spPr/>
+      </p:sp>
+      <p:sp>
+        <p:nvSpPr>
+          <p:cNvPr id="3" name="Notes Placeholder 2"/>
+          <p:cNvSpPr>
+            <a:spLocks noGrp="1"/>
+          </p:cNvSpPr>
+          <p:nvPr>
+            <p:ph type="body" idx="1"/>
+          </p:nvPr>
+        </p:nvSpPr>
+        <p:spPr/>
+        <p:txBody>
+          <a:bodyPr/>
+          <a:lstStyle/>
+          <a:p>
+            <a:pPr marL="285750" indent="-285750" algn="just">
+              <a:buFont typeface="Courier New" panose="02070309020205020404" pitchFamily="49" charset="0"/>
+              <a:buChar char="o"/>
+            </a:pPr>
+            <a:endParaRPr lang="en-GB" sz="1200" dirty="0">
+              <a:latin typeface="CMU Sans Serif" panose="02000603000000000000" pitchFamily="2" charset="0"/>
+              <a:ea typeface="CMU Sans Serif" panose="02000603000000000000" pitchFamily="2" charset="0"/>
+              <a:cs typeface="CMU Sans Serif" panose="02000603000000000000" pitchFamily="2" charset="0"/>
+            </a:endParaRPr>
+          </a:p>
+          <a:p>
+            <a:pPr lvl="1" algn="just"/>
+            <a:r>
+              <a:rPr lang="en-GB" sz="1200" i="1" dirty="0">
+                <a:latin typeface="CMU Sans Serif" panose="02000603000000000000" pitchFamily="2" charset="0"/>
+                <a:ea typeface="CMU Sans Serif" panose="02000603000000000000" pitchFamily="2" charset="0"/>
+                <a:cs typeface="CMU Sans Serif" panose="02000603000000000000" pitchFamily="2" charset="0"/>
+              </a:rPr>
+              <a:t>i.e. “the caseworker answered all your questions in a [warm and friendly / cold and unfriendly]  manner … “</a:t>
+            </a:r>
+          </a:p>
+          <a:p>
+            <a:pPr lvl="1" algn="just"/>
+            <a:r>
+              <a:rPr lang="en-GB" sz="1200" i="1" dirty="0">
+                <a:latin typeface="CMU Sans Serif" panose="02000603000000000000" pitchFamily="2" charset="0"/>
+                <a:ea typeface="CMU Sans Serif" panose="02000603000000000000" pitchFamily="2" charset="0"/>
+                <a:cs typeface="CMU Sans Serif" panose="02000603000000000000" pitchFamily="2" charset="0"/>
+              </a:rPr>
+              <a:t>“based on the caseworker’s recommendation, the municipality has decided to [reject/approve] the application to enter a nursing home.</a:t>
+            </a:r>
+          </a:p>
+          <a:p>
+            <a:pPr marL="285750" indent="-285750" algn="just">
+              <a:buFont typeface="Courier New" panose="02070309020205020404" pitchFamily="49" charset="0"/>
+              <a:buChar char="o"/>
+            </a:pPr>
+            <a:endParaRPr lang="en-GB" sz="1200" dirty="0">
+              <a:latin typeface="CMU Sans Serif" panose="02000603000000000000" pitchFamily="2" charset="0"/>
+              <a:ea typeface="CMU Sans Serif" panose="02000603000000000000" pitchFamily="2" charset="0"/>
+              <a:cs typeface="CMU Sans Serif" panose="02000603000000000000" pitchFamily="2" charset="0"/>
+            </a:endParaRPr>
+          </a:p>
+          <a:p>
+            <a:endParaRPr lang="en-GB" dirty="0"/>
+          </a:p>
+        </p:txBody>
+      </p:sp>
+      <p:sp>
+        <p:nvSpPr>
+          <p:cNvPr id="4" name="Slide Number Placeholder 3"/>
+          <p:cNvSpPr>
+            <a:spLocks noGrp="1"/>
+          </p:cNvSpPr>
+          <p:nvPr>
+            <p:ph type="sldNum" sz="quarter" idx="5"/>
+          </p:nvPr>
+        </p:nvSpPr>
+        <p:spPr/>
+        <p:txBody>
+          <a:bodyPr/>
+          <a:lstStyle/>
+          <a:p>
+            <a:fld id="{4A9E1FE7-B59A-46E6-94E2-3F84D8B22038}" type="slidenum">
+              <a:rPr lang="en-GB" smtClean="0"/>
+              <a:t>4</a:t>
+            </a:fld>
+            <a:endParaRPr lang="en-GB"/>
+          </a:p>
+        </p:txBody>
+      </p:sp>
+    </p:spTree>
+    <p:extLst>
+      <p:ext uri="{BB962C8B-B14F-4D97-AF65-F5344CB8AC3E}">
+        <p14:creationId xmlns:p14="http://schemas.microsoft.com/office/powerpoint/2010/main" val="2727578008"/>
+      </p:ext>
+    </p:extLst>
+  </p:cSld>
+  <p:clrMapOvr>
+    <a:masterClrMapping/>
+  </p:clrMapOvr>
+</p:notes>
+</file>
+
+<file path=ppt/notesSlides/notesSlide3.xml><?xml version="1.0" encoding="utf-8"?>
+<p:notes xmlns:a="http://schemas.openxmlformats.org/drawingml/2006/main" xmlns:r="http://schemas.openxmlformats.org/officeDocument/2006/relationships" xmlns:p="http://schemas.openxmlformats.org/presentationml/2006/main">
+  <p:cSld>
+    <p:spTree>
+      <p:nvGrpSpPr>
+        <p:cNvPr id="1" name=""/>
+        <p:cNvGrpSpPr/>
+        <p:nvPr/>
+      </p:nvGrpSpPr>
+      <p:grpSpPr>
+        <a:xfrm>
+          <a:off x="0" y="0"/>
+          <a:ext cx="0" cy="0"/>
+          <a:chOff x="0" y="0"/>
+          <a:chExt cx="0" cy="0"/>
+        </a:xfrm>
+      </p:grpSpPr>
+      <p:sp>
+        <p:nvSpPr>
+          <p:cNvPr id="2" name="Slide Image Placeholder 1"/>
+          <p:cNvSpPr>
+            <a:spLocks noGrp="1" noRot="1" noChangeAspect="1"/>
+          </p:cNvSpPr>
+          <p:nvPr>
+            <p:ph type="sldImg"/>
+          </p:nvPr>
+        </p:nvSpPr>
+        <p:spPr/>
+      </p:sp>
+      <p:sp>
+        <p:nvSpPr>
+          <p:cNvPr id="3" name="Notes Placeholder 2"/>
+          <p:cNvSpPr>
+            <a:spLocks noGrp="1"/>
+          </p:cNvSpPr>
+          <p:nvPr>
+            <p:ph type="body" idx="1"/>
+          </p:nvPr>
+        </p:nvSpPr>
+        <p:spPr/>
+        <p:txBody>
+          <a:bodyPr/>
+          <a:lstStyle/>
+          <a:p>
+            <a:r>
+              <a:rPr lang="en-GB" sz="2000" dirty="0">
+                <a:latin typeface="CMU Sans Serif" panose="02000603000000000000" pitchFamily="2" charset="0"/>
+                <a:ea typeface="CMU Sans Serif" panose="02000603000000000000" pitchFamily="2" charset="0"/>
+                <a:cs typeface="CMU Sans Serif" panose="02000603000000000000" pitchFamily="2" charset="0"/>
+              </a:rPr>
+              <a:t>The two experimental treatments were coded into dummy variables: ’</a:t>
+            </a:r>
+          </a:p>
+          <a:p>
+            <a:pPr lvl="1"/>
+            <a:r>
+              <a:rPr lang="en-GB" sz="2000" dirty="0">
+                <a:latin typeface="CMU Sans Serif" panose="02000603000000000000" pitchFamily="2" charset="0"/>
+                <a:ea typeface="CMU Sans Serif" panose="02000603000000000000" pitchFamily="2" charset="0"/>
+                <a:cs typeface="CMU Sans Serif" panose="02000603000000000000" pitchFamily="2" charset="0"/>
+              </a:rPr>
+              <a:t>of treatment  → 0 = Unfavourable, 1 = Favourable</a:t>
+            </a:r>
+          </a:p>
+          <a:p>
+            <a:pPr lvl="1"/>
+            <a:r>
+              <a:rPr lang="en-GB" sz="2000" dirty="0">
+                <a:latin typeface="CMU Sans Serif" panose="02000603000000000000" pitchFamily="2" charset="0"/>
+                <a:ea typeface="CMU Sans Serif" panose="02000603000000000000" pitchFamily="2" charset="0"/>
+                <a:cs typeface="CMU Sans Serif" panose="02000603000000000000" pitchFamily="2" charset="0"/>
+              </a:rPr>
+              <a:t> warmth treatment → 0 = Low Warmth, 1 = High Warmth</a:t>
+            </a:r>
+          </a:p>
+          <a:p>
+            <a:r>
+              <a:rPr lang="en-GB" sz="2000" dirty="0">
+                <a:latin typeface="CMU Sans Serif" panose="02000603000000000000" pitchFamily="2" charset="0"/>
+                <a:ea typeface="CMU Sans Serif" panose="02000603000000000000" pitchFamily="2" charset="0"/>
+                <a:cs typeface="CMU Sans Serif" panose="02000603000000000000" pitchFamily="2" charset="0"/>
+              </a:rPr>
+              <a:t>Outcome variables ’trust b’ and ’trust m’ were rescaled from their original ‘0-10’ scale to a ‘0-1’ scale</a:t>
+            </a:r>
+          </a:p>
+          <a:p>
+            <a:pPr lvl="1"/>
+            <a:r>
+              <a:rPr lang="en-GB" sz="2000" dirty="0">
+                <a:latin typeface="CMU Sans Serif" panose="02000603000000000000" pitchFamily="2" charset="0"/>
+                <a:ea typeface="CMU Sans Serif" panose="02000603000000000000" pitchFamily="2" charset="0"/>
+                <a:cs typeface="CMU Sans Serif" panose="02000603000000000000" pitchFamily="2" charset="0"/>
+              </a:rPr>
+              <a:t>E.g. 5 → 0.5</a:t>
+            </a:r>
+          </a:p>
+          <a:p>
+            <a:r>
+              <a:rPr lang="en-GB" sz="2000" dirty="0">
+                <a:latin typeface="CMU Sans Serif" panose="02000603000000000000" pitchFamily="2" charset="0"/>
+                <a:ea typeface="CMU Sans Serif" panose="02000603000000000000" pitchFamily="2" charset="0"/>
+                <a:cs typeface="CMU Sans Serif" panose="02000603000000000000" pitchFamily="2" charset="0"/>
+              </a:rPr>
+              <a:t>Other demographic variables and manipulation validity test measures were included</a:t>
+            </a:r>
+          </a:p>
+          <a:p>
+            <a:endParaRPr lang="en-GB" dirty="0"/>
+          </a:p>
+        </p:txBody>
+      </p:sp>
+      <p:sp>
+        <p:nvSpPr>
+          <p:cNvPr id="4" name="Slide Number Placeholder 3"/>
+          <p:cNvSpPr>
+            <a:spLocks noGrp="1"/>
+          </p:cNvSpPr>
+          <p:nvPr>
+            <p:ph type="sldNum" sz="quarter" idx="5"/>
+          </p:nvPr>
+        </p:nvSpPr>
+        <p:spPr/>
+        <p:txBody>
+          <a:bodyPr/>
+          <a:lstStyle/>
+          <a:p>
+            <a:fld id="{4A9E1FE7-B59A-46E6-94E2-3F84D8B22038}" type="slidenum">
+              <a:rPr lang="en-GB" smtClean="0"/>
+              <a:t>5</a:t>
+            </a:fld>
+            <a:endParaRPr lang="en-GB"/>
+          </a:p>
+        </p:txBody>
+      </p:sp>
+    </p:spTree>
+    <p:extLst>
+      <p:ext uri="{BB962C8B-B14F-4D97-AF65-F5344CB8AC3E}">
+        <p14:creationId xmlns:p14="http://schemas.microsoft.com/office/powerpoint/2010/main" val="627876703"/>
+      </p:ext>
+    </p:extLst>
+  </p:cSld>
+  <p:clrMapOvr>
+    <a:masterClrMapping/>
+  </p:clrMapOvr>
+</p:notes>
+</file>
+
+<file path=ppt/notesSlides/notesSlide4.xml><?xml version="1.0" encoding="utf-8"?>
+<p:notes xmlns:a="http://schemas.openxmlformats.org/drawingml/2006/main" xmlns:r="http://schemas.openxmlformats.org/officeDocument/2006/relationships" xmlns:p="http://schemas.openxmlformats.org/presentationml/2006/main">
+  <p:cSld>
+    <p:spTree>
+      <p:nvGrpSpPr>
+        <p:cNvPr id="1" name=""/>
+        <p:cNvGrpSpPr/>
+        <p:nvPr/>
+      </p:nvGrpSpPr>
+      <p:grpSpPr>
+        <a:xfrm>
+          <a:off x="0" y="0"/>
+          <a:ext cx="0" cy="0"/>
+          <a:chOff x="0" y="0"/>
+          <a:chExt cx="0" cy="0"/>
+        </a:xfrm>
+      </p:grpSpPr>
+      <p:sp>
+        <p:nvSpPr>
+          <p:cNvPr id="2" name="Slide Image Placeholder 1"/>
+          <p:cNvSpPr>
+            <a:spLocks noGrp="1" noRot="1" noChangeAspect="1"/>
+          </p:cNvSpPr>
+          <p:nvPr>
+            <p:ph type="sldImg"/>
+          </p:nvPr>
+        </p:nvSpPr>
+        <p:spPr/>
+      </p:sp>
+      <p:sp>
+        <p:nvSpPr>
+          <p:cNvPr id="3" name="Notes Placeholder 2"/>
+          <p:cNvSpPr>
+            <a:spLocks noGrp="1"/>
+          </p:cNvSpPr>
+          <p:nvPr>
+            <p:ph type="body" idx="1"/>
+          </p:nvPr>
+        </p:nvSpPr>
+        <p:spPr/>
+        <p:txBody>
+          <a:bodyPr/>
+          <a:lstStyle/>
+          <a:p>
+            <a:r>
+              <a:rPr lang="en-GB" dirty="0"/>
+              <a:t>Experimental groups run L-R 4312.  The  other </a:t>
+            </a:r>
+            <a:r>
+              <a:rPr lang="en-GB" dirty="0" err="1"/>
+              <a:t>vairiables</a:t>
+            </a:r>
+            <a:r>
+              <a:rPr lang="en-GB" dirty="0"/>
+              <a:t> were used to validate that </a:t>
+            </a:r>
+            <a:r>
+              <a:rPr lang="en-GB" dirty="0" err="1"/>
+              <a:t>respondants</a:t>
+            </a:r>
+            <a:r>
+              <a:rPr lang="en-GB" dirty="0"/>
+              <a:t> accurately perceived the effect of warmth and outcome</a:t>
+            </a:r>
+          </a:p>
+        </p:txBody>
+      </p:sp>
+      <p:sp>
+        <p:nvSpPr>
+          <p:cNvPr id="4" name="Slide Number Placeholder 3"/>
+          <p:cNvSpPr>
+            <a:spLocks noGrp="1"/>
+          </p:cNvSpPr>
+          <p:nvPr>
+            <p:ph type="sldNum" sz="quarter" idx="5"/>
+          </p:nvPr>
+        </p:nvSpPr>
+        <p:spPr/>
+        <p:txBody>
+          <a:bodyPr/>
+          <a:lstStyle/>
+          <a:p>
+            <a:fld id="{4A9E1FE7-B59A-46E6-94E2-3F84D8B22038}" type="slidenum">
+              <a:rPr lang="en-GB" smtClean="0"/>
+              <a:t>6</a:t>
+            </a:fld>
+            <a:endParaRPr lang="en-GB"/>
+          </a:p>
+        </p:txBody>
+      </p:sp>
+    </p:spTree>
+    <p:extLst>
+      <p:ext uri="{BB962C8B-B14F-4D97-AF65-F5344CB8AC3E}">
+        <p14:creationId xmlns:p14="http://schemas.microsoft.com/office/powerpoint/2010/main" val="2943245155"/>
+      </p:ext>
+    </p:extLst>
+  </p:cSld>
+  <p:clrMapOvr>
+    <a:masterClrMapping/>
+  </p:clrMapOvr>
+</p:notes>
+</file>
+
+<file path=ppt/notesSlides/notesSlide5.xml><?xml version="1.0" encoding="utf-8"?>
+<p:notes xmlns:a="http://schemas.openxmlformats.org/drawingml/2006/main" xmlns:r="http://schemas.openxmlformats.org/officeDocument/2006/relationships" xmlns:p="http://schemas.openxmlformats.org/presentationml/2006/main">
+  <p:cSld>
+    <p:spTree>
+      <p:nvGrpSpPr>
+        <p:cNvPr id="1" name=""/>
+        <p:cNvGrpSpPr/>
+        <p:nvPr/>
+      </p:nvGrpSpPr>
+      <p:grpSpPr>
+        <a:xfrm>
+          <a:off x="0" y="0"/>
+          <a:ext cx="0" cy="0"/>
+          <a:chOff x="0" y="0"/>
+          <a:chExt cx="0" cy="0"/>
+        </a:xfrm>
+      </p:grpSpPr>
+      <p:sp>
+        <p:nvSpPr>
+          <p:cNvPr id="2" name="Slide Image Placeholder 1"/>
+          <p:cNvSpPr>
+            <a:spLocks noGrp="1" noRot="1" noChangeAspect="1"/>
+          </p:cNvSpPr>
+          <p:nvPr>
+            <p:ph type="sldImg"/>
+          </p:nvPr>
+        </p:nvSpPr>
+        <p:spPr/>
+      </p:sp>
+      <p:sp>
+        <p:nvSpPr>
+          <p:cNvPr id="3" name="Notes Placeholder 2"/>
+          <p:cNvSpPr>
+            <a:spLocks noGrp="1"/>
+          </p:cNvSpPr>
+          <p:nvPr>
+            <p:ph type="body" idx="1"/>
+          </p:nvPr>
+        </p:nvSpPr>
+        <p:spPr/>
+        <p:txBody>
+          <a:bodyPr/>
+          <a:lstStyle/>
+          <a:p>
+            <a:endParaRPr lang="en-GB" dirty="0"/>
+          </a:p>
+        </p:txBody>
+      </p:sp>
+      <p:sp>
+        <p:nvSpPr>
+          <p:cNvPr id="4" name="Slide Number Placeholder 3"/>
+          <p:cNvSpPr>
+            <a:spLocks noGrp="1"/>
+          </p:cNvSpPr>
+          <p:nvPr>
+            <p:ph type="sldNum" sz="quarter" idx="5"/>
+          </p:nvPr>
+        </p:nvSpPr>
+        <p:spPr/>
+        <p:txBody>
+          <a:bodyPr/>
+          <a:lstStyle/>
+          <a:p>
+            <a:fld id="{4A9E1FE7-B59A-46E6-94E2-3F84D8B22038}" type="slidenum">
+              <a:rPr lang="en-GB" smtClean="0"/>
+              <a:t>7</a:t>
+            </a:fld>
+            <a:endParaRPr lang="en-GB"/>
+          </a:p>
+        </p:txBody>
+      </p:sp>
+    </p:spTree>
+    <p:extLst>
+      <p:ext uri="{BB962C8B-B14F-4D97-AF65-F5344CB8AC3E}">
+        <p14:creationId xmlns:p14="http://schemas.microsoft.com/office/powerpoint/2010/main" val="1971084376"/>
+      </p:ext>
+    </p:extLst>
+  </p:cSld>
+  <p:clrMapOvr>
+    <a:masterClrMapping/>
+  </p:clrMapOvr>
+</p:notes>
+</file>
+
+<file path=ppt/notesSlides/notesSlide6.xml><?xml version="1.0" encoding="utf-8"?>
+<p:notes xmlns:a="http://schemas.openxmlformats.org/drawingml/2006/main" xmlns:r="http://schemas.openxmlformats.org/officeDocument/2006/relationships" xmlns:p="http://schemas.openxmlformats.org/presentationml/2006/main">
+  <p:cSld>
+    <p:spTree>
+      <p:nvGrpSpPr>
+        <p:cNvPr id="1" name=""/>
+        <p:cNvGrpSpPr/>
+        <p:nvPr/>
+      </p:nvGrpSpPr>
+      <p:grpSpPr>
+        <a:xfrm>
+          <a:off x="0" y="0"/>
+          <a:ext cx="0" cy="0"/>
+          <a:chOff x="0" y="0"/>
+          <a:chExt cx="0" cy="0"/>
+        </a:xfrm>
+      </p:grpSpPr>
+      <p:sp>
+        <p:nvSpPr>
+          <p:cNvPr id="2" name="Slide Image Placeholder 1"/>
+          <p:cNvSpPr>
+            <a:spLocks noGrp="1" noRot="1" noChangeAspect="1"/>
+          </p:cNvSpPr>
+          <p:nvPr>
+            <p:ph type="sldImg"/>
+          </p:nvPr>
+        </p:nvSpPr>
+        <p:spPr/>
+      </p:sp>
+      <mc:AlternateContent xmlns:mc="http://schemas.openxmlformats.org/markup-compatibility/2006" xmlns:a14="http://schemas.microsoft.com/office/drawing/2010/main">
+        <mc:Choice Requires="a14">
+          <p:sp>
+            <p:nvSpPr>
+              <p:cNvPr id="3" name="Notes Placeholder 2"/>
+              <p:cNvSpPr>
+                <a:spLocks noGrp="1"/>
+              </p:cNvSpPr>
+              <p:nvPr>
+                <p:ph type="body" idx="1"/>
+              </p:nvPr>
+            </p:nvSpPr>
+            <p:spPr/>
+            <p:txBody>
+              <a:bodyPr/>
+              <a:lstStyle/>
+              <a:p>
+                <a:pPr marL="0" marR="0" lvl="0" indent="0" algn="l" defTabSz="914400" rtl="0" eaLnBrk="1" fontAlgn="auto" latinLnBrk="0" hangingPunct="1">
+                  <a:lnSpc>
+                    <a:spcPct val="100000"/>
+                  </a:lnSpc>
+                  <a:spcBef>
+                    <a:spcPts val="0"/>
+                  </a:spcBef>
+                  <a:spcAft>
+                    <a:spcPts val="0"/>
+                  </a:spcAft>
+                  <a:buClrTx/>
+                  <a:buSzTx/>
+                  <a:buFontTx/>
+                  <a:buNone/>
+                  <a:tabLst/>
+                  <a:defRPr/>
+                </a:pPr>
+                <a:r>
+                  <a:rPr lang="en-GB" sz="1200" dirty="0">
+                    <a:latin typeface="CMU Sans Serif" panose="02000603000000000000" pitchFamily="2" charset="0"/>
+                    <a:ea typeface="CMU Sans Serif" panose="02000603000000000000" pitchFamily="2" charset="0"/>
+                    <a:cs typeface="CMU Sans Serif" panose="02000603000000000000" pitchFamily="2" charset="0"/>
+                  </a:rPr>
+                  <a:t>Although the interpretation is slightly less intuitive than OLS, this approach does make movement across the ordinal responses clear</a:t>
+                </a:r>
+              </a:p>
+              <a:p>
+                <a:pPr marL="0" marR="0" lvl="0" indent="0" algn="l" defTabSz="914400" rtl="0" eaLnBrk="1" fontAlgn="auto" latinLnBrk="0" hangingPunct="1">
+                  <a:lnSpc>
+                    <a:spcPct val="100000"/>
+                  </a:lnSpc>
+                  <a:spcBef>
+                    <a:spcPts val="0"/>
+                  </a:spcBef>
+                  <a:spcAft>
+                    <a:spcPts val="0"/>
+                  </a:spcAft>
+                  <a:buClrTx/>
+                  <a:buSzTx/>
+                  <a:buFontTx/>
+                  <a:buNone/>
+                  <a:tabLst/>
+                  <a:defRPr/>
+                </a:pPr>
+                <a:r>
+                  <a:rPr lang="en-GB" sz="1200" dirty="0">
+                    <a:latin typeface="CMU Sans Serif" panose="02000603000000000000" pitchFamily="2" charset="0"/>
+                    <a:ea typeface="CMU Sans Serif" panose="02000603000000000000" pitchFamily="2" charset="0"/>
+                    <a:cs typeface="CMU Sans Serif" panose="02000603000000000000" pitchFamily="2" charset="0"/>
+                  </a:rPr>
+                  <a:t>To obtain more interpretable results, the predicted probabilities of categories for each treatment group were calculated and then converted into an expected trust measure. </a:t>
+                </a:r>
+              </a:p>
+              <a:p>
+                <a:pPr marL="0" marR="0" lvl="0" indent="0" algn="l" defTabSz="914400" rtl="0" eaLnBrk="1" fontAlgn="auto" latinLnBrk="0" hangingPunct="1">
+                  <a:lnSpc>
+                    <a:spcPct val="100000"/>
+                  </a:lnSpc>
+                  <a:spcBef>
+                    <a:spcPts val="0"/>
+                  </a:spcBef>
+                  <a:spcAft>
+                    <a:spcPts val="0"/>
+                  </a:spcAft>
+                  <a:buClrTx/>
+                  <a:buSzTx/>
+                  <a:buFontTx/>
+                  <a:buNone/>
+                  <a:tabLst/>
+                  <a:defRPr/>
+                </a:pPr>
+                <a:endParaRPr lang="en-GB" sz="1200" dirty="0">
+                  <a:latin typeface="CMU Sans Serif" panose="02000603000000000000" pitchFamily="2" charset="0"/>
+                  <a:ea typeface="CMU Sans Serif" panose="02000603000000000000" pitchFamily="2" charset="0"/>
+                  <a:cs typeface="CMU Sans Serif" panose="02000603000000000000" pitchFamily="2" charset="0"/>
+                </a:endParaRPr>
+              </a:p>
+              <a:p>
+                <a:pPr marL="0" marR="0" lvl="0" indent="0" algn="l" defTabSz="914400" rtl="0" eaLnBrk="1" fontAlgn="auto" latinLnBrk="0" hangingPunct="1">
+                  <a:lnSpc>
+                    <a:spcPct val="100000"/>
+                  </a:lnSpc>
+                  <a:spcBef>
+                    <a:spcPts val="0"/>
+                  </a:spcBef>
+                  <a:spcAft>
+                    <a:spcPts val="0"/>
+                  </a:spcAft>
+                  <a:buClrTx/>
+                  <a:buSzTx/>
+                  <a:buFontTx/>
+                  <a:buNone/>
+                  <a:tabLst/>
+                  <a:defRPr/>
+                </a:pPr>
+                <a:r>
+                  <a:rPr lang="en-GB" sz="1200" dirty="0">
+                    <a:latin typeface="CMU Sans Serif" panose="02000603000000000000" pitchFamily="2" charset="0"/>
+                    <a:ea typeface="CMU Sans Serif" panose="02000603000000000000" pitchFamily="2" charset="0"/>
+                    <a:cs typeface="CMU Sans Serif" panose="02000603000000000000" pitchFamily="2" charset="0"/>
+                  </a:rPr>
+                  <a:t>E.g. For model 1 and holding all else constant, participants in the warmth condition have on average about 2 times higher odds of choosing a higher trust category than those not in the warmth treatment (</a:t>
+                </a:r>
+                <a14:m>
+                  <m:oMath xmlns:m="http://schemas.openxmlformats.org/officeDocument/2006/math">
+                    <m:r>
+                      <a:rPr lang="en-GB" sz="1200">
+                        <a:latin typeface="Cambria Math" panose="02040503050406030204" pitchFamily="18" charset="0"/>
+                      </a:rPr>
+                      <m:t>𝑂𝑅</m:t>
+                    </m:r>
+                    <m:r>
+                      <a:rPr lang="en-GB" sz="1200">
+                        <a:latin typeface="Cambria Math" panose="02040503050406030204" pitchFamily="18" charset="0"/>
+                      </a:rPr>
+                      <m:t> = </m:t>
+                    </m:r>
+                    <m:sSup>
+                      <m:sSupPr>
+                        <m:ctrlPr>
+                          <a:rPr lang="en-GB" sz="1200" i="1">
+                            <a:latin typeface="Cambria Math" panose="02040503050406030204" pitchFamily="18" charset="0"/>
+                          </a:rPr>
+                        </m:ctrlPr>
+                      </m:sSupPr>
+                      <m:e>
+                        <m:r>
+                          <a:rPr lang="en-GB" sz="1200">
+                            <a:latin typeface="Cambria Math" panose="02040503050406030204" pitchFamily="18" charset="0"/>
+                          </a:rPr>
+                          <m:t>𝑒</m:t>
+                        </m:r>
+                      </m:e>
+                      <m:sup>
+                        <m:r>
+                          <a:rPr lang="en-GB" sz="1200">
+                            <a:latin typeface="Cambria Math" panose="02040503050406030204" pitchFamily="18" charset="0"/>
+                          </a:rPr>
+                          <m:t>0.692</m:t>
+                        </m:r>
+                      </m:sup>
+                    </m:sSup>
+                    <m:r>
+                      <a:rPr lang="en-GB" sz="1200">
+                        <a:latin typeface="Cambria Math" panose="02040503050406030204" pitchFamily="18" charset="0"/>
+                      </a:rPr>
+                      <m:t> ≈ 1.99</m:t>
+                    </m:r>
+                  </m:oMath>
+                </a14:m>
+                <a:r>
+                  <a:rPr lang="en-GB" sz="1200" dirty="0">
+                    <a:latin typeface="CMU Sans Serif" panose="02000603000000000000" pitchFamily="2" charset="0"/>
+                    <a:ea typeface="CMU Sans Serif" panose="02000603000000000000" pitchFamily="2" charset="0"/>
+                    <a:cs typeface="CMU Sans Serif" panose="02000603000000000000" pitchFamily="2" charset="0"/>
+                  </a:rPr>
+                  <a:t>)</a:t>
+                </a:r>
+              </a:p>
+              <a:p>
+                <a:pPr marL="0" marR="0" lvl="0" indent="0" algn="l" defTabSz="914400" rtl="0" eaLnBrk="1" fontAlgn="auto" latinLnBrk="0" hangingPunct="1">
+                  <a:lnSpc>
+                    <a:spcPct val="100000"/>
+                  </a:lnSpc>
+                  <a:spcBef>
+                    <a:spcPts val="0"/>
+                  </a:spcBef>
+                  <a:spcAft>
+                    <a:spcPts val="0"/>
+                  </a:spcAft>
+                  <a:buClrTx/>
+                  <a:buSzTx/>
+                  <a:buFontTx/>
+                  <a:buNone/>
+                  <a:tabLst/>
+                  <a:defRPr/>
+                </a:pPr>
+                <a:r>
+                  <a:rPr lang="en-GB" sz="1200" dirty="0">
+                    <a:latin typeface="CMU Sans Serif" panose="02000603000000000000" pitchFamily="2" charset="0"/>
+                    <a:ea typeface="CMU Sans Serif" panose="02000603000000000000" pitchFamily="2" charset="0"/>
+                    <a:cs typeface="CMU Sans Serif" panose="02000603000000000000" pitchFamily="2" charset="0"/>
+                  </a:rPr>
+                  <a:t>E.g. For Unfavourable Low Warmth the Trust B in the simple model predicted mean trust score was 3.25 compared to the observed 3.38. </a:t>
+                </a:r>
+              </a:p>
+              <a:p>
+                <a:pPr marL="0" marR="0" lvl="0" indent="0" algn="l" defTabSz="914400" rtl="0" eaLnBrk="1" fontAlgn="auto" latinLnBrk="0" hangingPunct="1">
+                  <a:lnSpc>
+                    <a:spcPct val="100000"/>
+                  </a:lnSpc>
+                  <a:spcBef>
+                    <a:spcPts val="0"/>
+                  </a:spcBef>
+                  <a:spcAft>
+                    <a:spcPts val="0"/>
+                  </a:spcAft>
+                  <a:buClrTx/>
+                  <a:buSzTx/>
+                  <a:buFontTx/>
+                  <a:buNone/>
+                  <a:tabLst/>
+                  <a:defRPr/>
+                </a:pPr>
+                <a:endParaRPr lang="en-GB" sz="1200" dirty="0">
+                  <a:latin typeface="CMU Sans Serif" panose="02000603000000000000" pitchFamily="2" charset="0"/>
+                  <a:ea typeface="CMU Sans Serif" panose="02000603000000000000" pitchFamily="2" charset="0"/>
+                  <a:cs typeface="CMU Sans Serif" panose="02000603000000000000" pitchFamily="2" charset="0"/>
+                </a:endParaRPr>
+              </a:p>
+              <a:p>
+                <a:pPr marL="0" marR="0" lvl="0" indent="0" algn="l" defTabSz="914400" rtl="0" eaLnBrk="1" fontAlgn="auto" latinLnBrk="0" hangingPunct="1">
+                  <a:lnSpc>
+                    <a:spcPct val="100000"/>
+                  </a:lnSpc>
+                  <a:spcBef>
+                    <a:spcPts val="0"/>
+                  </a:spcBef>
+                  <a:spcAft>
+                    <a:spcPts val="0"/>
+                  </a:spcAft>
+                  <a:buClrTx/>
+                  <a:buSzTx/>
+                  <a:buFontTx/>
+                  <a:buNone/>
+                  <a:tabLst/>
+                  <a:defRPr/>
+                </a:pPr>
+                <a:endParaRPr lang="en-GB" sz="1200" dirty="0">
+                  <a:latin typeface="CMU Sans Serif" panose="02000603000000000000" pitchFamily="2" charset="0"/>
+                  <a:ea typeface="CMU Sans Serif" panose="02000603000000000000" pitchFamily="2" charset="0"/>
+                  <a:cs typeface="CMU Sans Serif" panose="02000603000000000000" pitchFamily="2" charset="0"/>
+                </a:endParaRPr>
+              </a:p>
+              <a:p>
+                <a:pPr marL="0" marR="0" lvl="0" indent="0" algn="l" defTabSz="914400" rtl="0" eaLnBrk="1" fontAlgn="auto" latinLnBrk="0" hangingPunct="1">
+                  <a:lnSpc>
+                    <a:spcPct val="100000"/>
+                  </a:lnSpc>
+                  <a:spcBef>
+                    <a:spcPts val="0"/>
+                  </a:spcBef>
+                  <a:spcAft>
+                    <a:spcPts val="0"/>
+                  </a:spcAft>
+                  <a:buClrTx/>
+                  <a:buSzTx/>
+                  <a:buFontTx/>
+                  <a:buNone/>
+                  <a:tabLst/>
+                  <a:defRPr/>
+                </a:pPr>
+                <a:endParaRPr lang="en-GB" sz="1200" dirty="0">
+                  <a:latin typeface="CMU Sans Serif" panose="02000603000000000000" pitchFamily="2" charset="0"/>
+                  <a:ea typeface="CMU Sans Serif" panose="02000603000000000000" pitchFamily="2" charset="0"/>
+                  <a:cs typeface="CMU Sans Serif" panose="02000603000000000000" pitchFamily="2" charset="0"/>
+                </a:endParaRPr>
+              </a:p>
+              <a:p>
+                <a:r>
+                  <a:rPr lang="en-GB" dirty="0"/>
+                  <a:t> </a:t>
+                </a:r>
+              </a:p>
+            </p:txBody>
+          </p:sp>
+        </mc:Choice>
+        <mc:Fallback xmlns="">
+          <p:sp>
+            <p:nvSpPr>
+              <p:cNvPr id="3" name="Notes Placeholder 2"/>
+              <p:cNvSpPr>
+                <a:spLocks noGrp="1"/>
+              </p:cNvSpPr>
+              <p:nvPr>
+                <p:ph type="body" idx="1"/>
+              </p:nvPr>
+            </p:nvSpPr>
+            <p:spPr/>
+            <p:txBody>
+              <a:bodyPr/>
+              <a:lstStyle/>
+              <a:p>
+                <a:pPr marL="0" marR="0" lvl="0" indent="0" algn="l" defTabSz="914400" rtl="0" eaLnBrk="1" fontAlgn="auto" latinLnBrk="0" hangingPunct="1">
+                  <a:lnSpc>
+                    <a:spcPct val="100000"/>
+                  </a:lnSpc>
+                  <a:spcBef>
+                    <a:spcPts val="0"/>
+                  </a:spcBef>
+                  <a:spcAft>
+                    <a:spcPts val="0"/>
+                  </a:spcAft>
+                  <a:buClrTx/>
+                  <a:buSzTx/>
+                  <a:buFontTx/>
+                  <a:buNone/>
+                  <a:tabLst/>
+                  <a:defRPr/>
+                </a:pPr>
+                <a:r>
+                  <a:rPr lang="en-GB" sz="1200" dirty="0">
+                    <a:latin typeface="CMU Sans Serif" panose="02000603000000000000" pitchFamily="2" charset="0"/>
+                    <a:ea typeface="CMU Sans Serif" panose="02000603000000000000" pitchFamily="2" charset="0"/>
+                    <a:cs typeface="CMU Sans Serif" panose="02000603000000000000" pitchFamily="2" charset="0"/>
+                  </a:rPr>
+                  <a:t>Although the interpretation is slightly less intuitive than OLS, this approach does make movement across the ordinal responses clear</a:t>
+                </a:r>
+              </a:p>
+              <a:p>
+                <a:pPr marL="0" marR="0" lvl="0" indent="0" algn="l" defTabSz="914400" rtl="0" eaLnBrk="1" fontAlgn="auto" latinLnBrk="0" hangingPunct="1">
+                  <a:lnSpc>
+                    <a:spcPct val="100000"/>
+                  </a:lnSpc>
+                  <a:spcBef>
+                    <a:spcPts val="0"/>
+                  </a:spcBef>
+                  <a:spcAft>
+                    <a:spcPts val="0"/>
+                  </a:spcAft>
+                  <a:buClrTx/>
+                  <a:buSzTx/>
+                  <a:buFontTx/>
+                  <a:buNone/>
+                  <a:tabLst/>
+                  <a:defRPr/>
+                </a:pPr>
+                <a:r>
+                  <a:rPr lang="en-GB" sz="1200" dirty="0">
+                    <a:latin typeface="CMU Sans Serif" panose="02000603000000000000" pitchFamily="2" charset="0"/>
+                    <a:ea typeface="CMU Sans Serif" panose="02000603000000000000" pitchFamily="2" charset="0"/>
+                    <a:cs typeface="CMU Sans Serif" panose="02000603000000000000" pitchFamily="2" charset="0"/>
+                  </a:rPr>
+                  <a:t>To obtain more interpretable results, the predicted probabilities of categories for each treatment group were calculated and then converted into an expected trust measure. </a:t>
+                </a:r>
+              </a:p>
+              <a:p>
+                <a:pPr marL="0" marR="0" lvl="0" indent="0" algn="l" defTabSz="914400" rtl="0" eaLnBrk="1" fontAlgn="auto" latinLnBrk="0" hangingPunct="1">
+                  <a:lnSpc>
+                    <a:spcPct val="100000"/>
+                  </a:lnSpc>
+                  <a:spcBef>
+                    <a:spcPts val="0"/>
+                  </a:spcBef>
+                  <a:spcAft>
+                    <a:spcPts val="0"/>
+                  </a:spcAft>
+                  <a:buClrTx/>
+                  <a:buSzTx/>
+                  <a:buFontTx/>
+                  <a:buNone/>
+                  <a:tabLst/>
+                  <a:defRPr/>
+                </a:pPr>
+                <a:endParaRPr lang="en-GB" sz="1200" dirty="0">
+                  <a:latin typeface="CMU Sans Serif" panose="02000603000000000000" pitchFamily="2" charset="0"/>
+                  <a:ea typeface="CMU Sans Serif" panose="02000603000000000000" pitchFamily="2" charset="0"/>
+                  <a:cs typeface="CMU Sans Serif" panose="02000603000000000000" pitchFamily="2" charset="0"/>
+                </a:endParaRPr>
+              </a:p>
+              <a:p>
+                <a:pPr marL="0" marR="0" lvl="0" indent="0" algn="l" defTabSz="914400" rtl="0" eaLnBrk="1" fontAlgn="auto" latinLnBrk="0" hangingPunct="1">
+                  <a:lnSpc>
+                    <a:spcPct val="100000"/>
+                  </a:lnSpc>
+                  <a:spcBef>
+                    <a:spcPts val="0"/>
+                  </a:spcBef>
+                  <a:spcAft>
+                    <a:spcPts val="0"/>
+                  </a:spcAft>
+                  <a:buClrTx/>
+                  <a:buSzTx/>
+                  <a:buFontTx/>
+                  <a:buNone/>
+                  <a:tabLst/>
+                  <a:defRPr/>
+                </a:pPr>
+                <a:r>
+                  <a:rPr lang="en-GB" sz="1200" dirty="0">
+                    <a:latin typeface="CMU Sans Serif" panose="02000603000000000000" pitchFamily="2" charset="0"/>
+                    <a:ea typeface="CMU Sans Serif" panose="02000603000000000000" pitchFamily="2" charset="0"/>
+                    <a:cs typeface="CMU Sans Serif" panose="02000603000000000000" pitchFamily="2" charset="0"/>
+                  </a:rPr>
+                  <a:t>E.g. For model 1 and holding all else constant, participants in the warmth condition have on average about 2 times higher odds of choosing a higher trust category than those not in the warmth treatment (</a:t>
+                </a:r>
+                <a:r>
+                  <a:rPr lang="en-GB" sz="1200" i="0">
+                    <a:latin typeface="Cambria Math" panose="02040503050406030204" pitchFamily="18" charset="0"/>
+                  </a:rPr>
+                  <a:t>𝑂𝑅 = 𝑒^0.692  ≈ 1.99</a:t>
+                </a:r>
+                <a:r>
+                  <a:rPr lang="en-GB" sz="1200" dirty="0">
+                    <a:latin typeface="CMU Sans Serif" panose="02000603000000000000" pitchFamily="2" charset="0"/>
+                    <a:ea typeface="CMU Sans Serif" panose="02000603000000000000" pitchFamily="2" charset="0"/>
+                    <a:cs typeface="CMU Sans Serif" panose="02000603000000000000" pitchFamily="2" charset="0"/>
+                  </a:rPr>
+                  <a:t>)</a:t>
+                </a:r>
+              </a:p>
+              <a:p>
+                <a:pPr marL="0" marR="0" lvl="0" indent="0" algn="l" defTabSz="914400" rtl="0" eaLnBrk="1" fontAlgn="auto" latinLnBrk="0" hangingPunct="1">
+                  <a:lnSpc>
+                    <a:spcPct val="100000"/>
+                  </a:lnSpc>
+                  <a:spcBef>
+                    <a:spcPts val="0"/>
+                  </a:spcBef>
+                  <a:spcAft>
+                    <a:spcPts val="0"/>
+                  </a:spcAft>
+                  <a:buClrTx/>
+                  <a:buSzTx/>
+                  <a:buFontTx/>
+                  <a:buNone/>
+                  <a:tabLst/>
+                  <a:defRPr/>
+                </a:pPr>
+                <a:r>
+                  <a:rPr lang="en-GB" sz="1200" dirty="0">
+                    <a:latin typeface="CMU Sans Serif" panose="02000603000000000000" pitchFamily="2" charset="0"/>
+                    <a:ea typeface="CMU Sans Serif" panose="02000603000000000000" pitchFamily="2" charset="0"/>
+                    <a:cs typeface="CMU Sans Serif" panose="02000603000000000000" pitchFamily="2" charset="0"/>
+                  </a:rPr>
+                  <a:t>E.g. For Unfavourable Low Warmth the Trust B in the simple model predicted mean trust score was 3.25 compared to the observed 3.38. </a:t>
+                </a:r>
+              </a:p>
+              <a:p>
+                <a:pPr marL="0" marR="0" lvl="0" indent="0" algn="l" defTabSz="914400" rtl="0" eaLnBrk="1" fontAlgn="auto" latinLnBrk="0" hangingPunct="1">
+                  <a:lnSpc>
+                    <a:spcPct val="100000"/>
+                  </a:lnSpc>
+                  <a:spcBef>
+                    <a:spcPts val="0"/>
+                  </a:spcBef>
+                  <a:spcAft>
+                    <a:spcPts val="0"/>
+                  </a:spcAft>
+                  <a:buClrTx/>
+                  <a:buSzTx/>
+                  <a:buFontTx/>
+                  <a:buNone/>
+                  <a:tabLst/>
+                  <a:defRPr/>
+                </a:pPr>
+                <a:endParaRPr lang="en-GB" sz="1200" dirty="0">
+                  <a:latin typeface="CMU Sans Serif" panose="02000603000000000000" pitchFamily="2" charset="0"/>
+                  <a:ea typeface="CMU Sans Serif" panose="02000603000000000000" pitchFamily="2" charset="0"/>
+                  <a:cs typeface="CMU Sans Serif" panose="02000603000000000000" pitchFamily="2" charset="0"/>
+                </a:endParaRPr>
+              </a:p>
+              <a:p>
+                <a:pPr marL="0" marR="0" lvl="0" indent="0" algn="l" defTabSz="914400" rtl="0" eaLnBrk="1" fontAlgn="auto" latinLnBrk="0" hangingPunct="1">
+                  <a:lnSpc>
+                    <a:spcPct val="100000"/>
+                  </a:lnSpc>
+                  <a:spcBef>
+                    <a:spcPts val="0"/>
+                  </a:spcBef>
+                  <a:spcAft>
+                    <a:spcPts val="0"/>
+                  </a:spcAft>
+                  <a:buClrTx/>
+                  <a:buSzTx/>
+                  <a:buFontTx/>
+                  <a:buNone/>
+                  <a:tabLst/>
+                  <a:defRPr/>
+                </a:pPr>
+                <a:endParaRPr lang="en-GB" sz="1200" dirty="0">
+                  <a:latin typeface="CMU Sans Serif" panose="02000603000000000000" pitchFamily="2" charset="0"/>
+                  <a:ea typeface="CMU Sans Serif" panose="02000603000000000000" pitchFamily="2" charset="0"/>
+                  <a:cs typeface="CMU Sans Serif" panose="02000603000000000000" pitchFamily="2" charset="0"/>
+                </a:endParaRPr>
+              </a:p>
+              <a:p>
+                <a:pPr marL="0" marR="0" lvl="0" indent="0" algn="l" defTabSz="914400" rtl="0" eaLnBrk="1" fontAlgn="auto" latinLnBrk="0" hangingPunct="1">
+                  <a:lnSpc>
+                    <a:spcPct val="100000"/>
+                  </a:lnSpc>
+                  <a:spcBef>
+                    <a:spcPts val="0"/>
+                  </a:spcBef>
+                  <a:spcAft>
+                    <a:spcPts val="0"/>
+                  </a:spcAft>
+                  <a:buClrTx/>
+                  <a:buSzTx/>
+                  <a:buFontTx/>
+                  <a:buNone/>
+                  <a:tabLst/>
+                  <a:defRPr/>
+                </a:pPr>
+                <a:endParaRPr lang="en-GB" sz="1200" dirty="0">
+                  <a:latin typeface="CMU Sans Serif" panose="02000603000000000000" pitchFamily="2" charset="0"/>
+                  <a:ea typeface="CMU Sans Serif" panose="02000603000000000000" pitchFamily="2" charset="0"/>
+                  <a:cs typeface="CMU Sans Serif" panose="02000603000000000000" pitchFamily="2" charset="0"/>
+                </a:endParaRPr>
+              </a:p>
+              <a:p>
+                <a:r>
+                  <a:rPr lang="en-GB" dirty="0"/>
+                  <a:t> </a:t>
+                </a:r>
+              </a:p>
+            </p:txBody>
+          </p:sp>
+        </mc:Fallback>
+      </mc:AlternateContent>
+      <p:sp>
+        <p:nvSpPr>
+          <p:cNvPr id="4" name="Slide Number Placeholder 3"/>
+          <p:cNvSpPr>
+            <a:spLocks noGrp="1"/>
+          </p:cNvSpPr>
+          <p:nvPr>
+            <p:ph type="sldNum" sz="quarter" idx="5"/>
+          </p:nvPr>
+        </p:nvSpPr>
+        <p:spPr/>
+        <p:txBody>
+          <a:bodyPr/>
+          <a:lstStyle/>
+          <a:p>
+            <a:fld id="{4A9E1FE7-B59A-46E6-94E2-3F84D8B22038}" type="slidenum">
+              <a:rPr lang="en-GB" smtClean="0"/>
+              <a:t>8</a:t>
+            </a:fld>
+            <a:endParaRPr lang="en-GB"/>
+          </a:p>
+        </p:txBody>
+      </p:sp>
+    </p:spTree>
+    <p:extLst>
+      <p:ext uri="{BB962C8B-B14F-4D97-AF65-F5344CB8AC3E}">
+        <p14:creationId xmlns:p14="http://schemas.microsoft.com/office/powerpoint/2010/main" val="2443299617"/>
+      </p:ext>
+    </p:extLst>
+  </p:cSld>
+  <p:clrMapOvr>
+    <a:masterClrMapping/>
+  </p:clrMapOvr>
+</p:notes>
+</file>
+
+<file path=ppt/notesSlides/notesSlide7.xml><?xml version="1.0" encoding="utf-8"?>
+<p:notes xmlns:a="http://schemas.openxmlformats.org/drawingml/2006/main" xmlns:r="http://schemas.openxmlformats.org/officeDocument/2006/relationships" xmlns:p="http://schemas.openxmlformats.org/presentationml/2006/main">
+  <p:cSld>
+    <p:spTree>
+      <p:nvGrpSpPr>
+        <p:cNvPr id="1" name=""/>
+        <p:cNvGrpSpPr/>
+        <p:nvPr/>
+      </p:nvGrpSpPr>
+      <p:grpSpPr>
+        <a:xfrm>
+          <a:off x="0" y="0"/>
+          <a:ext cx="0" cy="0"/>
+          <a:chOff x="0" y="0"/>
+          <a:chExt cx="0" cy="0"/>
+        </a:xfrm>
+      </p:grpSpPr>
+      <p:sp>
+        <p:nvSpPr>
+          <p:cNvPr id="2" name="Slide Image Placeholder 1"/>
+          <p:cNvSpPr>
+            <a:spLocks noGrp="1" noRot="1" noChangeAspect="1"/>
+          </p:cNvSpPr>
+          <p:nvPr>
+            <p:ph type="sldImg"/>
+          </p:nvPr>
+        </p:nvSpPr>
+        <p:spPr/>
+      </p:sp>
+      <p:sp>
+        <p:nvSpPr>
+          <p:cNvPr id="3" name="Notes Placeholder 2"/>
+          <p:cNvSpPr>
+            <a:spLocks noGrp="1"/>
+          </p:cNvSpPr>
+          <p:nvPr>
+            <p:ph type="body" idx="1"/>
+          </p:nvPr>
+        </p:nvSpPr>
+        <p:spPr/>
+        <p:txBody>
+          <a:bodyPr/>
+          <a:lstStyle/>
+          <a:p>
+            <a:pPr marL="0" marR="0" lvl="0" indent="0" algn="l" defTabSz="914400" rtl="0" eaLnBrk="1" fontAlgn="auto" latinLnBrk="0" hangingPunct="1">
+              <a:lnSpc>
+                <a:spcPct val="100000"/>
+              </a:lnSpc>
+              <a:spcBef>
+                <a:spcPts val="0"/>
+              </a:spcBef>
+              <a:spcAft>
+                <a:spcPts val="0"/>
+              </a:spcAft>
+              <a:buClrTx/>
+              <a:buSzTx/>
+              <a:buFontTx/>
+              <a:buNone/>
+              <a:tabLst/>
+              <a:defRPr/>
+            </a:pPr>
+            <a:r>
+              <a:rPr lang="en-GB" sz="1200" dirty="0">
+                <a:latin typeface="CMU Sans Serif" panose="02000603000000000000" pitchFamily="2" charset="0"/>
+                <a:ea typeface="CMU Sans Serif" panose="02000603000000000000" pitchFamily="2" charset="0"/>
+                <a:cs typeface="CMU Sans Serif" panose="02000603000000000000" pitchFamily="2" charset="0"/>
+              </a:rPr>
+              <a:t>as it assumes there is an unobserved latent scale that is mapped with ordinal cut-offs for the scaled ratings.</a:t>
+            </a:r>
+          </a:p>
+          <a:p>
+            <a:endParaRPr lang="en-GB" dirty="0"/>
+          </a:p>
+        </p:txBody>
+      </p:sp>
+      <p:sp>
+        <p:nvSpPr>
+          <p:cNvPr id="4" name="Slide Number Placeholder 3"/>
+          <p:cNvSpPr>
+            <a:spLocks noGrp="1"/>
+          </p:cNvSpPr>
+          <p:nvPr>
+            <p:ph type="sldNum" sz="quarter" idx="5"/>
+          </p:nvPr>
+        </p:nvSpPr>
+        <p:spPr/>
+        <p:txBody>
+          <a:bodyPr/>
+          <a:lstStyle/>
+          <a:p>
+            <a:fld id="{4A9E1FE7-B59A-46E6-94E2-3F84D8B22038}" type="slidenum">
+              <a:rPr lang="en-GB" smtClean="0"/>
+              <a:t>10</a:t>
+            </a:fld>
+            <a:endParaRPr lang="en-GB"/>
+          </a:p>
+        </p:txBody>
+      </p:sp>
+    </p:spTree>
+    <p:extLst>
+      <p:ext uri="{BB962C8B-B14F-4D97-AF65-F5344CB8AC3E}">
+        <p14:creationId xmlns:p14="http://schemas.microsoft.com/office/powerpoint/2010/main" val="3378670048"/>
+      </p:ext>
+    </p:extLst>
+  </p:cSld>
+  <p:clrMapOvr>
+    <a:masterClrMapping/>
+  </p:clrMapOvr>
+</p:notes>
+</file>
+
+<file path=ppt/notesSlides/notesSlide8.xml><?xml version="1.0" encoding="utf-8"?>
+<p:notes xmlns:a="http://schemas.openxmlformats.org/drawingml/2006/main" xmlns:r="http://schemas.openxmlformats.org/officeDocument/2006/relationships" xmlns:p="http://schemas.openxmlformats.org/presentationml/2006/main">
+  <p:cSld>
+    <p:spTree>
+      <p:nvGrpSpPr>
+        <p:cNvPr id="1" name=""/>
+        <p:cNvGrpSpPr/>
+        <p:nvPr/>
+      </p:nvGrpSpPr>
+      <p:grpSpPr>
+        <a:xfrm>
+          <a:off x="0" y="0"/>
+          <a:ext cx="0" cy="0"/>
+          <a:chOff x="0" y="0"/>
+          <a:chExt cx="0" cy="0"/>
+        </a:xfrm>
+      </p:grpSpPr>
+      <p:sp>
+        <p:nvSpPr>
+          <p:cNvPr id="2" name="Slide Image Placeholder 1"/>
+          <p:cNvSpPr>
+            <a:spLocks noGrp="1" noRot="1" noChangeAspect="1"/>
+          </p:cNvSpPr>
+          <p:nvPr>
+            <p:ph type="sldImg"/>
+          </p:nvPr>
+        </p:nvSpPr>
+        <p:spPr/>
+      </p:sp>
+      <p:sp>
+        <p:nvSpPr>
+          <p:cNvPr id="3" name="Notes Placeholder 2"/>
+          <p:cNvSpPr>
+            <a:spLocks noGrp="1"/>
+          </p:cNvSpPr>
+          <p:nvPr>
+            <p:ph type="body" idx="1"/>
+          </p:nvPr>
+        </p:nvSpPr>
+        <p:spPr/>
+        <p:txBody>
+          <a:bodyPr/>
+          <a:lstStyle/>
+          <a:p>
+            <a:r>
+              <a:rPr lang="en-GB" dirty="0"/>
+              <a:t>Created predictions for 4 treatment conditions using posterior </a:t>
+            </a:r>
+          </a:p>
+        </p:txBody>
+      </p:sp>
+      <p:sp>
+        <p:nvSpPr>
+          <p:cNvPr id="4" name="Slide Number Placeholder 3"/>
+          <p:cNvSpPr>
+            <a:spLocks noGrp="1"/>
+          </p:cNvSpPr>
+          <p:nvPr>
+            <p:ph type="sldNum" sz="quarter" idx="5"/>
+          </p:nvPr>
+        </p:nvSpPr>
+        <p:spPr/>
+        <p:txBody>
+          <a:bodyPr/>
+          <a:lstStyle/>
+          <a:p>
+            <a:fld id="{4A9E1FE7-B59A-46E6-94E2-3F84D8B22038}" type="slidenum">
+              <a:rPr lang="en-GB" smtClean="0"/>
+              <a:t>11</a:t>
+            </a:fld>
+            <a:endParaRPr lang="en-GB"/>
+          </a:p>
+        </p:txBody>
+      </p:sp>
+    </p:spTree>
+    <p:extLst>
+      <p:ext uri="{BB962C8B-B14F-4D97-AF65-F5344CB8AC3E}">
+        <p14:creationId xmlns:p14="http://schemas.microsoft.com/office/powerpoint/2010/main" val="3615134228"/>
+      </p:ext>
+    </p:extLst>
+  </p:cSld>
+  <p:clrMapOvr>
+    <a:masterClrMapping/>
+  </p:clrMapOvr>
+</p:notes>
+</file>
+
 <file path=ppt/slideLayouts/slideLayout1.xml><?xml version="1.0" encoding="utf-8"?>
 <p:sldLayout xmlns:a="http://schemas.openxmlformats.org/drawingml/2006/main" xmlns:r="http://schemas.openxmlformats.org/officeDocument/2006/relationships" xmlns:p="http://schemas.openxmlformats.org/presentationml/2006/main" type="title" preserve="1">
   <p:cSld name="Title Slide">
@@ -3013,7 +4299,7 @@
           <a:p>
             <a:fld id="{E7F70DEA-7865-4DF2-B4A9-B9F96E74F439}" type="datetimeFigureOut">
               <a:rPr lang="en-GB" smtClean="0"/>
-              <a:t>01/04/2026</a:t>
+              <a:t>07/04/2026</a:t>
             </a:fld>
             <a:endParaRPr lang="en-GB"/>
           </a:p>
@@ -3183,7 +4469,7 @@
           <a:p>
             <a:fld id="{E7F70DEA-7865-4DF2-B4A9-B9F96E74F439}" type="datetimeFigureOut">
               <a:rPr lang="en-GB" smtClean="0"/>
-              <a:t>01/04/2026</a:t>
+              <a:t>07/04/2026</a:t>
             </a:fld>
             <a:endParaRPr lang="en-GB"/>
           </a:p>
@@ -3363,7 +4649,7 @@
           <a:p>
             <a:fld id="{E7F70DEA-7865-4DF2-B4A9-B9F96E74F439}" type="datetimeFigureOut">
               <a:rPr lang="en-GB" smtClean="0"/>
-              <a:t>01/04/2026</a:t>
+              <a:t>07/04/2026</a:t>
             </a:fld>
             <a:endParaRPr lang="en-GB"/>
           </a:p>
@@ -3533,7 +4819,7 @@
           <a:p>
             <a:fld id="{E7F70DEA-7865-4DF2-B4A9-B9F96E74F439}" type="datetimeFigureOut">
               <a:rPr lang="en-GB" smtClean="0"/>
-              <a:t>01/04/2026</a:t>
+              <a:t>07/04/2026</a:t>
             </a:fld>
             <a:endParaRPr lang="en-GB"/>
           </a:p>
@@ -3779,7 +5065,7 @@
           <a:p>
             <a:fld id="{E7F70DEA-7865-4DF2-B4A9-B9F96E74F439}" type="datetimeFigureOut">
               <a:rPr lang="en-GB" smtClean="0"/>
-              <a:t>01/04/2026</a:t>
+              <a:t>07/04/2026</a:t>
             </a:fld>
             <a:endParaRPr lang="en-GB"/>
           </a:p>
@@ -4011,7 +5297,7 @@
           <a:p>
             <a:fld id="{E7F70DEA-7865-4DF2-B4A9-B9F96E74F439}" type="datetimeFigureOut">
               <a:rPr lang="en-GB" smtClean="0"/>
-              <a:t>01/04/2026</a:t>
+              <a:t>07/04/2026</a:t>
             </a:fld>
             <a:endParaRPr lang="en-GB"/>
           </a:p>
@@ -4378,7 +5664,7 @@
           <a:p>
             <a:fld id="{E7F70DEA-7865-4DF2-B4A9-B9F96E74F439}" type="datetimeFigureOut">
               <a:rPr lang="en-GB" smtClean="0"/>
-              <a:t>01/04/2026</a:t>
+              <a:t>07/04/2026</a:t>
             </a:fld>
             <a:endParaRPr lang="en-GB"/>
           </a:p>
@@ -4496,7 +5782,7 @@
           <a:p>
             <a:fld id="{E7F70DEA-7865-4DF2-B4A9-B9F96E74F439}" type="datetimeFigureOut">
               <a:rPr lang="en-GB" smtClean="0"/>
-              <a:t>01/04/2026</a:t>
+              <a:t>07/04/2026</a:t>
             </a:fld>
             <a:endParaRPr lang="en-GB"/>
           </a:p>
@@ -4591,7 +5877,7 @@
           <a:p>
             <a:fld id="{E7F70DEA-7865-4DF2-B4A9-B9F96E74F439}" type="datetimeFigureOut">
               <a:rPr lang="en-GB" smtClean="0"/>
-              <a:t>01/04/2026</a:t>
+              <a:t>07/04/2026</a:t>
             </a:fld>
             <a:endParaRPr lang="en-GB"/>
           </a:p>
@@ -4868,7 +6154,7 @@
           <a:p>
             <a:fld id="{E7F70DEA-7865-4DF2-B4A9-B9F96E74F439}" type="datetimeFigureOut">
               <a:rPr lang="en-GB" smtClean="0"/>
-              <a:t>01/04/2026</a:t>
+              <a:t>07/04/2026</a:t>
             </a:fld>
             <a:endParaRPr lang="en-GB"/>
           </a:p>
@@ -5125,7 +6411,7 @@
           <a:p>
             <a:fld id="{E7F70DEA-7865-4DF2-B4A9-B9F96E74F439}" type="datetimeFigureOut">
               <a:rPr lang="en-GB" smtClean="0"/>
-              <a:t>01/04/2026</a:t>
+              <a:t>07/04/2026</a:t>
             </a:fld>
             <a:endParaRPr lang="en-GB"/>
           </a:p>
@@ -5338,7 +6624,7 @@
             <a:fld id="{E7F70DEA-7865-4DF2-B4A9-B9F96E74F439}" type="datetimeFigureOut">
               <a:rPr lang="en-GB" smtClean="0"/>
               <a:pPr/>
-              <a:t>01/04/2026</a:t>
+              <a:t>07/04/2026</a:t>
             </a:fld>
             <a:endParaRPr lang="en-GB" dirty="0"/>
           </a:p>
@@ -5820,6 +7106,53 @@
           </a:p>
         </p:txBody>
       </p:sp>
+      <p:sp>
+        <p:nvSpPr>
+          <p:cNvPr id="3" name="TextBox 2">
+            <a:extLst>
+              <a:ext uri="{FF2B5EF4-FFF2-40B4-BE49-F238E27FC236}">
+                <a16:creationId xmlns:a16="http://schemas.microsoft.com/office/drawing/2014/main" id="{7767135C-F22E-1F14-C935-905338F88174}"/>
+              </a:ext>
+            </a:extLst>
+          </p:cNvPr>
+          <p:cNvSpPr txBox="1"/>
+          <p:nvPr/>
+        </p:nvSpPr>
+        <p:spPr>
+          <a:xfrm>
+            <a:off x="685800" y="6346206"/>
+            <a:ext cx="6097554" cy="369332"/>
+          </a:xfrm>
+          <a:prstGeom prst="rect">
+            <a:avLst/>
+          </a:prstGeom>
+          <a:noFill/>
+        </p:spPr>
+        <p:txBody>
+          <a:bodyPr wrap="square">
+            <a:spAutoFit/>
+          </a:bodyPr>
+          <a:lstStyle/>
+          <a:p>
+            <a:r>
+              <a:rPr lang="en-GB" sz="1800" dirty="0">
+                <a:latin typeface="DM Serif Display" pitchFamily="2" charset="0"/>
+              </a:rPr>
+              <a:t>Ellen  Beattie - </a:t>
+            </a:r>
+            <a:r>
+              <a:rPr lang="en-GB" sz="1800" dirty="0">
+                <a:latin typeface="DM Serif Display" pitchFamily="2" charset="0"/>
+                <a:hlinkClick r:id="rId3"/>
+              </a:rPr>
+              <a:t>beattie1@tcd.ie</a:t>
+            </a:r>
+            <a:endParaRPr lang="en-GB" sz="1800" dirty="0">
+              <a:latin typeface="DM Serif Display" pitchFamily="2" charset="0"/>
+            </a:endParaRPr>
+          </a:p>
+        </p:txBody>
+      </p:sp>
     </p:spTree>
   </p:cSld>
   <p:clrMapOvr>
@@ -5829,6 +7162,711 @@
 </file>
 
 <file path=ppt/slides/slide10.xml><?xml version="1.0" encoding="utf-8"?>
+<p:sld xmlns:a="http://schemas.openxmlformats.org/drawingml/2006/main" xmlns:r="http://schemas.openxmlformats.org/officeDocument/2006/relationships" xmlns:p="http://schemas.openxmlformats.org/presentationml/2006/main">
+  <p:cSld>
+    <p:bg>
+      <p:bgPr>
+        <a:solidFill>
+          <a:schemeClr val="bg1"/>
+        </a:solidFill>
+        <a:effectLst/>
+      </p:bgPr>
+    </p:bg>
+    <p:spTree>
+      <p:nvGrpSpPr>
+        <p:cNvPr id="1" name=""/>
+        <p:cNvGrpSpPr/>
+        <p:nvPr/>
+      </p:nvGrpSpPr>
+      <p:grpSpPr>
+        <a:xfrm>
+          <a:off x="0" y="0"/>
+          <a:ext cx="0" cy="0"/>
+          <a:chOff x="0" y="0"/>
+          <a:chExt cx="0" cy="0"/>
+        </a:xfrm>
+      </p:grpSpPr>
+      <p:sp useBgFill="1">
+        <p:nvSpPr>
+          <p:cNvPr id="24" name="Rectangle 23">
+            <a:extLst>
+              <a:ext uri="{FF2B5EF4-FFF2-40B4-BE49-F238E27FC236}">
+                <a16:creationId xmlns:a16="http://schemas.microsoft.com/office/drawing/2014/main" id="{53B475F8-50AE-46A0-9943-B2B63183D50C}"/>
+              </a:ext>
+              <a:ext uri="{C183D7F6-B498-43B3-948B-1728B52AA6E4}">
+                <adec:decorative xmlns:adec="http://schemas.microsoft.com/office/drawing/2017/decorative" val="1"/>
+              </a:ext>
+            </a:extLst>
+          </p:cNvPr>
+          <p:cNvSpPr>
+            <a:spLocks noGrp="1" noRot="1" noChangeAspect="1" noMove="1" noResize="1" noEditPoints="1" noAdjustHandles="1" noChangeArrowheads="1" noChangeShapeType="1" noTextEdit="1"/>
+          </p:cNvSpPr>
+          <p:nvPr>
+            <p:extLst>
+              <p:ext uri="{386F3935-93C4-4BCD-93E2-E3B085C9AB24}">
+                <p16:designElem xmlns:p16="http://schemas.microsoft.com/office/powerpoint/2015/main" val="1"/>
+              </p:ext>
+            </p:extLst>
+          </p:nvPr>
+        </p:nvSpPr>
+        <p:spPr>
+          <a:xfrm>
+            <a:off x="0" y="0"/>
+            <a:ext cx="12188952" cy="6858000"/>
+          </a:xfrm>
+          <a:prstGeom prst="rect">
+            <a:avLst/>
+          </a:prstGeom>
+          <a:ln>
+            <a:noFill/>
+          </a:ln>
+        </p:spPr>
+        <p:style>
+          <a:lnRef idx="2">
+            <a:schemeClr val="accent1">
+              <a:shade val="50000"/>
+            </a:schemeClr>
+          </a:lnRef>
+          <a:fillRef idx="1">
+            <a:schemeClr val="accent1"/>
+          </a:fillRef>
+          <a:effectRef idx="0">
+            <a:schemeClr val="accent1"/>
+          </a:effectRef>
+          <a:fontRef idx="minor">
+            <a:schemeClr val="lt1"/>
+          </a:fontRef>
+        </p:style>
+        <p:txBody>
+          <a:bodyPr rtlCol="0" anchor="ctr"/>
+          <a:lstStyle/>
+          <a:p>
+            <a:pPr algn="ctr"/>
+            <a:endParaRPr lang="en-US"/>
+          </a:p>
+        </p:txBody>
+      </p:sp>
+      <p:sp>
+        <p:nvSpPr>
+          <p:cNvPr id="2" name="Title 1">
+            <a:extLst>
+              <a:ext uri="{FF2B5EF4-FFF2-40B4-BE49-F238E27FC236}">
+                <a16:creationId xmlns:a16="http://schemas.microsoft.com/office/drawing/2014/main" id="{27B84957-DB0F-668D-AE2D-17D041EAADAB}"/>
+              </a:ext>
+            </a:extLst>
+          </p:cNvPr>
+          <p:cNvSpPr>
+            <a:spLocks noGrp="1"/>
+          </p:cNvSpPr>
+          <p:nvPr>
+            <p:ph type="title"/>
+          </p:nvPr>
+        </p:nvSpPr>
+        <p:spPr>
+          <a:xfrm>
+            <a:off x="186651" y="-67181"/>
+            <a:ext cx="12329652" cy="809170"/>
+          </a:xfrm>
+          <a:noFill/>
+          <a:ln>
+            <a:noFill/>
+          </a:ln>
+        </p:spPr>
+        <p:txBody>
+          <a:bodyPr anchor="b">
+            <a:normAutofit/>
+          </a:bodyPr>
+          <a:lstStyle/>
+          <a:p>
+            <a:r>
+              <a:rPr lang="en-GB" sz="3600" dirty="0"/>
+              <a:t>Extension - Ordered Beta Regression</a:t>
+            </a:r>
+          </a:p>
+        </p:txBody>
+      </p:sp>
+      <p:pic>
+        <p:nvPicPr>
+          <p:cNvPr id="19" name="Picture 18" descr="A screenshot of a graph&#10;&#10;AI-generated content may be incorrect.">
+            <a:extLst>
+              <a:ext uri="{FF2B5EF4-FFF2-40B4-BE49-F238E27FC236}">
+                <a16:creationId xmlns:a16="http://schemas.microsoft.com/office/drawing/2014/main" id="{29F5565D-E9F3-97B1-EA03-28E9B924445E}"/>
+              </a:ext>
+            </a:extLst>
+          </p:cNvPr>
+          <p:cNvPicPr>
+            <a:picLocks noChangeAspect="1"/>
+          </p:cNvPicPr>
+          <p:nvPr/>
+        </p:nvPicPr>
+        <p:blipFill>
+          <a:blip r:embed="rId3"/>
+          <a:stretch>
+            <a:fillRect/>
+          </a:stretch>
+        </p:blipFill>
+        <p:spPr>
+          <a:xfrm>
+            <a:off x="5877647" y="5241073"/>
+            <a:ext cx="6131776" cy="1348989"/>
+          </a:xfrm>
+          <a:prstGeom prst="rect">
+            <a:avLst/>
+          </a:prstGeom>
+        </p:spPr>
+      </p:pic>
+      <p:sp>
+        <p:nvSpPr>
+          <p:cNvPr id="26" name="sketch line">
+            <a:extLst>
+              <a:ext uri="{FF2B5EF4-FFF2-40B4-BE49-F238E27FC236}">
+                <a16:creationId xmlns:a16="http://schemas.microsoft.com/office/drawing/2014/main" id="{75F6FDB4-2351-48C2-A863-2364A02343C0}"/>
+              </a:ext>
+              <a:ext uri="{C183D7F6-B498-43B3-948B-1728B52AA6E4}">
+                <adec:decorative xmlns:adec="http://schemas.microsoft.com/office/drawing/2017/decorative" val="1"/>
+              </a:ext>
+            </a:extLst>
+          </p:cNvPr>
+          <p:cNvSpPr>
+            <a:spLocks noGrp="1" noRot="1" noChangeAspect="1" noMove="1" noResize="1" noEditPoints="1" noAdjustHandles="1" noChangeArrowheads="1" noChangeShapeType="1" noTextEdit="1"/>
+          </p:cNvSpPr>
+          <p:nvPr>
+            <p:extLst>
+              <p:ext uri="{386F3935-93C4-4BCD-93E2-E3B085C9AB24}">
+                <p16:designElem xmlns:p16="http://schemas.microsoft.com/office/powerpoint/2015/main" val="1"/>
+              </p:ext>
+            </p:extLst>
+          </p:nvPr>
+        </p:nvSpPr>
+        <p:spPr>
+          <a:xfrm>
+            <a:off x="838200" y="2315691"/>
+            <a:ext cx="4343400" cy="18288"/>
+          </a:xfrm>
+          <a:custGeom>
+            <a:avLst/>
+            <a:gdLst>
+              <a:gd name="connsiteX0" fmla="*/ 0 w 4343400"/>
+              <a:gd name="connsiteY0" fmla="*/ 0 h 18288"/>
+              <a:gd name="connsiteX1" fmla="*/ 577052 w 4343400"/>
+              <a:gd name="connsiteY1" fmla="*/ 0 h 18288"/>
+              <a:gd name="connsiteX2" fmla="*/ 1067235 w 4343400"/>
+              <a:gd name="connsiteY2" fmla="*/ 0 h 18288"/>
+              <a:gd name="connsiteX3" fmla="*/ 1600853 w 4343400"/>
+              <a:gd name="connsiteY3" fmla="*/ 0 h 18288"/>
+              <a:gd name="connsiteX4" fmla="*/ 2264773 w 4343400"/>
+              <a:gd name="connsiteY4" fmla="*/ 0 h 18288"/>
+              <a:gd name="connsiteX5" fmla="*/ 2841825 w 4343400"/>
+              <a:gd name="connsiteY5" fmla="*/ 0 h 18288"/>
+              <a:gd name="connsiteX6" fmla="*/ 3375442 w 4343400"/>
+              <a:gd name="connsiteY6" fmla="*/ 0 h 18288"/>
+              <a:gd name="connsiteX7" fmla="*/ 4343400 w 4343400"/>
+              <a:gd name="connsiteY7" fmla="*/ 0 h 18288"/>
+              <a:gd name="connsiteX8" fmla="*/ 4343400 w 4343400"/>
+              <a:gd name="connsiteY8" fmla="*/ 18288 h 18288"/>
+              <a:gd name="connsiteX9" fmla="*/ 3722914 w 4343400"/>
+              <a:gd name="connsiteY9" fmla="*/ 18288 h 18288"/>
+              <a:gd name="connsiteX10" fmla="*/ 3189297 w 4343400"/>
+              <a:gd name="connsiteY10" fmla="*/ 18288 h 18288"/>
+              <a:gd name="connsiteX11" fmla="*/ 2481943 w 4343400"/>
+              <a:gd name="connsiteY11" fmla="*/ 18288 h 18288"/>
+              <a:gd name="connsiteX12" fmla="*/ 1904891 w 4343400"/>
+              <a:gd name="connsiteY12" fmla="*/ 18288 h 18288"/>
+              <a:gd name="connsiteX13" fmla="*/ 1414707 w 4343400"/>
+              <a:gd name="connsiteY13" fmla="*/ 18288 h 18288"/>
+              <a:gd name="connsiteX14" fmla="*/ 750788 w 4343400"/>
+              <a:gd name="connsiteY14" fmla="*/ 18288 h 18288"/>
+              <a:gd name="connsiteX15" fmla="*/ 0 w 4343400"/>
+              <a:gd name="connsiteY15" fmla="*/ 18288 h 18288"/>
+              <a:gd name="connsiteX16" fmla="*/ 0 w 4343400"/>
+              <a:gd name="connsiteY16" fmla="*/ 0 h 18288"/>
+            </a:gdLst>
+            <a:ahLst/>
+            <a:cxnLst>
+              <a:cxn ang="0">
+                <a:pos x="connsiteX0" y="connsiteY0"/>
+              </a:cxn>
+              <a:cxn ang="0">
+                <a:pos x="connsiteX1" y="connsiteY1"/>
+              </a:cxn>
+              <a:cxn ang="0">
+                <a:pos x="connsiteX2" y="connsiteY2"/>
+              </a:cxn>
+              <a:cxn ang="0">
+                <a:pos x="connsiteX3" y="connsiteY3"/>
+              </a:cxn>
+              <a:cxn ang="0">
+                <a:pos x="connsiteX4" y="connsiteY4"/>
+              </a:cxn>
+              <a:cxn ang="0">
+                <a:pos x="connsiteX5" y="connsiteY5"/>
+              </a:cxn>
+              <a:cxn ang="0">
+                <a:pos x="connsiteX6" y="connsiteY6"/>
+              </a:cxn>
+              <a:cxn ang="0">
+                <a:pos x="connsiteX7" y="connsiteY7"/>
+              </a:cxn>
+              <a:cxn ang="0">
+                <a:pos x="connsiteX8" y="connsiteY8"/>
+              </a:cxn>
+              <a:cxn ang="0">
+                <a:pos x="connsiteX9" y="connsiteY9"/>
+              </a:cxn>
+              <a:cxn ang="0">
+                <a:pos x="connsiteX10" y="connsiteY10"/>
+              </a:cxn>
+              <a:cxn ang="0">
+                <a:pos x="connsiteX11" y="connsiteY11"/>
+              </a:cxn>
+              <a:cxn ang="0">
+                <a:pos x="connsiteX12" y="connsiteY12"/>
+              </a:cxn>
+              <a:cxn ang="0">
+                <a:pos x="connsiteX13" y="connsiteY13"/>
+              </a:cxn>
+              <a:cxn ang="0">
+                <a:pos x="connsiteX14" y="connsiteY14"/>
+              </a:cxn>
+              <a:cxn ang="0">
+                <a:pos x="connsiteX15" y="connsiteY15"/>
+              </a:cxn>
+              <a:cxn ang="0">
+                <a:pos x="connsiteX16" y="connsiteY16"/>
+              </a:cxn>
+            </a:cxnLst>
+            <a:rect l="l" t="t" r="r" b="b"/>
+            <a:pathLst>
+              <a:path w="4343400" h="18288" fill="none" extrusionOk="0">
+                <a:moveTo>
+                  <a:pt x="0" y="0"/>
+                </a:moveTo>
+                <a:cubicBezTo>
+                  <a:pt x="233209" y="-19550"/>
+                  <a:pt x="330816" y="19068"/>
+                  <a:pt x="577052" y="0"/>
+                </a:cubicBezTo>
+                <a:cubicBezTo>
+                  <a:pt x="823288" y="-19068"/>
+                  <a:pt x="875077" y="10360"/>
+                  <a:pt x="1067235" y="0"/>
+                </a:cubicBezTo>
+                <a:cubicBezTo>
+                  <a:pt x="1259393" y="-10360"/>
+                  <a:pt x="1410699" y="2939"/>
+                  <a:pt x="1600853" y="0"/>
+                </a:cubicBezTo>
+                <a:cubicBezTo>
+                  <a:pt x="1791007" y="-2939"/>
+                  <a:pt x="2101644" y="-26225"/>
+                  <a:pt x="2264773" y="0"/>
+                </a:cubicBezTo>
+                <a:cubicBezTo>
+                  <a:pt x="2427902" y="26225"/>
+                  <a:pt x="2690426" y="-27726"/>
+                  <a:pt x="2841825" y="0"/>
+                </a:cubicBezTo>
+                <a:cubicBezTo>
+                  <a:pt x="2993224" y="27726"/>
+                  <a:pt x="3172320" y="-18569"/>
+                  <a:pt x="3375442" y="0"/>
+                </a:cubicBezTo>
+                <a:cubicBezTo>
+                  <a:pt x="3578564" y="18569"/>
+                  <a:pt x="4003119" y="21909"/>
+                  <a:pt x="4343400" y="0"/>
+                </a:cubicBezTo>
+                <a:cubicBezTo>
+                  <a:pt x="4343798" y="7429"/>
+                  <a:pt x="4343380" y="10822"/>
+                  <a:pt x="4343400" y="18288"/>
+                </a:cubicBezTo>
+                <a:cubicBezTo>
+                  <a:pt x="4109047" y="14709"/>
+                  <a:pt x="3996986" y="7919"/>
+                  <a:pt x="3722914" y="18288"/>
+                </a:cubicBezTo>
+                <a:cubicBezTo>
+                  <a:pt x="3448842" y="28657"/>
+                  <a:pt x="3340973" y="29252"/>
+                  <a:pt x="3189297" y="18288"/>
+                </a:cubicBezTo>
+                <a:cubicBezTo>
+                  <a:pt x="3037621" y="7324"/>
+                  <a:pt x="2636891" y="-9539"/>
+                  <a:pt x="2481943" y="18288"/>
+                </a:cubicBezTo>
+                <a:cubicBezTo>
+                  <a:pt x="2326995" y="46115"/>
+                  <a:pt x="2131632" y="740"/>
+                  <a:pt x="1904891" y="18288"/>
+                </a:cubicBezTo>
+                <a:cubicBezTo>
+                  <a:pt x="1678150" y="35836"/>
+                  <a:pt x="1575362" y="-3381"/>
+                  <a:pt x="1414707" y="18288"/>
+                </a:cubicBezTo>
+                <a:cubicBezTo>
+                  <a:pt x="1254052" y="39957"/>
+                  <a:pt x="1051093" y="-335"/>
+                  <a:pt x="750788" y="18288"/>
+                </a:cubicBezTo>
+                <a:cubicBezTo>
+                  <a:pt x="450483" y="36911"/>
+                  <a:pt x="293781" y="22900"/>
+                  <a:pt x="0" y="18288"/>
+                </a:cubicBezTo>
+                <a:cubicBezTo>
+                  <a:pt x="-591" y="13205"/>
+                  <a:pt x="-663" y="6329"/>
+                  <a:pt x="0" y="0"/>
+                </a:cubicBezTo>
+                <a:close/>
+              </a:path>
+              <a:path w="4343400" h="18288" stroke="0" extrusionOk="0">
+                <a:moveTo>
+                  <a:pt x="0" y="0"/>
+                </a:moveTo>
+                <a:cubicBezTo>
+                  <a:pt x="212719" y="-28531"/>
+                  <a:pt x="340561" y="-1164"/>
+                  <a:pt x="577052" y="0"/>
+                </a:cubicBezTo>
+                <a:cubicBezTo>
+                  <a:pt x="813543" y="1164"/>
+                  <a:pt x="866967" y="-9376"/>
+                  <a:pt x="1067235" y="0"/>
+                </a:cubicBezTo>
+                <a:cubicBezTo>
+                  <a:pt x="1267503" y="9376"/>
+                  <a:pt x="1485778" y="-20470"/>
+                  <a:pt x="1774589" y="0"/>
+                </a:cubicBezTo>
+                <a:cubicBezTo>
+                  <a:pt x="2063400" y="20470"/>
+                  <a:pt x="2090152" y="-14502"/>
+                  <a:pt x="2351641" y="0"/>
+                </a:cubicBezTo>
+                <a:cubicBezTo>
+                  <a:pt x="2613130" y="14502"/>
+                  <a:pt x="2802864" y="19125"/>
+                  <a:pt x="2928693" y="0"/>
+                </a:cubicBezTo>
+                <a:cubicBezTo>
+                  <a:pt x="3054522" y="-19125"/>
+                  <a:pt x="3482611" y="-2038"/>
+                  <a:pt x="3636046" y="0"/>
+                </a:cubicBezTo>
+                <a:cubicBezTo>
+                  <a:pt x="3789481" y="2038"/>
+                  <a:pt x="4012363" y="973"/>
+                  <a:pt x="4343400" y="0"/>
+                </a:cubicBezTo>
+                <a:cubicBezTo>
+                  <a:pt x="4342514" y="5429"/>
+                  <a:pt x="4344221" y="14046"/>
+                  <a:pt x="4343400" y="18288"/>
+                </a:cubicBezTo>
+                <a:cubicBezTo>
+                  <a:pt x="4078870" y="-6138"/>
+                  <a:pt x="4015967" y="29658"/>
+                  <a:pt x="3809782" y="18288"/>
+                </a:cubicBezTo>
+                <a:cubicBezTo>
+                  <a:pt x="3603597" y="6918"/>
+                  <a:pt x="3495552" y="24439"/>
+                  <a:pt x="3189297" y="18288"/>
+                </a:cubicBezTo>
+                <a:cubicBezTo>
+                  <a:pt x="2883042" y="12137"/>
+                  <a:pt x="2850610" y="32583"/>
+                  <a:pt x="2568811" y="18288"/>
+                </a:cubicBezTo>
+                <a:cubicBezTo>
+                  <a:pt x="2287012" y="3993"/>
+                  <a:pt x="2279820" y="23580"/>
+                  <a:pt x="1991759" y="18288"/>
+                </a:cubicBezTo>
+                <a:cubicBezTo>
+                  <a:pt x="1703698" y="12996"/>
+                  <a:pt x="1616455" y="23157"/>
+                  <a:pt x="1284405" y="18288"/>
+                </a:cubicBezTo>
+                <a:cubicBezTo>
+                  <a:pt x="952355" y="13419"/>
+                  <a:pt x="783530" y="16053"/>
+                  <a:pt x="577052" y="18288"/>
+                </a:cubicBezTo>
+                <a:cubicBezTo>
+                  <a:pt x="370574" y="20523"/>
+                  <a:pt x="173929" y="5195"/>
+                  <a:pt x="0" y="18288"/>
+                </a:cubicBezTo>
+                <a:cubicBezTo>
+                  <a:pt x="668" y="13665"/>
+                  <a:pt x="578" y="5675"/>
+                  <a:pt x="0" y="0"/>
+                </a:cubicBezTo>
+                <a:close/>
+              </a:path>
+            </a:pathLst>
+          </a:custGeom>
+          <a:solidFill>
+            <a:schemeClr val="accent2"/>
+          </a:solidFill>
+          <a:ln w="41275" cap="rnd">
+            <a:solidFill>
+              <a:schemeClr val="accent2"/>
+            </a:solidFill>
+            <a:round/>
+            <a:extLst>
+              <a:ext uri="{C807C97D-BFC1-408E-A445-0C87EB9F89A2}">
+                <ask:lineSketchStyleProps xmlns:ask="http://schemas.microsoft.com/office/drawing/2018/sketchyshapes" sd="1219033472">
+                  <a:prstGeom prst="rect">
+                    <a:avLst/>
+                  </a:prstGeom>
+                  <ask:type>
+                    <ask:lineSketchFreehand/>
+                  </ask:type>
+                </ask:lineSketchStyleProps>
+              </a:ext>
+            </a:extLst>
+          </a:ln>
+        </p:spPr>
+        <p:style>
+          <a:lnRef idx="2">
+            <a:schemeClr val="accent1">
+              <a:shade val="50000"/>
+            </a:schemeClr>
+          </a:lnRef>
+          <a:fillRef idx="1">
+            <a:schemeClr val="accent1"/>
+          </a:fillRef>
+          <a:effectRef idx="0">
+            <a:schemeClr val="accent1"/>
+          </a:effectRef>
+          <a:fontRef idx="minor">
+            <a:schemeClr val="lt1"/>
+          </a:fontRef>
+        </p:style>
+        <p:txBody>
+          <a:bodyPr rtlCol="0" anchor="ctr"/>
+          <a:lstStyle/>
+          <a:p>
+            <a:pPr algn="ctr"/>
+            <a:endParaRPr lang="en-US"/>
+          </a:p>
+        </p:txBody>
+      </p:sp>
+      <p:sp>
+        <p:nvSpPr>
+          <p:cNvPr id="3" name="Content Placeholder 2">
+            <a:extLst>
+              <a:ext uri="{FF2B5EF4-FFF2-40B4-BE49-F238E27FC236}">
+                <a16:creationId xmlns:a16="http://schemas.microsoft.com/office/drawing/2014/main" id="{A315FD65-E566-BE7F-355E-A043ECB11273}"/>
+              </a:ext>
+            </a:extLst>
+          </p:cNvPr>
+          <p:cNvSpPr>
+            <a:spLocks noGrp="1"/>
+          </p:cNvSpPr>
+          <p:nvPr>
+            <p:ph idx="1"/>
+          </p:nvPr>
+        </p:nvSpPr>
+        <p:spPr>
+          <a:xfrm>
+            <a:off x="383458" y="2504819"/>
+            <a:ext cx="5583398" cy="4334892"/>
+          </a:xfrm>
+        </p:spPr>
+        <p:txBody>
+          <a:bodyPr>
+            <a:normAutofit lnSpcReduction="10000"/>
+          </a:bodyPr>
+          <a:lstStyle/>
+          <a:p>
+            <a:pPr>
+              <a:lnSpc>
+                <a:spcPct val="100000"/>
+              </a:lnSpc>
+            </a:pPr>
+            <a:r>
+              <a:rPr lang="en-GB" sz="1800" dirty="0">
+                <a:latin typeface="CMU Sans Serif" panose="02000603000000000000" pitchFamily="2" charset="0"/>
+                <a:ea typeface="CMU Sans Serif" panose="02000603000000000000" pitchFamily="2" charset="0"/>
+                <a:cs typeface="CMU Sans Serif" panose="02000603000000000000" pitchFamily="2" charset="0"/>
+              </a:rPr>
+              <a:t>Ordered Beta Regression is an alternative type of regression explicitly designed for outcome data that has an ordinal and bounded structure. </a:t>
+            </a:r>
+          </a:p>
+          <a:p>
+            <a:pPr>
+              <a:lnSpc>
+                <a:spcPct val="100000"/>
+              </a:lnSpc>
+            </a:pPr>
+            <a:r>
+              <a:rPr lang="en-GB" sz="1800" dirty="0">
+                <a:latin typeface="CMU Sans Serif" panose="02000603000000000000" pitchFamily="2" charset="0"/>
+                <a:ea typeface="CMU Sans Serif" panose="02000603000000000000" pitchFamily="2" charset="0"/>
+                <a:cs typeface="CMU Sans Serif" panose="02000603000000000000" pitchFamily="2" charset="0"/>
+              </a:rPr>
+              <a:t>It combines beta regression defined for any bounded continuous scale and the ordered logit that uses discrete categories. </a:t>
+            </a:r>
+          </a:p>
+          <a:p>
+            <a:pPr>
+              <a:lnSpc>
+                <a:spcPct val="100000"/>
+              </a:lnSpc>
+            </a:pPr>
+            <a:r>
+              <a:rPr lang="en-GB" sz="1800" dirty="0">
+                <a:latin typeface="CMU Sans Serif" panose="02000603000000000000" pitchFamily="2" charset="0"/>
+                <a:ea typeface="CMU Sans Serif" panose="02000603000000000000" pitchFamily="2" charset="0"/>
+                <a:cs typeface="CMU Sans Serif" panose="02000603000000000000" pitchFamily="2" charset="0"/>
+              </a:rPr>
+              <a:t>It is beneficial as it produces intelligible estimates that respect the bounds of the outcome variable</a:t>
+            </a:r>
+          </a:p>
+          <a:p>
+            <a:pPr>
+              <a:lnSpc>
+                <a:spcPct val="100000"/>
+              </a:lnSpc>
+            </a:pPr>
+            <a:r>
+              <a:rPr lang="en-GB" sz="1800" dirty="0">
+                <a:latin typeface="CMU Sans Serif" panose="02000603000000000000" pitchFamily="2" charset="0"/>
+                <a:ea typeface="CMU Sans Serif" panose="02000603000000000000" pitchFamily="2" charset="0"/>
+                <a:cs typeface="CMU Sans Serif" panose="02000603000000000000" pitchFamily="2" charset="0"/>
+              </a:rPr>
+              <a:t>The package </a:t>
+            </a:r>
+            <a:r>
+              <a:rPr lang="en-GB" sz="1800" i="1" dirty="0">
+                <a:latin typeface="CMU Sans Serif" panose="02000603000000000000" pitchFamily="2" charset="0"/>
+                <a:ea typeface="CMU Sans Serif" panose="02000603000000000000" pitchFamily="2" charset="0"/>
+                <a:cs typeface="CMU Sans Serif" panose="02000603000000000000" pitchFamily="2" charset="0"/>
+              </a:rPr>
+              <a:t>’</a:t>
+            </a:r>
+            <a:r>
+              <a:rPr lang="en-GB" sz="1800" i="1" dirty="0" err="1">
+                <a:latin typeface="CMU Sans Serif" panose="02000603000000000000" pitchFamily="2" charset="0"/>
+                <a:ea typeface="CMU Sans Serif" panose="02000603000000000000" pitchFamily="2" charset="0"/>
+                <a:cs typeface="CMU Sans Serif" panose="02000603000000000000" pitchFamily="2" charset="0"/>
+              </a:rPr>
+              <a:t>ordbetareg</a:t>
+            </a:r>
+            <a:r>
+              <a:rPr lang="en-GB" sz="1800" dirty="0">
+                <a:latin typeface="CMU Sans Serif" panose="02000603000000000000" pitchFamily="2" charset="0"/>
+                <a:ea typeface="CMU Sans Serif" panose="02000603000000000000" pitchFamily="2" charset="0"/>
+                <a:cs typeface="CMU Sans Serif" panose="02000603000000000000" pitchFamily="2" charset="0"/>
+              </a:rPr>
+              <a:t>’ estimates a Bayesian implementation finding the posterior distribution (using a Markov chain Monte Carlo) </a:t>
+            </a:r>
+          </a:p>
+          <a:p>
+            <a:pPr>
+              <a:lnSpc>
+                <a:spcPct val="100000"/>
+              </a:lnSpc>
+            </a:pPr>
+            <a:r>
+              <a:rPr lang="en-GB" sz="1800" dirty="0">
+                <a:latin typeface="CMU Sans Serif" panose="02000603000000000000" pitchFamily="2" charset="0"/>
+                <a:ea typeface="CMU Sans Serif" panose="02000603000000000000" pitchFamily="2" charset="0"/>
+                <a:cs typeface="CMU Sans Serif" panose="02000603000000000000" pitchFamily="2" charset="0"/>
+              </a:rPr>
+              <a:t>The predicted mean trust values for the groups were calculated from posterior predictions and show very similar prediction to the real means</a:t>
+            </a:r>
+          </a:p>
+        </p:txBody>
+      </p:sp>
+      <p:pic>
+        <p:nvPicPr>
+          <p:cNvPr id="17" name="Picture 16" descr="A chart with red and blue dots&#10;&#10;AI-generated content may be incorrect.">
+            <a:extLst>
+              <a:ext uri="{FF2B5EF4-FFF2-40B4-BE49-F238E27FC236}">
+                <a16:creationId xmlns:a16="http://schemas.microsoft.com/office/drawing/2014/main" id="{169EA93E-6403-F9EA-7CAC-0904AB5BBCF4}"/>
+              </a:ext>
+            </a:extLst>
+          </p:cNvPr>
+          <p:cNvPicPr>
+            <a:picLocks noChangeAspect="1"/>
+          </p:cNvPicPr>
+          <p:nvPr/>
+        </p:nvPicPr>
+        <p:blipFill>
+          <a:blip r:embed="rId4"/>
+          <a:stretch>
+            <a:fillRect/>
+          </a:stretch>
+        </p:blipFill>
+        <p:spPr>
+          <a:xfrm>
+            <a:off x="6447503" y="1140214"/>
+            <a:ext cx="4906297" cy="3765583"/>
+          </a:xfrm>
+          <a:prstGeom prst="rect">
+            <a:avLst/>
+          </a:prstGeom>
+          <a:ln w="19050">
+            <a:solidFill>
+              <a:schemeClr val="accent5">
+                <a:lumMod val="75000"/>
+              </a:schemeClr>
+            </a:solidFill>
+          </a:ln>
+        </p:spPr>
+      </p:pic>
+      <p:pic>
+        <p:nvPicPr>
+          <p:cNvPr id="10" name="Picture 9" descr="A screenshot of a computer code&#10;&#10;AI-generated content may be incorrect.">
+            <a:extLst>
+              <a:ext uri="{FF2B5EF4-FFF2-40B4-BE49-F238E27FC236}">
+                <a16:creationId xmlns:a16="http://schemas.microsoft.com/office/drawing/2014/main" id="{DB8EC859-66D4-39D9-3A6C-E46D0BF05AA2}"/>
+              </a:ext>
+            </a:extLst>
+          </p:cNvPr>
+          <p:cNvPicPr>
+            <a:picLocks noChangeAspect="1"/>
+          </p:cNvPicPr>
+          <p:nvPr/>
+        </p:nvPicPr>
+        <p:blipFill>
+          <a:blip r:embed="rId5"/>
+          <a:stretch>
+            <a:fillRect/>
+          </a:stretch>
+        </p:blipFill>
+        <p:spPr>
+          <a:xfrm>
+            <a:off x="955603" y="845357"/>
+            <a:ext cx="4225997" cy="1299494"/>
+          </a:xfrm>
+          <a:prstGeom prst="rect">
+            <a:avLst/>
+          </a:prstGeom>
+        </p:spPr>
+      </p:pic>
+    </p:spTree>
+    <p:extLst>
+      <p:ext uri="{BB962C8B-B14F-4D97-AF65-F5344CB8AC3E}">
+        <p14:creationId xmlns:p14="http://schemas.microsoft.com/office/powerpoint/2010/main" val="3069715834"/>
+      </p:ext>
+    </p:extLst>
+  </p:cSld>
+  <p:clrMapOvr>
+    <a:masterClrMapping/>
+  </p:clrMapOvr>
+</p:sld>
+</file>
+
+<file path=ppt/slides/slide11.xml><?xml version="1.0" encoding="utf-8"?>
 <p:sld xmlns:a="http://schemas.openxmlformats.org/drawingml/2006/main" xmlns:r="http://schemas.openxmlformats.org/officeDocument/2006/relationships" xmlns:p="http://schemas.openxmlformats.org/presentationml/2006/main">
   <p:cSld>
     <p:spTree>
@@ -5863,63 +7901,58 @@
         </p:nvSpPr>
         <p:spPr>
           <a:xfrm>
-            <a:off x="789038" y="2153265"/>
-            <a:ext cx="10321413" cy="4415102"/>
+            <a:off x="365760" y="1310640"/>
+            <a:ext cx="5730240" cy="4572350"/>
           </a:xfrm>
         </p:spPr>
         <p:txBody>
           <a:bodyPr>
-            <a:normAutofit lnSpcReduction="10000"/>
+            <a:noAutofit/>
           </a:bodyPr>
           <a:lstStyle/>
           <a:p>
-            <a:r>
-              <a:rPr lang="en-GB" sz="2000" dirty="0">
+            <a:pPr>
+              <a:lnSpc>
+                <a:spcPct val="120000"/>
+              </a:lnSpc>
+            </a:pPr>
+            <a:r>
+              <a:rPr lang="en-GB" sz="1800" dirty="0">
                 <a:latin typeface="CMU Sans Serif" panose="02000603000000000000" pitchFamily="2" charset="0"/>
                 <a:ea typeface="CMU Sans Serif" panose="02000603000000000000" pitchFamily="2" charset="0"/>
                 <a:cs typeface="CMU Sans Serif" panose="02000603000000000000" pitchFamily="2" charset="0"/>
               </a:rPr>
-              <a:t>Marginal Effects of Warmth calculated to understand how much increasing warmth (from Low Warmth to High Warmth) changes predicted trust and whether this depends on the outcome favourability.</a:t>
-            </a:r>
-          </a:p>
-          <a:p>
-            <a:r>
-              <a:rPr lang="en-GB" sz="2000" dirty="0">
+              <a:t>The marginal effect of Warmth was calculated to understand the difference in expected trust when the warmth treatment is applied, holding the outcome favourability constant </a:t>
+            </a:r>
+          </a:p>
+          <a:p>
+            <a:pPr>
+              <a:lnSpc>
+                <a:spcPct val="120000"/>
+              </a:lnSpc>
+            </a:pPr>
+            <a:r>
+              <a:rPr lang="en-GB" sz="1800" dirty="0">
                 <a:latin typeface="CMU Sans Serif" panose="02000603000000000000" pitchFamily="2" charset="0"/>
                 <a:ea typeface="CMU Sans Serif" panose="02000603000000000000" pitchFamily="2" charset="0"/>
                 <a:cs typeface="CMU Sans Serif" panose="02000603000000000000" pitchFamily="2" charset="0"/>
               </a:rPr>
-              <a:t>The values in the table represent the marginal effect of warmth on the predicted trust (0-1) scale returned by the ordered beta regressions. </a:t>
-            </a:r>
-          </a:p>
-          <a:p>
-            <a:r>
-              <a:rPr lang="en-GB" sz="2000" dirty="0">
+              <a:t>The results from the ordered beta predicted trust values (0-1) suggest effect of warmth increases trust in the  bureaucrat and the municipality by 0.16 and 0.15 points on average. </a:t>
+            </a:r>
+          </a:p>
+          <a:p>
+            <a:pPr>
+              <a:lnSpc>
+                <a:spcPct val="120000"/>
+              </a:lnSpc>
+            </a:pPr>
+            <a:r>
+              <a:rPr lang="en-GB" sz="1800" dirty="0">
                 <a:latin typeface="CMU Sans Serif" panose="02000603000000000000" pitchFamily="2" charset="0"/>
                 <a:ea typeface="CMU Sans Serif" panose="02000603000000000000" pitchFamily="2" charset="0"/>
                 <a:cs typeface="CMU Sans Serif" panose="02000603000000000000" pitchFamily="2" charset="0"/>
               </a:rPr>
-              <a:t>These show that participants receiving the unfavourable decision (when of treatment = 0) the effect of the warmth treatment increases trust in the bureaucrat and the municipality by 0.16 and 0.15 points on average, on the 0-1 scale (for non-interaction models). This marginal effect is exactly the same when participants receive the favourable decision (of treatment = 1).</a:t>
-            </a:r>
-          </a:p>
-          <a:p>
-            <a:r>
-              <a:rPr lang="en-GB" sz="2000" dirty="0">
-                <a:latin typeface="CMU Sans Serif" panose="02000603000000000000" pitchFamily="2" charset="0"/>
-                <a:ea typeface="CMU Sans Serif" panose="02000603000000000000" pitchFamily="2" charset="0"/>
-                <a:cs typeface="CMU Sans Serif" panose="02000603000000000000" pitchFamily="2" charset="0"/>
-              </a:rPr>
-              <a:t>This suggests that warmth has almost exactly the same effect on trust in the favourable and unfavourable condition providing no evidence that there is a different effect depending on the type of decision. </a:t>
-            </a:r>
-          </a:p>
-          <a:p>
-            <a:r>
-              <a:rPr lang="en-GB" sz="2000" dirty="0">
-                <a:latin typeface="CMU Sans Serif" panose="02000603000000000000" pitchFamily="2" charset="0"/>
-                <a:ea typeface="CMU Sans Serif" panose="02000603000000000000" pitchFamily="2" charset="0"/>
-                <a:cs typeface="CMU Sans Serif" panose="02000603000000000000" pitchFamily="2" charset="0"/>
-              </a:rPr>
-              <a:t>This coincides with the insignificant finding of the interaction term for the previous models</a:t>
+              <a:t>The effect of warmth is slightly stronger in a favourable outcome scenario indicating that warmth may be more effective in positive contexts</a:t>
             </a:r>
           </a:p>
         </p:txBody>
@@ -5939,15 +7972,15 @@
           <p:nvPr/>
         </p:nvPicPr>
         <p:blipFill>
-          <a:blip r:embed="rId2"/>
+          <a:blip r:embed="rId3"/>
           <a:stretch>
             <a:fillRect/>
           </a:stretch>
         </p:blipFill>
         <p:spPr>
           <a:xfrm>
-            <a:off x="4660490" y="653482"/>
-            <a:ext cx="6886125" cy="1037308"/>
+            <a:off x="6207760" y="1076099"/>
+            <a:ext cx="5542055" cy="834841"/>
           </a:xfrm>
           <a:prstGeom prst="rect">
             <a:avLst/>
@@ -5980,8 +8013,8 @@
         </p:nvSpPr>
         <p:spPr>
           <a:xfrm>
-            <a:off x="576559" y="653482"/>
-            <a:ext cx="3936448" cy="988561"/>
+            <a:off x="538479" y="-176192"/>
+            <a:ext cx="11211336" cy="988561"/>
           </a:xfrm>
           <a:prstGeom prst="rect">
             <a:avLst/>
@@ -5993,7 +8026,7 @@
         </p:spPr>
         <p:txBody>
           <a:bodyPr vert="horz" lIns="91440" tIns="45720" rIns="91440" bIns="45720" rtlCol="0" anchor="b">
-            <a:normAutofit fontScale="85000" lnSpcReduction="10000"/>
+            <a:noAutofit/>
           </a:bodyPr>
           <a:lstStyle>
             <a:lvl1pPr algn="l" defTabSz="914400" rtl="0" eaLnBrk="1" latinLnBrk="0" hangingPunct="1">
@@ -6016,12 +8049,42 @@
           </a:lstStyle>
           <a:p>
             <a:r>
-              <a:rPr lang="en-GB" sz="4800" dirty="0"/>
-              <a:t>Marginal Effects</a:t>
+              <a:rPr lang="en-GB" sz="3600" dirty="0"/>
+              <a:t>Conditional Marginal Effects Using Beta Regression</a:t>
             </a:r>
           </a:p>
         </p:txBody>
       </p:sp>
+      <p:pic>
+        <p:nvPicPr>
+          <p:cNvPr id="9" name="Picture 8">
+            <a:extLst>
+              <a:ext uri="{FF2B5EF4-FFF2-40B4-BE49-F238E27FC236}">
+                <a16:creationId xmlns:a16="http://schemas.microsoft.com/office/drawing/2014/main" id="{D6E268A7-403C-435C-1BF9-545F6017437D}"/>
+              </a:ext>
+            </a:extLst>
+          </p:cNvPr>
+          <p:cNvPicPr>
+            <a:picLocks noChangeAspect="1"/>
+          </p:cNvPicPr>
+          <p:nvPr/>
+        </p:nvPicPr>
+        <p:blipFill>
+          <a:blip r:embed="rId4"/>
+          <a:stretch>
+            <a:fillRect/>
+          </a:stretch>
+        </p:blipFill>
+        <p:spPr>
+          <a:xfrm>
+            <a:off x="6268036" y="2174670"/>
+            <a:ext cx="5923964" cy="4280744"/>
+          </a:xfrm>
+          <a:prstGeom prst="rect">
+            <a:avLst/>
+          </a:prstGeom>
+        </p:spPr>
+      </p:pic>
     </p:spTree>
     <p:extLst>
       <p:ext uri="{BB962C8B-B14F-4D97-AF65-F5344CB8AC3E}">
@@ -6035,7 +8098,7 @@
 </p:sld>
 </file>
 
-<file path=ppt/slides/slide11.xml><?xml version="1.0" encoding="utf-8"?>
+<file path=ppt/slides/slide12.xml><?xml version="1.0" encoding="utf-8"?>
 <p:sld xmlns:a="http://schemas.openxmlformats.org/drawingml/2006/main" xmlns:r="http://schemas.openxmlformats.org/officeDocument/2006/relationships" xmlns:p="http://schemas.openxmlformats.org/presentationml/2006/main">
   <p:cSld>
     <p:bg>
@@ -6149,7 +8212,7 @@
           <a:lstStyle/>
           <a:p>
             <a:r>
-              <a:rPr lang="en-GB" sz="5400" dirty="0"/>
+              <a:rPr lang="en-GB" sz="3600" dirty="0"/>
               <a:t>Conclusion</a:t>
             </a:r>
           </a:p>
@@ -6811,8 +8874,8 @@
         </p:nvSpPr>
         <p:spPr>
           <a:xfrm>
-            <a:off x="838200" y="1929384"/>
-            <a:ext cx="10515600" cy="4251960"/>
+            <a:off x="1304693" y="1929383"/>
+            <a:ext cx="9534292" cy="3973577"/>
           </a:xfrm>
         </p:spPr>
         <p:txBody>
@@ -6821,18 +8884,28 @@
           </a:bodyPr>
           <a:lstStyle/>
           <a:p>
-            <a:r>
-              <a:rPr lang="en-GB" sz="2000" dirty="0">
+            <a:pPr>
+              <a:lnSpc>
+                <a:spcPct val="100000"/>
+              </a:lnSpc>
+            </a:pPr>
+            <a:r>
+              <a:rPr lang="en-GB" sz="1800" dirty="0">
                 <a:latin typeface="CMU Sans Serif" panose="02000603000000000000" pitchFamily="2" charset="0"/>
                 <a:ea typeface="CMU Sans Serif" panose="02000603000000000000" pitchFamily="2" charset="0"/>
                 <a:cs typeface="CMU Sans Serif" panose="02000603000000000000" pitchFamily="2" charset="0"/>
               </a:rPr>
-              <a:t>The original study was replicated successfully.</a:t>
-            </a:r>
-          </a:p>
-          <a:p>
-            <a:r>
-              <a:rPr lang="en-GB" sz="2000" dirty="0">
+              <a:t>The original study was replicated successfully confirming the results that outcome favourability and warmth strongly influence citizens’ trust in government.</a:t>
+            </a:r>
+          </a:p>
+          <a:p>
+            <a:pPr>
+              <a:lnSpc>
+                <a:spcPct val="100000"/>
+              </a:lnSpc>
+            </a:pPr>
+            <a:r>
+              <a:rPr lang="en-GB" sz="1800" dirty="0">
                 <a:latin typeface="CMU Sans Serif" panose="02000603000000000000" pitchFamily="2" charset="0"/>
                 <a:ea typeface="CMU Sans Serif" panose="02000603000000000000" pitchFamily="2" charset="0"/>
                 <a:cs typeface="CMU Sans Serif" panose="02000603000000000000" pitchFamily="2" charset="0"/>
@@ -6841,59 +8914,33 @@
             </a:r>
           </a:p>
           <a:p>
-            <a:r>
-              <a:rPr lang="en-GB" sz="2000" dirty="0">
+            <a:pPr>
+              <a:lnSpc>
+                <a:spcPct val="100000"/>
+              </a:lnSpc>
+            </a:pPr>
+            <a:r>
+              <a:rPr lang="en-GB" sz="1800" dirty="0">
                 <a:latin typeface="CMU Sans Serif" panose="02000603000000000000" pitchFamily="2" charset="0"/>
                 <a:ea typeface="CMU Sans Serif" panose="02000603000000000000" pitchFamily="2" charset="0"/>
                 <a:cs typeface="CMU Sans Serif" panose="02000603000000000000" pitchFamily="2" charset="0"/>
               </a:rPr>
-              <a:t>The ordered multinomial was designed to reflect the ordinal nature of the data, looking at predicting the levels of trust </a:t>
-            </a:r>
-          </a:p>
-          <a:p>
-            <a:r>
-              <a:rPr lang="en-GB" sz="2000" dirty="0">
+              <a:t>The ordered multinomial reflected the ordinal nature of the data and found similar treatment effects to the OLS model, made accurate predicted values and further supported the original findings that there is not a significant interaction effect </a:t>
+            </a:r>
+          </a:p>
+          <a:p>
+            <a:pPr>
+              <a:lnSpc>
+                <a:spcPct val="100000"/>
+              </a:lnSpc>
+            </a:pPr>
+            <a:r>
+              <a:rPr lang="en-GB" sz="1800" dirty="0">
                 <a:latin typeface="CMU Sans Serif" panose="02000603000000000000" pitchFamily="2" charset="0"/>
                 <a:ea typeface="CMU Sans Serif" panose="02000603000000000000" pitchFamily="2" charset="0"/>
                 <a:cs typeface="CMU Sans Serif" panose="02000603000000000000" pitchFamily="2" charset="0"/>
               </a:rPr>
-              <a:t>The results were similar to the OLS models, the treatment effects and predicted average scores were similar, and the lack of a significant interaction further supported the original findings</a:t>
-            </a:r>
-          </a:p>
-          <a:p>
-            <a:r>
-              <a:rPr lang="en-GB" sz="2000" dirty="0">
-                <a:latin typeface="CMU Sans Serif" panose="02000603000000000000" pitchFamily="2" charset="0"/>
-                <a:ea typeface="CMU Sans Serif" panose="02000603000000000000" pitchFamily="2" charset="0"/>
-                <a:cs typeface="CMU Sans Serif" panose="02000603000000000000" pitchFamily="2" charset="0"/>
-              </a:rPr>
-              <a:t>The ordered beta regression was used as it respected both the ordinal and bounded structure of the rescaled trust measures on a 0-1 scale. </a:t>
-            </a:r>
-          </a:p>
-          <a:p>
-            <a:r>
-              <a:rPr lang="en-GB" sz="2000" dirty="0">
-                <a:latin typeface="CMU Sans Serif" panose="02000603000000000000" pitchFamily="2" charset="0"/>
-                <a:ea typeface="CMU Sans Serif" panose="02000603000000000000" pitchFamily="2" charset="0"/>
-                <a:cs typeface="CMU Sans Serif" panose="02000603000000000000" pitchFamily="2" charset="0"/>
-              </a:rPr>
-              <a:t>This </a:t>
-            </a:r>
-            <a:r>
-              <a:rPr lang="en-GB" sz="2000">
-                <a:latin typeface="CMU Sans Serif" panose="02000603000000000000" pitchFamily="2" charset="0"/>
-                <a:ea typeface="CMU Sans Serif" panose="02000603000000000000" pitchFamily="2" charset="0"/>
-                <a:cs typeface="CMU Sans Serif" panose="02000603000000000000" pitchFamily="2" charset="0"/>
-              </a:rPr>
-              <a:t>approach also </a:t>
-            </a:r>
-            <a:r>
-              <a:rPr lang="en-GB" sz="2000" dirty="0">
-                <a:latin typeface="CMU Sans Serif" panose="02000603000000000000" pitchFamily="2" charset="0"/>
-                <a:ea typeface="CMU Sans Serif" panose="02000603000000000000" pitchFamily="2" charset="0"/>
-                <a:cs typeface="CMU Sans Serif" panose="02000603000000000000" pitchFamily="2" charset="0"/>
-              </a:rPr>
-              <a:t>reaffirmed the results from the original OLS study, finding a consistent marginal effect of warmth for both outcome conditions, but with an approach that is specifically designed for bounded ordinal nature of the outcome variable.</a:t>
+              <a:t>The ordered beta regression using Bayesian estimation reaffirmed the previous findings but with an approach that is specifically designed for bounded ordinal nature of the outcome variable</a:t>
             </a:r>
           </a:p>
         </p:txBody>
@@ -6911,7 +8958,7 @@
 </p:sld>
 </file>
 
-<file path=ppt/slides/slide12.xml><?xml version="1.0" encoding="utf-8"?>
+<file path=ppt/slides/slide13.xml><?xml version="1.0" encoding="utf-8"?>
 <p:sld xmlns:a="http://schemas.openxmlformats.org/drawingml/2006/main" xmlns:r="http://schemas.openxmlformats.org/officeDocument/2006/relationships" xmlns:p="http://schemas.openxmlformats.org/presentationml/2006/main">
   <p:cSld>
     <p:bg>
@@ -7072,9 +9119,7 @@
                 <a:solidFill>
                   <a:schemeClr val="tx1"/>
                 </a:solidFill>
-                <a:latin typeface="+mn-lt"/>
-                <a:ea typeface="+mn-ea"/>
-                <a:cs typeface="+mn-cs"/>
+                <a:latin typeface="DM Serif Display" pitchFamily="2" charset="0"/>
               </a:rPr>
               <a:t>Any Questions? </a:t>
             </a:r>
@@ -7103,8 +9148,8 @@
         </p:blipFill>
         <p:spPr>
           <a:xfrm>
-            <a:off x="10229561" y="5013302"/>
-            <a:ext cx="1646971" cy="1605797"/>
+            <a:off x="9824721" y="4618582"/>
+            <a:ext cx="2051812" cy="2000517"/>
           </a:xfrm>
           <a:prstGeom prst="rect">
             <a:avLst/>
@@ -7568,8 +9613,8 @@
         </p:nvSpPr>
         <p:spPr>
           <a:xfrm>
-            <a:off x="1524000" y="5514052"/>
-            <a:ext cx="9144000" cy="651910"/>
+            <a:off x="1524000" y="4945226"/>
+            <a:ext cx="9144000" cy="1220736"/>
           </a:xfrm>
         </p:spPr>
         <p:txBody>
@@ -7579,14 +9624,24 @@
           <a:lstStyle/>
           <a:p>
             <a:r>
-              <a:rPr lang="en-GB" sz="1500" dirty="0"/>
-              <a:t>Replication Project </a:t>
-            </a:r>
-          </a:p>
-          <a:p>
-            <a:r>
-              <a:rPr lang="en-GB" sz="1500" dirty="0"/>
-              <a:t>Ellen  Beattie - beattie1@tcd.ie</a:t>
+              <a:rPr lang="en-GB" sz="1800" dirty="0"/>
+              <a:t>Hansen, F. G. (2023). </a:t>
+            </a:r>
+            <a:r>
+              <a:rPr lang="en-GB" sz="1800" i="1" dirty="0"/>
+              <a:t>Journal of Experimental Political Science</a:t>
+            </a:r>
+            <a:r>
+              <a:rPr lang="en-GB" sz="1800" dirty="0"/>
+              <a:t>, </a:t>
+            </a:r>
+            <a:r>
+              <a:rPr lang="en-GB" sz="1800" i="1" dirty="0"/>
+              <a:t>10</a:t>
+            </a:r>
+            <a:r>
+              <a:rPr lang="en-GB" sz="1800" dirty="0"/>
+              <a:t>(1), 62–75. </a:t>
             </a:r>
           </a:p>
         </p:txBody>
@@ -7694,12 +9749,12 @@
           <a:lstStyle/>
           <a:p>
             <a:r>
-              <a:rPr lang="en-GB" sz="5400" dirty="0">
+              <a:rPr lang="en-GB" sz="4800" dirty="0">
                 <a:solidFill>
                   <a:schemeClr val="bg1"/>
                 </a:solidFill>
               </a:rPr>
-              <a:t>	Paper Theory</a:t>
+              <a:t>	Theoretical Background</a:t>
             </a:r>
           </a:p>
         </p:txBody>
@@ -7720,63 +9775,84 @@
             <p:ph sz="half" idx="1"/>
           </p:nvPr>
         </p:nvSpPr>
-        <p:spPr/>
+        <p:spPr>
+          <a:xfrm>
+            <a:off x="838200" y="2015613"/>
+            <a:ext cx="5181600" cy="4414683"/>
+          </a:xfrm>
+        </p:spPr>
         <p:txBody>
           <a:bodyPr>
-            <a:normAutofit fontScale="70000" lnSpcReduction="20000"/>
+            <a:normAutofit fontScale="62500" lnSpcReduction="20000"/>
           </a:bodyPr>
           <a:lstStyle/>
           <a:p>
-            <a:r>
-              <a:rPr lang="en-GB" dirty="0">
+            <a:pPr>
+              <a:lnSpc>
+                <a:spcPct val="120000"/>
+              </a:lnSpc>
+            </a:pPr>
+            <a:r>
+              <a:rPr lang="en-GB" sz="2600" dirty="0">
                 <a:latin typeface="CMU Sans Serif" panose="02000603000000000000" pitchFamily="2" charset="0"/>
                 <a:ea typeface="CMU Sans Serif" panose="02000603000000000000" pitchFamily="2" charset="0"/>
                 <a:cs typeface="CMU Sans Serif" panose="02000603000000000000" pitchFamily="2" charset="0"/>
               </a:rPr>
-              <a:t>Citizens’  trust is fundamental in successful governance</a:t>
-            </a:r>
-          </a:p>
-          <a:p>
-            <a:r>
-              <a:rPr lang="en-GB" dirty="0">
+              <a:t>Citizen trust is fundamental in successful governance</a:t>
+            </a:r>
+          </a:p>
+          <a:p>
+            <a:pPr>
+              <a:lnSpc>
+                <a:spcPct val="120000"/>
+              </a:lnSpc>
+            </a:pPr>
+            <a:r>
+              <a:rPr lang="en-GB" sz="2600" dirty="0">
                 <a:latin typeface="CMU Sans Serif" panose="02000603000000000000" pitchFamily="2" charset="0"/>
                 <a:ea typeface="CMU Sans Serif" panose="02000603000000000000" pitchFamily="2" charset="0"/>
                 <a:cs typeface="CMU Sans Serif" panose="02000603000000000000" pitchFamily="2" charset="0"/>
               </a:rPr>
-              <a:t>Trust is often based on performance (e.g. economic stability) and decisions that fit their policy preferences</a:t>
-            </a:r>
-          </a:p>
-          <a:p>
-            <a:r>
-              <a:rPr lang="en-GB" dirty="0">
+              <a:t>Trust is often based on government performance and whether decisions fit individual preferences</a:t>
+            </a:r>
+          </a:p>
+          <a:p>
+            <a:pPr>
+              <a:lnSpc>
+                <a:spcPct val="120000"/>
+              </a:lnSpc>
+            </a:pPr>
+            <a:r>
+              <a:rPr lang="en-GB" sz="2600" dirty="0">
                 <a:latin typeface="CMU Sans Serif" panose="02000603000000000000" pitchFamily="2" charset="0"/>
                 <a:ea typeface="CMU Sans Serif" panose="02000603000000000000" pitchFamily="2" charset="0"/>
                 <a:cs typeface="CMU Sans Serif" panose="02000603000000000000" pitchFamily="2" charset="0"/>
               </a:rPr>
-              <a:t>There is some evidence that direct interactions with bureaucrats (e.g. applying for benefits)  impact broader government trust </a:t>
-            </a:r>
-          </a:p>
-          <a:p>
-            <a:r>
-              <a:rPr lang="en-GB" dirty="0">
+              <a:t>There is some evidence that direct interactions with government staff has an impact on trust in the government</a:t>
+            </a:r>
+          </a:p>
+          <a:p>
+            <a:pPr>
+              <a:lnSpc>
+                <a:spcPct val="120000"/>
+              </a:lnSpc>
+            </a:pPr>
+            <a:r>
+              <a:rPr lang="en-GB" sz="2600" dirty="0">
                 <a:latin typeface="CMU Sans Serif" panose="02000603000000000000" pitchFamily="2" charset="0"/>
                 <a:ea typeface="CMU Sans Serif" panose="02000603000000000000" pitchFamily="2" charset="0"/>
                 <a:cs typeface="CMU Sans Serif" panose="02000603000000000000" pitchFamily="2" charset="0"/>
               </a:rPr>
-              <a:t>From social psychology, we  understand the importance of impressions when making evaluative judgements </a:t>
-            </a:r>
-          </a:p>
-          <a:p>
-            <a:r>
-              <a:rPr lang="en-GB" dirty="0">
-                <a:latin typeface="CMU Sans Serif" panose="02000603000000000000" pitchFamily="2" charset="0"/>
-                <a:ea typeface="CMU Sans Serif" panose="02000603000000000000" pitchFamily="2" charset="0"/>
-                <a:cs typeface="CMU Sans Serif" panose="02000603000000000000" pitchFamily="2" charset="0"/>
-              </a:rPr>
-              <a:t>When citizens interact with government employees, what is the impact on the perceived traits of this employee and does this impact broader government trust?</a:t>
-            </a:r>
-          </a:p>
-          <a:p>
+              <a:t>From social psychology, we understand the importance of interpersonal impressions when people make evaluative judgements </a:t>
+            </a:r>
+          </a:p>
+          <a:p>
+            <a:pPr marL="0" indent="0">
+              <a:lnSpc>
+                <a:spcPct val="120000"/>
+              </a:lnSpc>
+              <a:buNone/>
+            </a:pPr>
             <a:endParaRPr lang="en-GB" dirty="0">
               <a:latin typeface="CMU Sans Serif" panose="02000603000000000000" pitchFamily="2" charset="0"/>
               <a:ea typeface="CMU Sans Serif" panose="02000603000000000000" pitchFamily="2" charset="0"/>
@@ -7784,7 +9860,27 @@
             </a:endParaRPr>
           </a:p>
           <a:p>
-            <a:pPr lvl="1"/>
+            <a:pPr marL="0" indent="0">
+              <a:lnSpc>
+                <a:spcPct val="120000"/>
+              </a:lnSpc>
+              <a:buNone/>
+            </a:pPr>
+            <a:r>
+              <a:rPr lang="en-GB" b="1" dirty="0">
+                <a:latin typeface="CMU Sans Serif" panose="02000603000000000000" pitchFamily="2" charset="0"/>
+                <a:ea typeface="CMU Sans Serif" panose="02000603000000000000" pitchFamily="2" charset="0"/>
+                <a:cs typeface="CMU Sans Serif" panose="02000603000000000000" pitchFamily="2" charset="0"/>
+              </a:rPr>
+              <a:t>When citizens interact with government employees, what is the impact of the perceived traits of this employee and does this impact broader government trust?</a:t>
+            </a:r>
+          </a:p>
+          <a:p>
+            <a:pPr>
+              <a:lnSpc>
+                <a:spcPct val="120000"/>
+              </a:lnSpc>
+            </a:pPr>
             <a:endParaRPr lang="en-GB" dirty="0">
               <a:latin typeface="CMU Sans Serif" panose="02000603000000000000" pitchFamily="2" charset="0"/>
               <a:ea typeface="CMU Sans Serif" panose="02000603000000000000" pitchFamily="2" charset="0"/>
@@ -7792,6 +9888,11 @@
             </a:endParaRPr>
           </a:p>
           <a:p>
+            <a:pPr lvl="1">
+              <a:lnSpc>
+                <a:spcPct val="120000"/>
+              </a:lnSpc>
+            </a:pPr>
             <a:endParaRPr lang="en-GB" dirty="0">
               <a:latin typeface="CMU Sans Serif" panose="02000603000000000000" pitchFamily="2" charset="0"/>
               <a:ea typeface="CMU Sans Serif" panose="02000603000000000000" pitchFamily="2" charset="0"/>
@@ -7799,6 +9900,23 @@
             </a:endParaRPr>
           </a:p>
           <a:p>
+            <a:pPr>
+              <a:lnSpc>
+                <a:spcPct val="120000"/>
+              </a:lnSpc>
+            </a:pPr>
+            <a:endParaRPr lang="en-GB" dirty="0">
+              <a:latin typeface="CMU Sans Serif" panose="02000603000000000000" pitchFamily="2" charset="0"/>
+              <a:ea typeface="CMU Sans Serif" panose="02000603000000000000" pitchFamily="2" charset="0"/>
+              <a:cs typeface="CMU Sans Serif" panose="02000603000000000000" pitchFamily="2" charset="0"/>
+            </a:endParaRPr>
+          </a:p>
+          <a:p>
+            <a:pPr>
+              <a:lnSpc>
+                <a:spcPct val="120000"/>
+              </a:lnSpc>
+            </a:pPr>
             <a:endParaRPr lang="en-GB" dirty="0">
               <a:latin typeface="CMU Sans Serif" panose="02000603000000000000" pitchFamily="2" charset="0"/>
               <a:ea typeface="CMU Sans Serif" panose="02000603000000000000" pitchFamily="2" charset="0"/>
@@ -7823,14 +9941,14 @@
             <p:ph sz="half" idx="2"/>
             <p:extLst>
               <p:ext uri="{D42A27DB-BD31-4B8C-83A1-F6EECF244321}">
-                <p14:modId xmlns:p14="http://schemas.microsoft.com/office/powerpoint/2010/main" val="1545355727"/>
+                <p14:modId xmlns:p14="http://schemas.microsoft.com/office/powerpoint/2010/main" val="4262960109"/>
               </p:ext>
             </p:extLst>
           </p:nvPr>
         </p:nvGraphicFramePr>
         <p:xfrm>
-          <a:off x="6172199" y="1533832"/>
-          <a:ext cx="5734665" cy="4643131"/>
+          <a:off x="6381136" y="2015614"/>
+          <a:ext cx="5388077" cy="4060721"/>
         </p:xfrm>
         <a:graphic>
           <a:graphicData uri="http://schemas.openxmlformats.org/drawingml/2006/diagram">
@@ -7838,6 +9956,83 @@
           </a:graphicData>
         </a:graphic>
       </p:graphicFrame>
+      <p:sp>
+        <p:nvSpPr>
+          <p:cNvPr id="2" name="TextBox 1">
+            <a:extLst>
+              <a:ext uri="{FF2B5EF4-FFF2-40B4-BE49-F238E27FC236}">
+                <a16:creationId xmlns:a16="http://schemas.microsoft.com/office/drawing/2014/main" id="{E175000D-1288-5413-65D1-32F3F148E944}"/>
+              </a:ext>
+            </a:extLst>
+          </p:cNvPr>
+          <p:cNvSpPr txBox="1"/>
+          <p:nvPr/>
+        </p:nvSpPr>
+        <p:spPr>
+          <a:xfrm>
+            <a:off x="6381136" y="1470146"/>
+            <a:ext cx="3696928" cy="461665"/>
+          </a:xfrm>
+          <a:prstGeom prst="rect">
+            <a:avLst/>
+          </a:prstGeom>
+          <a:noFill/>
+        </p:spPr>
+        <p:txBody>
+          <a:bodyPr wrap="square" rtlCol="0">
+            <a:spAutoFit/>
+          </a:bodyPr>
+          <a:lstStyle/>
+          <a:p>
+            <a:r>
+              <a:rPr lang="en-GB" sz="2400" dirty="0">
+                <a:latin typeface="DM Serif Display" pitchFamily="2" charset="0"/>
+              </a:rPr>
+              <a:t>Hypotheses</a:t>
+            </a:r>
+            <a:endParaRPr lang="en-GB" dirty="0">
+              <a:latin typeface="DM Serif Display" pitchFamily="2" charset="0"/>
+            </a:endParaRPr>
+          </a:p>
+        </p:txBody>
+      </p:sp>
+      <p:sp>
+        <p:nvSpPr>
+          <p:cNvPr id="4" name="TextBox 3">
+            <a:extLst>
+              <a:ext uri="{FF2B5EF4-FFF2-40B4-BE49-F238E27FC236}">
+                <a16:creationId xmlns:a16="http://schemas.microsoft.com/office/drawing/2014/main" id="{7B4BBCF8-6F3C-4427-1FA6-DBE058DB5002}"/>
+              </a:ext>
+            </a:extLst>
+          </p:cNvPr>
+          <p:cNvSpPr txBox="1"/>
+          <p:nvPr/>
+        </p:nvSpPr>
+        <p:spPr>
+          <a:xfrm>
+            <a:off x="838200" y="1470147"/>
+            <a:ext cx="3696928" cy="461665"/>
+          </a:xfrm>
+          <a:prstGeom prst="rect">
+            <a:avLst/>
+          </a:prstGeom>
+          <a:noFill/>
+        </p:spPr>
+        <p:txBody>
+          <a:bodyPr wrap="square" rtlCol="0">
+            <a:spAutoFit/>
+          </a:bodyPr>
+          <a:lstStyle/>
+          <a:p>
+            <a:r>
+              <a:rPr lang="en-GB" sz="2400" dirty="0">
+                <a:latin typeface="DM Serif Display" pitchFamily="2" charset="0"/>
+              </a:rPr>
+              <a:t>Context</a:t>
+            </a:r>
+          </a:p>
+        </p:txBody>
+      </p:sp>
     </p:spTree>
     <p:extLst>
       <p:ext uri="{BB962C8B-B14F-4D97-AF65-F5344CB8AC3E}">
@@ -7886,8 +10081,8 @@
         </p:nvSpPr>
         <p:spPr>
           <a:xfrm>
-            <a:off x="184765" y="137488"/>
-            <a:ext cx="4894006" cy="1325563"/>
+            <a:off x="442754" y="137487"/>
+            <a:ext cx="4894006" cy="908378"/>
           </a:xfrm>
         </p:spPr>
         <p:txBody>
@@ -7898,7 +10093,7 @@
           <a:p>
             <a:r>
               <a:rPr lang="en-GB" sz="4800" dirty="0"/>
-              <a:t>Method</a:t>
+              <a:t>Methodology</a:t>
             </a:r>
           </a:p>
         </p:txBody>
@@ -7919,14 +10114,14 @@
             <p:ph idx="1"/>
             <p:extLst>
               <p:ext uri="{D42A27DB-BD31-4B8C-83A1-F6EECF244321}">
-                <p14:modId xmlns:p14="http://schemas.microsoft.com/office/powerpoint/2010/main" val="1044785058"/>
+                <p14:modId xmlns:p14="http://schemas.microsoft.com/office/powerpoint/2010/main" val="1728100448"/>
               </p:ext>
             </p:extLst>
           </p:nvPr>
         </p:nvGraphicFramePr>
         <p:xfrm>
-          <a:off x="7474973" y="253368"/>
-          <a:ext cx="4225414" cy="3720341"/>
+          <a:off x="335666" y="1848678"/>
+          <a:ext cx="4894006" cy="3963456"/>
         </p:xfrm>
         <a:graphic>
           <a:graphicData uri="http://schemas.openxmlformats.org/drawingml/2006/table">
@@ -7935,28 +10130,28 @@
                 <a:tableStyleId>{5C22544A-7EE6-4342-B048-85BDC9FD1C3A}</a:tableStyleId>
               </a:tblPr>
               <a:tblGrid>
-                <a:gridCol w="356490">
+                <a:gridCol w="412898">
                   <a:extLst>
                     <a:ext uri="{9D8B030D-6E8A-4147-A177-3AD203B41FA5}">
                       <a16:colId xmlns:a16="http://schemas.microsoft.com/office/drawing/2014/main" val="3590164946"/>
                     </a:ext>
                   </a:extLst>
                 </a:gridCol>
-                <a:gridCol w="440976">
+                <a:gridCol w="510752">
                   <a:extLst>
                     <a:ext uri="{9D8B030D-6E8A-4147-A177-3AD203B41FA5}">
                       <a16:colId xmlns:a16="http://schemas.microsoft.com/office/drawing/2014/main" val="2202087252"/>
                     </a:ext>
                   </a:extLst>
                 </a:gridCol>
-                <a:gridCol w="1621327">
+                <a:gridCol w="1877872">
                   <a:extLst>
                     <a:ext uri="{9D8B030D-6E8A-4147-A177-3AD203B41FA5}">
                       <a16:colId xmlns:a16="http://schemas.microsoft.com/office/drawing/2014/main" val="3108853920"/>
                     </a:ext>
                   </a:extLst>
                 </a:gridCol>
-                <a:gridCol w="1806621">
+                <a:gridCol w="2092484">
                   <a:extLst>
                     <a:ext uri="{9D8B030D-6E8A-4147-A177-3AD203B41FA5}">
                       <a16:colId xmlns:a16="http://schemas.microsoft.com/office/drawing/2014/main" val="3927206195"/>
@@ -7964,7 +10159,7 @@
                   </a:extLst>
                 </a:gridCol>
               </a:tblGrid>
-              <a:tr h="378624">
+              <a:tr h="403367">
                 <a:tc>
                   <a:txBody>
                     <a:bodyPr/>
@@ -8211,7 +10406,7 @@
                   </a:ext>
                 </a:extLst>
               </a:tr>
-              <a:tr h="275303">
+              <a:tr h="293293">
                 <a:tc>
                   <a:txBody>
                     <a:bodyPr/>
@@ -8345,7 +10540,7 @@
                           <a:ea typeface="CMU Sans Serif" panose="02000603000000000000" pitchFamily="2" charset="0"/>
                           <a:cs typeface="CMU Sans Serif" panose="02000603000000000000" pitchFamily="2" charset="0"/>
                         </a:rPr>
-                        <a:t>Warmth = 1</a:t>
+                        <a:t>Warmth = 0</a:t>
                       </a:r>
                     </a:p>
                   </a:txBody>
@@ -8424,7 +10619,7 @@
                           <a:ea typeface="CMU Sans Serif" panose="02000603000000000000" pitchFamily="2" charset="0"/>
                           <a:cs typeface="CMU Sans Serif" panose="02000603000000000000" pitchFamily="2" charset="0"/>
                         </a:rPr>
-                        <a:t>Warmth =0</a:t>
+                        <a:t>Warmth =1</a:t>
                       </a:r>
                     </a:p>
                   </a:txBody>
@@ -8494,7 +10689,7 @@
                   </a:ext>
                 </a:extLst>
               </a:tr>
-              <a:tr h="1533207">
+              <a:tr h="1633398">
                 <a:tc rowSpan="2">
                   <a:txBody>
                     <a:bodyPr/>
@@ -8644,7 +10839,98 @@
                     <a:p>
                       <a:pPr algn="ctr"/>
                       <a:r>
-                        <a:rPr lang="en-GB" sz="1200" i="0" dirty="0">
+                        <a:rPr lang="en-GB" sz="1400" dirty="0">
+                          <a:solidFill>
+                            <a:schemeClr val="accent2">
+                              <a:lumMod val="75000"/>
+                            </a:schemeClr>
+                          </a:solidFill>
+                          <a:latin typeface="CMU Sans Serif" panose="02000603000000000000" pitchFamily="2" charset="0"/>
+                          <a:ea typeface="CMU Sans Serif" panose="02000603000000000000" pitchFamily="2" charset="0"/>
+                          <a:cs typeface="CMU Sans Serif" panose="02000603000000000000" pitchFamily="2" charset="0"/>
+                        </a:rPr>
+                        <a:t>Group 4  </a:t>
+                      </a:r>
+                    </a:p>
+                    <a:p>
+                      <a:pPr algn="ctr"/>
+                      <a:r>
+                        <a:rPr lang="en-GB" sz="1400" dirty="0">
+                          <a:solidFill>
+                            <a:sysClr val="windowText" lastClr="000000"/>
+                          </a:solidFill>
+                          <a:latin typeface="CMU Sans Serif" panose="02000603000000000000" pitchFamily="2" charset="0"/>
+                          <a:ea typeface="CMU Sans Serif" panose="02000603000000000000" pitchFamily="2" charset="0"/>
+                          <a:cs typeface="CMU Sans Serif" panose="02000603000000000000" pitchFamily="2" charset="0"/>
+                        </a:rPr>
+                        <a:t>Low Warmth + Unfavourable Decision</a:t>
+                      </a:r>
+                    </a:p>
+                  </a:txBody>
+                  <a:tcPr anchor="ctr">
+                    <a:lnL w="12700" cap="flat" cmpd="sng" algn="ctr">
+                      <a:solidFill>
+                        <a:schemeClr val="bg1">
+                          <a:lumMod val="50000"/>
+                        </a:schemeClr>
+                      </a:solidFill>
+                      <a:prstDash val="solid"/>
+                      <a:round/>
+                      <a:headEnd type="none" w="med" len="med"/>
+                      <a:tailEnd type="none" w="med" len="med"/>
+                    </a:lnL>
+                    <a:lnR w="12700" cap="flat" cmpd="sng" algn="ctr">
+                      <a:solidFill>
+                        <a:schemeClr val="bg1">
+                          <a:lumMod val="50000"/>
+                        </a:schemeClr>
+                      </a:solidFill>
+                      <a:prstDash val="solid"/>
+                      <a:round/>
+                      <a:headEnd type="none" w="med" len="med"/>
+                      <a:tailEnd type="none" w="med" len="med"/>
+                    </a:lnR>
+                    <a:lnT w="12700" cap="flat" cmpd="sng" algn="ctr">
+                      <a:solidFill>
+                        <a:schemeClr val="bg1">
+                          <a:lumMod val="50000"/>
+                        </a:schemeClr>
+                      </a:solidFill>
+                      <a:prstDash val="solid"/>
+                      <a:round/>
+                      <a:headEnd type="none" w="med" len="med"/>
+                      <a:tailEnd type="none" w="med" len="med"/>
+                    </a:lnT>
+                    <a:lnB w="12700" cap="flat" cmpd="sng" algn="ctr">
+                      <a:solidFill>
+                        <a:schemeClr val="bg1">
+                          <a:lumMod val="50000"/>
+                        </a:schemeClr>
+                      </a:solidFill>
+                      <a:prstDash val="solid"/>
+                      <a:round/>
+                      <a:headEnd type="none" w="med" len="med"/>
+                      <a:tailEnd type="none" w="med" len="med"/>
+                    </a:lnB>
+                    <a:lnTlToBr w="12700" cmpd="sng">
+                      <a:noFill/>
+                      <a:prstDash val="solid"/>
+                    </a:lnTlToBr>
+                    <a:lnBlToTr w="12700" cmpd="sng">
+                      <a:noFill/>
+                      <a:prstDash val="solid"/>
+                    </a:lnBlToTr>
+                    <a:noFill/>
+                  </a:tcPr>
+                </a:tc>
+                <a:tc>
+                  <a:txBody>
+                    <a:bodyPr/>
+                    <a:lstStyle/>
+                    <a:p>
+                      <a:pPr algn="ctr"/>
+                      <a:r>
+                        <a:rPr lang="en-GB" sz="1400" i="0" dirty="0">
                           <a:solidFill>
                             <a:schemeClr val="accent2">
                               <a:lumMod val="75000"/>
@@ -8660,7 +10946,7 @@
                     <a:p>
                       <a:pPr algn="ctr"/>
                       <a:r>
-                        <a:rPr lang="en-GB" sz="1200" dirty="0">
+                        <a:rPr lang="en-GB" sz="1400" dirty="0">
                           <a:solidFill>
                             <a:sysClr val="windowText" lastClr="000000"/>
                           </a:solidFill>
@@ -8728,104 +11014,13 @@
                     <a:noFill/>
                   </a:tcPr>
                 </a:tc>
-                <a:tc>
-                  <a:txBody>
-                    <a:bodyPr/>
-                    <a:lstStyle/>
-                    <a:p>
-                      <a:pPr algn="ctr"/>
-                      <a:r>
-                        <a:rPr lang="en-GB" sz="1200" dirty="0">
-                          <a:solidFill>
-                            <a:schemeClr val="accent2">
-                              <a:lumMod val="75000"/>
-                            </a:schemeClr>
-                          </a:solidFill>
-                          <a:latin typeface="CMU Sans Serif" panose="02000603000000000000" pitchFamily="2" charset="0"/>
-                          <a:ea typeface="CMU Sans Serif" panose="02000603000000000000" pitchFamily="2" charset="0"/>
-                          <a:cs typeface="CMU Sans Serif" panose="02000603000000000000" pitchFamily="2" charset="0"/>
-                        </a:rPr>
-                        <a:t>Group 4  </a:t>
-                      </a:r>
-                    </a:p>
-                    <a:p>
-                      <a:pPr algn="ctr"/>
-                      <a:r>
-                        <a:rPr lang="en-GB" sz="1200" dirty="0">
-                          <a:solidFill>
-                            <a:sysClr val="windowText" lastClr="000000"/>
-                          </a:solidFill>
-                          <a:latin typeface="CMU Sans Serif" panose="02000603000000000000" pitchFamily="2" charset="0"/>
-                          <a:ea typeface="CMU Sans Serif" panose="02000603000000000000" pitchFamily="2" charset="0"/>
-                          <a:cs typeface="CMU Sans Serif" panose="02000603000000000000" pitchFamily="2" charset="0"/>
-                        </a:rPr>
-                        <a:t>Low Warmth + Unfavourable Decision</a:t>
-                      </a:r>
-                    </a:p>
-                  </a:txBody>
-                  <a:tcPr anchor="ctr">
-                    <a:lnL w="12700" cap="flat" cmpd="sng" algn="ctr">
-                      <a:solidFill>
-                        <a:schemeClr val="bg1">
-                          <a:lumMod val="50000"/>
-                        </a:schemeClr>
-                      </a:solidFill>
-                      <a:prstDash val="solid"/>
-                      <a:round/>
-                      <a:headEnd type="none" w="med" len="med"/>
-                      <a:tailEnd type="none" w="med" len="med"/>
-                    </a:lnL>
-                    <a:lnR w="12700" cap="flat" cmpd="sng" algn="ctr">
-                      <a:solidFill>
-                        <a:schemeClr val="bg1">
-                          <a:lumMod val="50000"/>
-                        </a:schemeClr>
-                      </a:solidFill>
-                      <a:prstDash val="solid"/>
-                      <a:round/>
-                      <a:headEnd type="none" w="med" len="med"/>
-                      <a:tailEnd type="none" w="med" len="med"/>
-                    </a:lnR>
-                    <a:lnT w="12700" cap="flat" cmpd="sng" algn="ctr">
-                      <a:solidFill>
-                        <a:schemeClr val="bg1">
-                          <a:lumMod val="50000"/>
-                        </a:schemeClr>
-                      </a:solidFill>
-                      <a:prstDash val="solid"/>
-                      <a:round/>
-                      <a:headEnd type="none" w="med" len="med"/>
-                      <a:tailEnd type="none" w="med" len="med"/>
-                    </a:lnT>
-                    <a:lnB w="12700" cap="flat" cmpd="sng" algn="ctr">
-                      <a:solidFill>
-                        <a:schemeClr val="bg1">
-                          <a:lumMod val="50000"/>
-                        </a:schemeClr>
-                      </a:solidFill>
-                      <a:prstDash val="solid"/>
-                      <a:round/>
-                      <a:headEnd type="none" w="med" len="med"/>
-                      <a:tailEnd type="none" w="med" len="med"/>
-                    </a:lnB>
-                    <a:lnTlToBr w="12700" cmpd="sng">
-                      <a:noFill/>
-                      <a:prstDash val="solid"/>
-                    </a:lnTlToBr>
-                    <a:lnBlToTr w="12700" cmpd="sng">
-                      <a:noFill/>
-                      <a:prstDash val="solid"/>
-                    </a:lnBlToTr>
-                    <a:noFill/>
-                  </a:tcPr>
-                </a:tc>
                 <a:extLst>
                   <a:ext uri="{0D108BD9-81ED-4DB2-BD59-A6C34878D82A}">
                     <a16:rowId xmlns:a16="http://schemas.microsoft.com/office/drawing/2014/main" val="1948698160"/>
                   </a:ext>
                 </a:extLst>
               </a:tr>
-              <a:tr h="1533207">
+              <a:tr h="1633398">
                 <a:tc vMerge="1">
                   <a:txBody>
                     <a:bodyPr/>
@@ -8988,7 +11183,7 @@
                     <a:p>
                       <a:pPr algn="ctr"/>
                       <a:r>
-                        <a:rPr lang="en-GB" sz="1200" dirty="0">
+                        <a:rPr lang="en-GB" sz="1400" dirty="0">
                           <a:solidFill>
                             <a:schemeClr val="accent2">
                               <a:lumMod val="75000"/>
@@ -8998,13 +11193,13 @@
                           <a:ea typeface="CMU Sans Serif" panose="02000603000000000000" pitchFamily="2" charset="0"/>
                           <a:cs typeface="CMU Sans Serif" panose="02000603000000000000" pitchFamily="2" charset="0"/>
                         </a:rPr>
-                        <a:t>Group 2</a:t>
+                        <a:t>Group 3</a:t>
                       </a:r>
                     </a:p>
                     <a:p>
                       <a:pPr algn="ctr"/>
                       <a:r>
-                        <a:rPr lang="en-GB" sz="1200" dirty="0">
+                        <a:rPr lang="en-GB" sz="1400" dirty="0">
                           <a:solidFill>
                             <a:sysClr val="windowText" lastClr="000000"/>
                           </a:solidFill>
@@ -9012,7 +11207,7 @@
                           <a:ea typeface="CMU Sans Serif" panose="02000603000000000000" pitchFamily="2" charset="0"/>
                           <a:cs typeface="CMU Sans Serif" panose="02000603000000000000" pitchFamily="2" charset="0"/>
                         </a:rPr>
-                        <a:t>High Warmth + Favourable Decision</a:t>
+                        <a:t>Low Warmth +  Favourable Decision</a:t>
                       </a:r>
                     </a:p>
                   </a:txBody>
@@ -9079,7 +11274,7 @@
                     <a:p>
                       <a:pPr algn="ctr"/>
                       <a:r>
-                        <a:rPr lang="en-GB" sz="1200" dirty="0">
+                        <a:rPr lang="en-GB" sz="1400" dirty="0">
                           <a:solidFill>
                             <a:schemeClr val="accent2">
                               <a:lumMod val="75000"/>
@@ -9089,13 +11284,13 @@
                           <a:ea typeface="CMU Sans Serif" panose="02000603000000000000" pitchFamily="2" charset="0"/>
                           <a:cs typeface="CMU Sans Serif" panose="02000603000000000000" pitchFamily="2" charset="0"/>
                         </a:rPr>
-                        <a:t>Group 3</a:t>
+                        <a:t>Group 2</a:t>
                       </a:r>
                     </a:p>
                     <a:p>
                       <a:pPr algn="ctr"/>
                       <a:r>
-                        <a:rPr lang="en-GB" sz="1200" dirty="0">
+                        <a:rPr lang="en-GB" sz="1400" dirty="0">
                           <a:solidFill>
                             <a:sysClr val="windowText" lastClr="000000"/>
                           </a:solidFill>
@@ -9103,7 +11298,7 @@
                           <a:ea typeface="CMU Sans Serif" panose="02000603000000000000" pitchFamily="2" charset="0"/>
                           <a:cs typeface="CMU Sans Serif" panose="02000603000000000000" pitchFamily="2" charset="0"/>
                         </a:rPr>
-                        <a:t>Low Warmth +  Favourable Decision</a:t>
+                        <a:t>High Warmth + Favourable Decision</a:t>
                       </a:r>
                     </a:p>
                   </a:txBody>
@@ -9188,7 +11383,7 @@
           <p:nvPr/>
         </p:nvPicPr>
         <p:blipFill>
-          <a:blip r:embed="rId2">
+          <a:blip r:embed="rId3">
             <a:extLst>
               <a:ext uri="{28A0092B-C50C-407E-A947-70E740481C1C}">
                 <a14:useLocalDpi xmlns:a14="http://schemas.microsoft.com/office/drawing/2010/main" val="0"/>
@@ -9202,8 +11397,8 @@
         </p:blipFill>
         <p:spPr bwMode="auto">
           <a:xfrm>
-            <a:off x="0" y="5118919"/>
-            <a:ext cx="2898468" cy="1739081"/>
+            <a:off x="9669823" y="73695"/>
+            <a:ext cx="2421911" cy="1453147"/>
           </a:xfrm>
           <a:prstGeom prst="rect">
             <a:avLst/>
@@ -9222,108 +11417,6 @@
       </p:pic>
       <p:sp>
         <p:nvSpPr>
-          <p:cNvPr id="5" name="TextBox 4">
-            <a:extLst>
-              <a:ext uri="{FF2B5EF4-FFF2-40B4-BE49-F238E27FC236}">
-                <a16:creationId xmlns:a16="http://schemas.microsoft.com/office/drawing/2014/main" id="{43C71696-76A2-3DDB-0F07-30F66DF349C5}"/>
-              </a:ext>
-            </a:extLst>
-          </p:cNvPr>
-          <p:cNvSpPr txBox="1"/>
-          <p:nvPr/>
-        </p:nvSpPr>
-        <p:spPr>
-          <a:xfrm>
-            <a:off x="230959" y="1463051"/>
-            <a:ext cx="6760044" cy="2800767"/>
-          </a:xfrm>
-          <a:prstGeom prst="rect">
-            <a:avLst/>
-          </a:prstGeom>
-          <a:noFill/>
-          <a:ln>
-            <a:noFill/>
-          </a:ln>
-        </p:spPr>
-        <p:txBody>
-          <a:bodyPr wrap="square" rtlCol="0">
-            <a:spAutoFit/>
-          </a:bodyPr>
-          <a:lstStyle/>
-          <a:p>
-            <a:pPr marL="285750" indent="-285750" algn="just">
-              <a:buFont typeface="Courier New" panose="02070309020205020404" pitchFamily="49" charset="0"/>
-              <a:buChar char="o"/>
-            </a:pPr>
-            <a:r>
-              <a:rPr lang="en-GB" sz="1600" dirty="0">
-                <a:latin typeface="CMU Sans Serif" panose="02000603000000000000" pitchFamily="2" charset="0"/>
-                <a:ea typeface="CMU Sans Serif" panose="02000603000000000000" pitchFamily="2" charset="0"/>
-                <a:cs typeface="CMU Sans Serif" panose="02000603000000000000" pitchFamily="2" charset="0"/>
-              </a:rPr>
-              <a:t>2 x 2 survey experiment on representative sample of Danish Citizens  (n = 1613) </a:t>
-            </a:r>
-          </a:p>
-          <a:p>
-            <a:pPr marL="285750" indent="-285750" algn="just">
-              <a:buFont typeface="Courier New" panose="02070309020205020404" pitchFamily="49" charset="0"/>
-              <a:buChar char="o"/>
-            </a:pPr>
-            <a:r>
-              <a:rPr lang="en-GB" sz="1600" dirty="0">
-                <a:latin typeface="CMU Sans Serif" panose="02000603000000000000" pitchFamily="2" charset="0"/>
-                <a:ea typeface="CMU Sans Serif" panose="02000603000000000000" pitchFamily="2" charset="0"/>
-                <a:cs typeface="CMU Sans Serif" panose="02000603000000000000" pitchFamily="2" charset="0"/>
-              </a:rPr>
-              <a:t>Participant read a vignette in which they are helping a close elderly relative apply for a place in a nursing home</a:t>
-            </a:r>
-          </a:p>
-          <a:p>
-            <a:pPr marL="285750" indent="-285750" algn="just">
-              <a:buFont typeface="Courier New" panose="02070309020205020404" pitchFamily="49" charset="0"/>
-              <a:buChar char="o"/>
-            </a:pPr>
-            <a:r>
-              <a:rPr lang="en-GB" sz="1600" dirty="0">
-                <a:latin typeface="CMU Sans Serif" panose="02000603000000000000" pitchFamily="2" charset="0"/>
-                <a:ea typeface="CMU Sans Serif" panose="02000603000000000000" pitchFamily="2" charset="0"/>
-                <a:cs typeface="CMU Sans Serif" panose="02000603000000000000" pitchFamily="2" charset="0"/>
-              </a:rPr>
-              <a:t>Vignette manipulates two features: the description of the caseworker (high or low warmth) and decision on the application (accepted versus rejected).</a:t>
-            </a:r>
-          </a:p>
-          <a:p>
-            <a:pPr marL="285750" indent="-285750" algn="just">
-              <a:buFont typeface="Courier New" panose="02070309020205020404" pitchFamily="49" charset="0"/>
-              <a:buChar char="o"/>
-            </a:pPr>
-            <a:r>
-              <a:rPr lang="en-GB" sz="1600" dirty="0">
-                <a:latin typeface="CMU Sans Serif" panose="02000603000000000000" pitchFamily="2" charset="0"/>
-                <a:ea typeface="CMU Sans Serif" panose="02000603000000000000" pitchFamily="2" charset="0"/>
-                <a:cs typeface="CMU Sans Serif" panose="02000603000000000000" pitchFamily="2" charset="0"/>
-              </a:rPr>
-              <a:t>Participants answered a series of demographic questions as well as rating the caseworker and decision on a number of traits</a:t>
-            </a:r>
-          </a:p>
-          <a:p>
-            <a:pPr marL="285750" indent="-285750" algn="just">
-              <a:buFont typeface="Courier New" panose="02070309020205020404" pitchFamily="49" charset="0"/>
-              <a:buChar char="o"/>
-            </a:pPr>
-            <a:r>
-              <a:rPr lang="en-GB" sz="1600" dirty="0">
-                <a:latin typeface="CMU Sans Serif" panose="02000603000000000000" pitchFamily="2" charset="0"/>
-                <a:ea typeface="CMU Sans Serif" panose="02000603000000000000" pitchFamily="2" charset="0"/>
-                <a:cs typeface="CMU Sans Serif" panose="02000603000000000000" pitchFamily="2" charset="0"/>
-              </a:rPr>
-              <a:t>To record the dependent measures they rated on a 0-10 scale how much they trusted (a) the bureaucrat and (b) the municipality </a:t>
-            </a:r>
-          </a:p>
-        </p:txBody>
-      </p:sp>
-      <p:sp>
-        <p:nvSpPr>
           <p:cNvPr id="6" name="TextBox 5">
             <a:extLst>
               <a:ext uri="{FF2B5EF4-FFF2-40B4-BE49-F238E27FC236}">
@@ -9336,8 +11429,8 @@
         </p:nvSpPr>
         <p:spPr>
           <a:xfrm>
-            <a:off x="3516571" y="5486128"/>
-            <a:ext cx="8575163" cy="323165"/>
+            <a:off x="6217277" y="5506675"/>
+            <a:ext cx="5202244" cy="523220"/>
           </a:xfrm>
           <a:prstGeom prst="rect">
             <a:avLst/>
@@ -9350,13 +11443,25 @@
           </a:bodyPr>
           <a:lstStyle/>
           <a:p>
-            <a:r>
-              <a:rPr lang="en-GB" sz="1500" dirty="0">
+            <a:pPr algn="ctr"/>
+            <a:r>
+              <a:rPr lang="en-GB" sz="1400" dirty="0">
                 <a:latin typeface="DM Serif Text" pitchFamily="2" charset="0"/>
                 <a:ea typeface="CMU Sans Serif" panose="02000603000000000000" pitchFamily="2" charset="0"/>
                 <a:cs typeface="CMU Sans Serif" panose="02000603000000000000" pitchFamily="2" charset="0"/>
               </a:rPr>
-              <a:t>“How much do you personally trust the [municipality/the caseworker] to make the right decisions?”</a:t>
+              <a:t>“How much do you personally trust the</a:t>
+            </a:r>
+          </a:p>
+          <a:p>
+            <a:pPr algn="ctr"/>
+            <a:r>
+              <a:rPr lang="en-GB" sz="1400" dirty="0">
+                <a:latin typeface="DM Serif Text" pitchFamily="2" charset="0"/>
+                <a:ea typeface="CMU Sans Serif" panose="02000603000000000000" pitchFamily="2" charset="0"/>
+                <a:cs typeface="CMU Sans Serif" panose="02000603000000000000" pitchFamily="2" charset="0"/>
+              </a:rPr>
+              <a:t> [municipality/the caseworker] to make the right decisions?”</a:t>
             </a:r>
           </a:p>
         </p:txBody>
@@ -9376,14 +11481,14 @@
           <p:nvPr>
             <p:extLst>
               <p:ext uri="{D42A27DB-BD31-4B8C-83A1-F6EECF244321}">
-                <p14:modId xmlns:p14="http://schemas.microsoft.com/office/powerpoint/2010/main" val="3849311476"/>
+                <p14:modId xmlns:p14="http://schemas.microsoft.com/office/powerpoint/2010/main" val="2964577080"/>
               </p:ext>
             </p:extLst>
           </p:nvPr>
         </p:nvGraphicFramePr>
         <p:xfrm>
-          <a:off x="4189931" y="5890551"/>
-          <a:ext cx="6719944" cy="370840"/>
+          <a:off x="6756020" y="6057176"/>
+          <a:ext cx="4124758" cy="323165"/>
         </p:xfrm>
         <a:graphic>
           <a:graphicData uri="http://schemas.openxmlformats.org/drawingml/2006/table">
@@ -9392,77 +11497,77 @@
                 <a:tableStyleId>{5C22544A-7EE6-4342-B048-85BDC9FD1C3A}</a:tableStyleId>
               </a:tblPr>
               <a:tblGrid>
-                <a:gridCol w="610904">
+                <a:gridCol w="374978">
                   <a:extLst>
                     <a:ext uri="{9D8B030D-6E8A-4147-A177-3AD203B41FA5}">
                       <a16:colId xmlns:a16="http://schemas.microsoft.com/office/drawing/2014/main" val="1172545776"/>
                     </a:ext>
                   </a:extLst>
                 </a:gridCol>
-                <a:gridCol w="610904">
+                <a:gridCol w="374978">
                   <a:extLst>
                     <a:ext uri="{9D8B030D-6E8A-4147-A177-3AD203B41FA5}">
                       <a16:colId xmlns:a16="http://schemas.microsoft.com/office/drawing/2014/main" val="2590218934"/>
                     </a:ext>
                   </a:extLst>
                 </a:gridCol>
-                <a:gridCol w="610904">
+                <a:gridCol w="374978">
                   <a:extLst>
                     <a:ext uri="{9D8B030D-6E8A-4147-A177-3AD203B41FA5}">
                       <a16:colId xmlns:a16="http://schemas.microsoft.com/office/drawing/2014/main" val="3838616275"/>
                     </a:ext>
                   </a:extLst>
                 </a:gridCol>
-                <a:gridCol w="610904">
+                <a:gridCol w="374978">
                   <a:extLst>
                     <a:ext uri="{9D8B030D-6E8A-4147-A177-3AD203B41FA5}">
                       <a16:colId xmlns:a16="http://schemas.microsoft.com/office/drawing/2014/main" val="1760050832"/>
                     </a:ext>
                   </a:extLst>
                 </a:gridCol>
-                <a:gridCol w="610904">
+                <a:gridCol w="374978">
                   <a:extLst>
                     <a:ext uri="{9D8B030D-6E8A-4147-A177-3AD203B41FA5}">
                       <a16:colId xmlns:a16="http://schemas.microsoft.com/office/drawing/2014/main" val="3400197775"/>
                     </a:ext>
                   </a:extLst>
                 </a:gridCol>
-                <a:gridCol w="610904">
+                <a:gridCol w="374978">
                   <a:extLst>
                     <a:ext uri="{9D8B030D-6E8A-4147-A177-3AD203B41FA5}">
                       <a16:colId xmlns:a16="http://schemas.microsoft.com/office/drawing/2014/main" val="3899793948"/>
                     </a:ext>
                   </a:extLst>
                 </a:gridCol>
-                <a:gridCol w="610904">
+                <a:gridCol w="374978">
                   <a:extLst>
                     <a:ext uri="{9D8B030D-6E8A-4147-A177-3AD203B41FA5}">
                       <a16:colId xmlns:a16="http://schemas.microsoft.com/office/drawing/2014/main" val="1246873709"/>
                     </a:ext>
                   </a:extLst>
                 </a:gridCol>
-                <a:gridCol w="610904">
+                <a:gridCol w="374978">
                   <a:extLst>
                     <a:ext uri="{9D8B030D-6E8A-4147-A177-3AD203B41FA5}">
                       <a16:colId xmlns:a16="http://schemas.microsoft.com/office/drawing/2014/main" val="3927817840"/>
                     </a:ext>
                   </a:extLst>
                 </a:gridCol>
-                <a:gridCol w="610904">
+                <a:gridCol w="374978">
                   <a:extLst>
                     <a:ext uri="{9D8B030D-6E8A-4147-A177-3AD203B41FA5}">
                       <a16:colId xmlns:a16="http://schemas.microsoft.com/office/drawing/2014/main" val="3609666915"/>
                     </a:ext>
                   </a:extLst>
                 </a:gridCol>
-                <a:gridCol w="610904">
+                <a:gridCol w="374978">
                   <a:extLst>
                     <a:ext uri="{9D8B030D-6E8A-4147-A177-3AD203B41FA5}">
                       <a16:colId xmlns:a16="http://schemas.microsoft.com/office/drawing/2014/main" val="3470091660"/>
                     </a:ext>
                   </a:extLst>
                 </a:gridCol>
-                <a:gridCol w="610904">
+                <a:gridCol w="374978">
                   <a:extLst>
                     <a:ext uri="{9D8B030D-6E8A-4147-A177-3AD203B41FA5}">
                       <a16:colId xmlns:a16="http://schemas.microsoft.com/office/drawing/2014/main" val="2766637368"/>
@@ -9470,7 +11575,7 @@
                   </a:extLst>
                 </a:gridCol>
               </a:tblGrid>
-              <a:tr h="370840">
+              <a:tr h="323165">
                 <a:tc>
                   <a:txBody>
                     <a:bodyPr/>
@@ -9478,7 +11583,7 @@
                     <a:p>
                       <a:pPr algn="ctr"/>
                       <a:r>
-                        <a:rPr lang="en-GB" sz="1600" dirty="0">
+                        <a:rPr lang="en-GB" sz="1400" dirty="0">
                           <a:solidFill>
                             <a:schemeClr val="bg1"/>
                           </a:solidFill>
@@ -9546,7 +11651,7 @@
                     <a:p>
                       <a:pPr algn="ctr"/>
                       <a:r>
-                        <a:rPr lang="en-GB" sz="1600" dirty="0">
+                        <a:rPr lang="en-GB" sz="1400" dirty="0">
                           <a:solidFill>
                             <a:schemeClr val="bg1"/>
                           </a:solidFill>
@@ -9614,7 +11719,7 @@
                     <a:p>
                       <a:pPr algn="ctr"/>
                       <a:r>
-                        <a:rPr lang="en-GB" sz="1600" dirty="0">
+                        <a:rPr lang="en-GB" sz="1400" dirty="0">
                           <a:solidFill>
                             <a:schemeClr val="bg1"/>
                           </a:solidFill>
@@ -9682,7 +11787,7 @@
                     <a:p>
                       <a:pPr algn="ctr"/>
                       <a:r>
-                        <a:rPr lang="en-GB" sz="1600" dirty="0">
+                        <a:rPr lang="en-GB" sz="1400" dirty="0">
                           <a:solidFill>
                             <a:schemeClr val="bg1"/>
                           </a:solidFill>
@@ -9750,7 +11855,7 @@
                     <a:p>
                       <a:pPr algn="ctr"/>
                       <a:r>
-                        <a:rPr lang="en-GB" sz="1600" dirty="0">
+                        <a:rPr lang="en-GB" sz="1400" dirty="0">
                           <a:solidFill>
                             <a:schemeClr val="bg1"/>
                           </a:solidFill>
@@ -9818,7 +11923,7 @@
                     <a:p>
                       <a:pPr algn="ctr"/>
                       <a:r>
-                        <a:rPr lang="en-GB" sz="1600" dirty="0">
+                        <a:rPr lang="en-GB" sz="1400" dirty="0">
                           <a:solidFill>
                             <a:schemeClr val="bg1"/>
                           </a:solidFill>
@@ -9886,7 +11991,7 @@
                     <a:p>
                       <a:pPr algn="ctr"/>
                       <a:r>
-                        <a:rPr lang="en-GB" sz="1600" dirty="0">
+                        <a:rPr lang="en-GB" sz="1400" dirty="0">
                           <a:solidFill>
                             <a:schemeClr val="bg1"/>
                           </a:solidFill>
@@ -9954,7 +12059,7 @@
                     <a:p>
                       <a:pPr algn="ctr"/>
                       <a:r>
-                        <a:rPr lang="en-GB" sz="1600" dirty="0">
+                        <a:rPr lang="en-GB" sz="1400" dirty="0">
                           <a:solidFill>
                             <a:schemeClr val="bg1"/>
                           </a:solidFill>
@@ -10022,7 +12127,7 @@
                     <a:p>
                       <a:pPr algn="ctr"/>
                       <a:r>
-                        <a:rPr lang="en-GB" sz="1600" dirty="0">
+                        <a:rPr lang="en-GB" sz="1400" dirty="0">
                           <a:solidFill>
                             <a:schemeClr val="bg1"/>
                           </a:solidFill>
@@ -10090,7 +12195,7 @@
                     <a:p>
                       <a:pPr algn="ctr"/>
                       <a:r>
-                        <a:rPr lang="en-GB" sz="1600" dirty="0">
+                        <a:rPr lang="en-GB" sz="1400" dirty="0">
                           <a:solidFill>
                             <a:schemeClr val="bg1"/>
                           </a:solidFill>
@@ -10158,7 +12263,7 @@
                     <a:p>
                       <a:pPr algn="ctr"/>
                       <a:r>
-                        <a:rPr lang="en-GB" sz="1600" dirty="0">
+                        <a:rPr lang="en-GB" sz="1400" dirty="0">
                           <a:solidFill>
                             <a:schemeClr val="bg1"/>
                           </a:solidFill>
@@ -10243,7 +12348,7 @@
         </p:nvSpPr>
         <p:spPr>
           <a:xfrm>
-            <a:off x="3873909" y="6587921"/>
+            <a:off x="6217130" y="6484251"/>
             <a:ext cx="1512857" cy="307777"/>
           </a:xfrm>
           <a:prstGeom prst="rect">
@@ -10316,57 +12421,15 @@
               </a:ext>
             </a:extLst>
           </p:cNvPr>
-          <p:cNvCxnSpPr/>
+          <p:cNvCxnSpPr>
+            <a:cxnSpLocks/>
+          </p:cNvCxnSpPr>
           <p:nvPr/>
         </p:nvCxnSpPr>
         <p:spPr>
           <a:xfrm flipV="1">
-            <a:off x="4493342" y="6261391"/>
-            <a:ext cx="0" cy="277358"/>
-          </a:xfrm>
-          <a:prstGeom prst="straightConnector1">
-            <a:avLst/>
-          </a:prstGeom>
-          <a:ln>
-            <a:solidFill>
-              <a:schemeClr val="accent2">
-                <a:lumMod val="75000"/>
-              </a:schemeClr>
-            </a:solidFill>
-            <a:tailEnd type="triangle"/>
-          </a:ln>
-        </p:spPr>
-        <p:style>
-          <a:lnRef idx="2">
-            <a:schemeClr val="accent2"/>
-          </a:lnRef>
-          <a:fillRef idx="0">
-            <a:schemeClr val="accent2"/>
-          </a:fillRef>
-          <a:effectRef idx="1">
-            <a:schemeClr val="accent2"/>
-          </a:effectRef>
-          <a:fontRef idx="minor">
-            <a:schemeClr val="tx1"/>
-          </a:fontRef>
-        </p:style>
-      </p:cxnSp>
-      <p:cxnSp>
-        <p:nvCxnSpPr>
-          <p:cNvPr id="13" name="Straight Arrow Connector 12">
-            <a:extLst>
-              <a:ext uri="{FF2B5EF4-FFF2-40B4-BE49-F238E27FC236}">
-                <a16:creationId xmlns:a16="http://schemas.microsoft.com/office/drawing/2014/main" id="{5997B019-E9A2-69EC-6463-9843EB92EF95}"/>
-              </a:ext>
-            </a:extLst>
-          </p:cNvPr>
-          <p:cNvCxnSpPr/>
-          <p:nvPr/>
-        </p:nvCxnSpPr>
-        <p:spPr>
-          <a:xfrm flipV="1">
-            <a:off x="10605730" y="6310563"/>
-            <a:ext cx="0" cy="277358"/>
+            <a:off x="10684498" y="6495661"/>
+            <a:ext cx="0" cy="96847"/>
           </a:xfrm>
           <a:prstGeom prst="straightConnector1">
             <a:avLst/>
@@ -10397,10 +12460,10 @@
       </p:cxnSp>
       <p:sp>
         <p:nvSpPr>
-          <p:cNvPr id="3" name="TextBox 2">
+          <p:cNvPr id="8" name="TextBox 7">
             <a:extLst>
               <a:ext uri="{FF2B5EF4-FFF2-40B4-BE49-F238E27FC236}">
-                <a16:creationId xmlns:a16="http://schemas.microsoft.com/office/drawing/2014/main" id="{F23B9519-39A5-2758-5421-F760CB3B3492}"/>
+                <a16:creationId xmlns:a16="http://schemas.microsoft.com/office/drawing/2014/main" id="{95D9FF3D-DB6C-7C93-BFE9-9DDC102BEA10}"/>
               </a:ext>
             </a:extLst>
           </p:cNvPr>
@@ -10409,8 +12472,8 @@
         </p:nvSpPr>
         <p:spPr>
           <a:xfrm>
-            <a:off x="4335445" y="4504153"/>
-            <a:ext cx="6428916" cy="1107996"/>
+            <a:off x="442754" y="1216439"/>
+            <a:ext cx="3696928" cy="461665"/>
           </a:xfrm>
           <a:prstGeom prst="rect">
             <a:avLst/>
@@ -10423,32 +12486,223 @@
           </a:bodyPr>
           <a:lstStyle/>
           <a:p>
-            <a:pPr lvl="1" algn="just"/>
-            <a:r>
-              <a:rPr lang="en-GB" sz="1200" i="1" dirty="0">
+            <a:r>
+              <a:rPr lang="en-GB" sz="2400" dirty="0">
+                <a:latin typeface="DM Serif Display" pitchFamily="2" charset="0"/>
+              </a:rPr>
+              <a:t>Experimental Groups</a:t>
+            </a:r>
+          </a:p>
+        </p:txBody>
+      </p:sp>
+      <p:sp>
+        <p:nvSpPr>
+          <p:cNvPr id="11" name="TextBox 10">
+            <a:extLst>
+              <a:ext uri="{FF2B5EF4-FFF2-40B4-BE49-F238E27FC236}">
+                <a16:creationId xmlns:a16="http://schemas.microsoft.com/office/drawing/2014/main" id="{AFB3EC43-1B7C-7447-969B-D4AA2ACC2124}"/>
+              </a:ext>
+            </a:extLst>
+          </p:cNvPr>
+          <p:cNvSpPr txBox="1"/>
+          <p:nvPr/>
+        </p:nvSpPr>
+        <p:spPr>
+          <a:xfrm>
+            <a:off x="5674381" y="1216440"/>
+            <a:ext cx="3696928" cy="461665"/>
+          </a:xfrm>
+          <a:prstGeom prst="rect">
+            <a:avLst/>
+          </a:prstGeom>
+          <a:noFill/>
+        </p:spPr>
+        <p:txBody>
+          <a:bodyPr wrap="square" rtlCol="0">
+            <a:spAutoFit/>
+          </a:bodyPr>
+          <a:lstStyle/>
+          <a:p>
+            <a:r>
+              <a:rPr lang="en-GB" sz="2400" dirty="0">
+                <a:latin typeface="DM Serif Display" pitchFamily="2" charset="0"/>
+              </a:rPr>
+              <a:t>Method</a:t>
+            </a:r>
+          </a:p>
+        </p:txBody>
+      </p:sp>
+      <p:sp>
+        <p:nvSpPr>
+          <p:cNvPr id="14" name="TextBox 13">
+            <a:extLst>
+              <a:ext uri="{FF2B5EF4-FFF2-40B4-BE49-F238E27FC236}">
+                <a16:creationId xmlns:a16="http://schemas.microsoft.com/office/drawing/2014/main" id="{CDB42DFB-1DEF-9BEC-6B63-F795ECB1D69D}"/>
+              </a:ext>
+            </a:extLst>
+          </p:cNvPr>
+          <p:cNvSpPr txBox="1"/>
+          <p:nvPr/>
+        </p:nvSpPr>
+        <p:spPr>
+          <a:xfrm>
+            <a:off x="5415881" y="1849918"/>
+            <a:ext cx="6156829" cy="3416320"/>
+          </a:xfrm>
+          <a:prstGeom prst="rect">
+            <a:avLst/>
+          </a:prstGeom>
+          <a:noFill/>
+        </p:spPr>
+        <p:txBody>
+          <a:bodyPr wrap="square" rtlCol="0">
+            <a:spAutoFit/>
+          </a:bodyPr>
+          <a:lstStyle/>
+          <a:p>
+            <a:pPr marL="285750" indent="-285750" algn="just">
+              <a:buFont typeface="Arial" panose="020B0604020202020204" pitchFamily="34" charset="0"/>
+              <a:buChar char="•"/>
+            </a:pPr>
+            <a:r>
+              <a:rPr lang="en-GB" dirty="0">
                 <a:latin typeface="CMU Sans Serif" panose="02000603000000000000" pitchFamily="2" charset="0"/>
                 <a:ea typeface="CMU Sans Serif" panose="02000603000000000000" pitchFamily="2" charset="0"/>
                 <a:cs typeface="CMU Sans Serif" panose="02000603000000000000" pitchFamily="2" charset="0"/>
               </a:rPr>
-              <a:t>i.e. “the caseworker answered all your questions in a [warm and friendly / cold and unfriendly]  manner … “</a:t>
-            </a:r>
-          </a:p>
-          <a:p>
-            <a:pPr lvl="1" algn="just"/>
-            <a:r>
-              <a:rPr lang="en-GB" sz="1200" i="1" dirty="0">
+              <a:t>Participants read one of four vignettes in which they imagine helping a close elderly relative apply for a place in a nursing home</a:t>
+            </a:r>
+          </a:p>
+          <a:p>
+            <a:pPr marL="285750" indent="-285750" algn="just">
+              <a:buFont typeface="Arial" panose="020B0604020202020204" pitchFamily="34" charset="0"/>
+              <a:buChar char="•"/>
+            </a:pPr>
+            <a:r>
+              <a:rPr lang="en-GB" dirty="0">
                 <a:latin typeface="CMU Sans Serif" panose="02000603000000000000" pitchFamily="2" charset="0"/>
                 <a:ea typeface="CMU Sans Serif" panose="02000603000000000000" pitchFamily="2" charset="0"/>
                 <a:cs typeface="CMU Sans Serif" panose="02000603000000000000" pitchFamily="2" charset="0"/>
               </a:rPr>
-              <a:t>“based on the caseworker’s recommendation, the municipality has decided to [reject/approve] the application to enter a nursing home.</a:t>
-            </a:r>
-          </a:p>
-          <a:p>
-            <a:endParaRPr lang="en-GB" dirty="0"/>
+              <a:t>Two features are manipulated in the vignettes: the description of the caseworker (high or low warmth) and decision on the application (accepted versus rejected).</a:t>
+            </a:r>
+          </a:p>
+          <a:p>
+            <a:pPr marL="285750" indent="-285750" algn="just">
+              <a:buFont typeface="Arial" panose="020B0604020202020204" pitchFamily="34" charset="0"/>
+              <a:buChar char="•"/>
+            </a:pPr>
+            <a:r>
+              <a:rPr lang="en-GB" dirty="0">
+                <a:latin typeface="CMU Sans Serif" panose="02000603000000000000" pitchFamily="2" charset="0"/>
+                <a:ea typeface="CMU Sans Serif" panose="02000603000000000000" pitchFamily="2" charset="0"/>
+                <a:cs typeface="CMU Sans Serif" panose="02000603000000000000" pitchFamily="2" charset="0"/>
+              </a:rPr>
+              <a:t>Participants answered a series of demographic questions as well as rating the caseworker and the decision on a number of traits</a:t>
+            </a:r>
+          </a:p>
+          <a:p>
+            <a:pPr marL="285750" indent="-285750" algn="just">
+              <a:buFont typeface="Arial" panose="020B0604020202020204" pitchFamily="34" charset="0"/>
+              <a:buChar char="•"/>
+            </a:pPr>
+            <a:r>
+              <a:rPr lang="en-GB" dirty="0">
+                <a:latin typeface="CMU Sans Serif" panose="02000603000000000000" pitchFamily="2" charset="0"/>
+                <a:ea typeface="CMU Sans Serif" panose="02000603000000000000" pitchFamily="2" charset="0"/>
+                <a:cs typeface="CMU Sans Serif" panose="02000603000000000000" pitchFamily="2" charset="0"/>
+              </a:rPr>
+              <a:t>Trust was then rated on a 0-10 scale depending on how much they trusted (a) the bureaucrat and (b) the municipality </a:t>
+            </a:r>
           </a:p>
         </p:txBody>
       </p:sp>
+      <p:sp>
+        <p:nvSpPr>
+          <p:cNvPr id="15" name="TextBox 14">
+            <a:extLst>
+              <a:ext uri="{FF2B5EF4-FFF2-40B4-BE49-F238E27FC236}">
+                <a16:creationId xmlns:a16="http://schemas.microsoft.com/office/drawing/2014/main" id="{2311C063-33C3-21E1-FFDD-4542DBC7BE60}"/>
+              </a:ext>
+            </a:extLst>
+          </p:cNvPr>
+          <p:cNvSpPr txBox="1"/>
+          <p:nvPr/>
+        </p:nvSpPr>
+        <p:spPr>
+          <a:xfrm>
+            <a:off x="1104913" y="5864184"/>
+            <a:ext cx="4124759" cy="523220"/>
+          </a:xfrm>
+          <a:prstGeom prst="rect">
+            <a:avLst/>
+          </a:prstGeom>
+          <a:noFill/>
+        </p:spPr>
+        <p:txBody>
+          <a:bodyPr wrap="square" rtlCol="0">
+            <a:spAutoFit/>
+          </a:bodyPr>
+          <a:lstStyle/>
+          <a:p>
+            <a:pPr algn="just"/>
+            <a:r>
+              <a:rPr lang="en-GB" sz="1400" i="1" dirty="0">
+                <a:latin typeface="CMU Sans Serif" panose="02000603000000000000" pitchFamily="2" charset="0"/>
+                <a:ea typeface="CMU Sans Serif" panose="02000603000000000000" pitchFamily="2" charset="0"/>
+                <a:cs typeface="CMU Sans Serif" panose="02000603000000000000" pitchFamily="2" charset="0"/>
+              </a:rPr>
+              <a:t>2x2 survey experiment on representative sample of Danish Citizens  (n = 1613) </a:t>
+            </a:r>
+          </a:p>
+        </p:txBody>
+      </p:sp>
+      <p:cxnSp>
+        <p:nvCxnSpPr>
+          <p:cNvPr id="17" name="Straight Arrow Connector 16">
+            <a:extLst>
+              <a:ext uri="{FF2B5EF4-FFF2-40B4-BE49-F238E27FC236}">
+                <a16:creationId xmlns:a16="http://schemas.microsoft.com/office/drawing/2014/main" id="{61764EC8-E00A-4B44-492C-51DC88557157}"/>
+              </a:ext>
+            </a:extLst>
+          </p:cNvPr>
+          <p:cNvCxnSpPr>
+            <a:cxnSpLocks/>
+          </p:cNvCxnSpPr>
+          <p:nvPr/>
+        </p:nvCxnSpPr>
+        <p:spPr>
+          <a:xfrm flipV="1">
+            <a:off x="6940763" y="6387404"/>
+            <a:ext cx="0" cy="96847"/>
+          </a:xfrm>
+          <a:prstGeom prst="straightConnector1">
+            <a:avLst/>
+          </a:prstGeom>
+          <a:ln>
+            <a:solidFill>
+              <a:schemeClr val="accent2">
+                <a:lumMod val="75000"/>
+              </a:schemeClr>
+            </a:solidFill>
+            <a:tailEnd type="triangle"/>
+          </a:ln>
+        </p:spPr>
+        <p:style>
+          <a:lnRef idx="2">
+            <a:schemeClr val="accent2"/>
+          </a:lnRef>
+          <a:fillRef idx="0">
+            <a:schemeClr val="accent2"/>
+          </a:fillRef>
+          <a:effectRef idx="1">
+            <a:schemeClr val="accent2"/>
+          </a:effectRef>
+          <a:fontRef idx="minor">
+            <a:schemeClr val="tx1"/>
+          </a:fontRef>
+        </p:style>
+      </p:cxnSp>
     </p:spTree>
     <p:extLst>
       <p:ext uri="{BB962C8B-B14F-4D97-AF65-F5344CB8AC3E}">
@@ -10925,105 +13179,6 @@
           </a:p>
         </p:txBody>
       </p:sp>
-      <p:sp>
-        <p:nvSpPr>
-          <p:cNvPr id="3" name="Content Placeholder 2">
-            <a:extLst>
-              <a:ext uri="{FF2B5EF4-FFF2-40B4-BE49-F238E27FC236}">
-                <a16:creationId xmlns:a16="http://schemas.microsoft.com/office/drawing/2014/main" id="{A37D7A28-F920-F94E-39A5-EA987DC7DDF7}"/>
-              </a:ext>
-            </a:extLst>
-          </p:cNvPr>
-          <p:cNvSpPr>
-            <a:spLocks noGrp="1"/>
-          </p:cNvSpPr>
-          <p:nvPr>
-            <p:ph idx="1"/>
-          </p:nvPr>
-        </p:nvSpPr>
-        <p:spPr>
-          <a:xfrm>
-            <a:off x="640080" y="2706624"/>
-            <a:ext cx="6894576" cy="3483864"/>
-          </a:xfrm>
-        </p:spPr>
-        <p:txBody>
-          <a:bodyPr>
-            <a:normAutofit/>
-          </a:bodyPr>
-          <a:lstStyle/>
-          <a:p>
-            <a:r>
-              <a:rPr lang="en-GB" sz="2000" dirty="0">
-                <a:latin typeface="CMU Sans Serif" panose="02000603000000000000" pitchFamily="2" charset="0"/>
-                <a:ea typeface="CMU Sans Serif" panose="02000603000000000000" pitchFamily="2" charset="0"/>
-                <a:cs typeface="CMU Sans Serif" panose="02000603000000000000" pitchFamily="2" charset="0"/>
-              </a:rPr>
-              <a:t>The two experimental treatments were coded into dummy variables: ’</a:t>
-            </a:r>
-          </a:p>
-          <a:p>
-            <a:pPr lvl="1"/>
-            <a:r>
-              <a:rPr lang="en-GB" sz="2000" dirty="0">
-                <a:latin typeface="CMU Sans Serif" panose="02000603000000000000" pitchFamily="2" charset="0"/>
-                <a:ea typeface="CMU Sans Serif" panose="02000603000000000000" pitchFamily="2" charset="0"/>
-                <a:cs typeface="CMU Sans Serif" panose="02000603000000000000" pitchFamily="2" charset="0"/>
-              </a:rPr>
-              <a:t>of treatment  → 0 = Unfavourable, 1 = Favourable</a:t>
-            </a:r>
-          </a:p>
-          <a:p>
-            <a:pPr lvl="1"/>
-            <a:r>
-              <a:rPr lang="en-GB" sz="2000" dirty="0">
-                <a:latin typeface="CMU Sans Serif" panose="02000603000000000000" pitchFamily="2" charset="0"/>
-                <a:ea typeface="CMU Sans Serif" panose="02000603000000000000" pitchFamily="2" charset="0"/>
-                <a:cs typeface="CMU Sans Serif" panose="02000603000000000000" pitchFamily="2" charset="0"/>
-              </a:rPr>
-              <a:t> warmth treatment → 0 = Low Warmth, 1 = High Warmth</a:t>
-            </a:r>
-          </a:p>
-          <a:p>
-            <a:r>
-              <a:rPr lang="en-GB" sz="2000" dirty="0">
-                <a:latin typeface="CMU Sans Serif" panose="02000603000000000000" pitchFamily="2" charset="0"/>
-                <a:ea typeface="CMU Sans Serif" panose="02000603000000000000" pitchFamily="2" charset="0"/>
-                <a:cs typeface="CMU Sans Serif" panose="02000603000000000000" pitchFamily="2" charset="0"/>
-              </a:rPr>
-              <a:t>Outcome variables ’trust b’ and ’trust m’ were rescaled from their original ‘0-10’ scale to a ‘0-1’ scale</a:t>
-            </a:r>
-          </a:p>
-          <a:p>
-            <a:pPr lvl="1"/>
-            <a:r>
-              <a:rPr lang="en-GB" sz="2000" dirty="0">
-                <a:latin typeface="CMU Sans Serif" panose="02000603000000000000" pitchFamily="2" charset="0"/>
-                <a:ea typeface="CMU Sans Serif" panose="02000603000000000000" pitchFamily="2" charset="0"/>
-                <a:cs typeface="CMU Sans Serif" panose="02000603000000000000" pitchFamily="2" charset="0"/>
-              </a:rPr>
-              <a:t>E.g. 5 → 0.5</a:t>
-            </a:r>
-          </a:p>
-          <a:p>
-            <a:r>
-              <a:rPr lang="en-GB" sz="2000" dirty="0">
-                <a:latin typeface="CMU Sans Serif" panose="02000603000000000000" pitchFamily="2" charset="0"/>
-                <a:ea typeface="CMU Sans Serif" panose="02000603000000000000" pitchFamily="2" charset="0"/>
-                <a:cs typeface="CMU Sans Serif" panose="02000603000000000000" pitchFamily="2" charset="0"/>
-              </a:rPr>
-              <a:t>Other demographic variables and manipulation validity test measures were included</a:t>
-            </a:r>
-          </a:p>
-          <a:p>
-            <a:endParaRPr lang="en-GB" sz="2000" dirty="0">
-              <a:latin typeface="CMU Sans Serif" panose="02000603000000000000" pitchFamily="2" charset="0"/>
-              <a:ea typeface="CMU Sans Serif" panose="02000603000000000000" pitchFamily="2" charset="0"/>
-              <a:cs typeface="CMU Sans Serif" panose="02000603000000000000" pitchFamily="2" charset="0"/>
-            </a:endParaRPr>
-          </a:p>
-        </p:txBody>
-      </p:sp>
       <p:pic>
         <p:nvPicPr>
           <p:cNvPr id="19" name="Picture 18" descr="A screenshot of a computer program&#10;&#10;AI-generated content may be incorrect.">
@@ -11039,7 +13194,7 @@
           <p:nvPr/>
         </p:nvPicPr>
         <p:blipFill>
-          <a:blip r:embed="rId2"/>
+          <a:blip r:embed="rId3"/>
           <a:stretch>
             <a:fillRect/>
           </a:stretch>
@@ -11059,36 +13214,6 @@
               </a:schemeClr>
             </a:solidFill>
           </a:ln>
-        </p:spPr>
-      </p:pic>
-      <p:pic>
-        <p:nvPicPr>
-          <p:cNvPr id="9" name="Picture 8" descr="A white background with numbers and text&#10;&#10;AI-generated content may be incorrect.">
-            <a:extLst>
-              <a:ext uri="{FF2B5EF4-FFF2-40B4-BE49-F238E27FC236}">
-                <a16:creationId xmlns:a16="http://schemas.microsoft.com/office/drawing/2014/main" id="{9302527A-30F6-582C-9A47-BDAD377A35C2}"/>
-              </a:ext>
-            </a:extLst>
-          </p:cNvPr>
-          <p:cNvPicPr>
-            <a:picLocks noChangeAspect="1"/>
-          </p:cNvPicPr>
-          <p:nvPr/>
-        </p:nvPicPr>
-        <p:blipFill>
-          <a:blip r:embed="rId3"/>
-          <a:stretch>
-            <a:fillRect/>
-          </a:stretch>
-        </p:blipFill>
-        <p:spPr>
-          <a:xfrm>
-            <a:off x="5566770" y="319775"/>
-            <a:ext cx="6441986" cy="2238590"/>
-          </a:xfrm>
-          <a:prstGeom prst="rect">
-            <a:avLst/>
-          </a:prstGeom>
         </p:spPr>
       </p:pic>
       <p:sp>
@@ -11128,99 +13253,76 @@
           </a:p>
         </p:txBody>
       </p:sp>
-    </p:spTree>
-    <p:extLst>
-      <p:ext uri="{BB962C8B-B14F-4D97-AF65-F5344CB8AC3E}">
-        <p14:creationId xmlns:p14="http://schemas.microsoft.com/office/powerpoint/2010/main" val="283605075"/>
-      </p:ext>
-    </p:extLst>
-  </p:cSld>
-  <p:clrMapOvr>
-    <a:masterClrMapping/>
-  </p:clrMapOvr>
-</p:sld>
-</file>
-
-<file path=ppt/slides/slide6.xml><?xml version="1.0" encoding="utf-8"?>
-<p:sld xmlns:a="http://schemas.openxmlformats.org/drawingml/2006/main" xmlns:r="http://schemas.openxmlformats.org/officeDocument/2006/relationships" xmlns:p="http://schemas.openxmlformats.org/presentationml/2006/main">
-  <p:cSld>
-    <p:bg>
-      <p:bgPr>
-        <a:solidFill>
-          <a:schemeClr val="bg1"/>
-        </a:solidFill>
-        <a:effectLst/>
-      </p:bgPr>
-    </p:bg>
-    <p:spTree>
-      <p:nvGrpSpPr>
-        <p:cNvPr id="1" name=""/>
-        <p:cNvGrpSpPr/>
-        <p:nvPr/>
-      </p:nvGrpSpPr>
-      <p:grpSpPr>
-        <a:xfrm>
-          <a:off x="0" y="0"/>
-          <a:ext cx="0" cy="0"/>
-          <a:chOff x="0" y="0"/>
-          <a:chExt cx="0" cy="0"/>
-        </a:xfrm>
-      </p:grpSpPr>
-      <p:sp useBgFill="1">
-        <p:nvSpPr>
-          <p:cNvPr id="12" name="Rectangle 11">
+      <p:pic>
+        <p:nvPicPr>
+          <p:cNvPr id="4" name="Content Placeholder 3" descr="A white background with numbers and text&#10;&#10;AI-generated content may be incorrect.">
             <a:extLst>
               <a:ext uri="{FF2B5EF4-FFF2-40B4-BE49-F238E27FC236}">
-                <a16:creationId xmlns:a16="http://schemas.microsoft.com/office/drawing/2014/main" id="{979E27D9-03C7-44E2-9FF8-15D0C8506AF7}"/>
-              </a:ext>
-              <a:ext uri="{C183D7F6-B498-43B3-948B-1728B52AA6E4}">
-                <adec:decorative xmlns:adec="http://schemas.microsoft.com/office/drawing/2017/decorative" val="1"/>
+                <a16:creationId xmlns:a16="http://schemas.microsoft.com/office/drawing/2014/main" id="{9302527A-30F6-582C-9A47-BDAD377A35C2}"/>
               </a:ext>
             </a:extLst>
           </p:cNvPr>
-          <p:cNvSpPr>
-            <a:spLocks noGrp="1" noRot="1" noChangeAspect="1" noMove="1" noResize="1" noEditPoints="1" noAdjustHandles="1" noChangeArrowheads="1" noChangeShapeType="1" noTextEdit="1"/>
-          </p:cNvSpPr>
+          <p:cNvPicPr>
+            <a:picLocks noGrp="1" noChangeAspect="1"/>
+          </p:cNvPicPr>
           <p:nvPr>
-            <p:extLst>
-              <p:ext uri="{386F3935-93C4-4BCD-93E2-E3B085C9AB24}">
-                <p16:designElem xmlns:p16="http://schemas.microsoft.com/office/powerpoint/2015/main" val="1"/>
-              </p:ext>
-            </p:extLst>
+            <p:ph idx="1"/>
           </p:nvPr>
-        </p:nvSpPr>
+        </p:nvPicPr>
+        <p:blipFill>
+          <a:blip r:embed="rId4"/>
+          <a:stretch>
+            <a:fillRect/>
+          </a:stretch>
+        </p:blipFill>
         <p:spPr>
           <a:xfrm>
-            <a:off x="0" y="0"/>
-            <a:ext cx="12192000" cy="6858000"/>
+            <a:off x="323088" y="3789680"/>
+            <a:ext cx="7511301" cy="2615355"/>
           </a:xfrm>
           <a:prstGeom prst="rect">
             <a:avLst/>
           </a:prstGeom>
-          <a:ln w="12700" cap="flat" cmpd="sng" algn="ctr">
-            <a:noFill/>
-            <a:prstDash val="solid"/>
-            <a:miter lim="800000"/>
+        </p:spPr>
+      </p:pic>
+      <p:sp>
+        <p:nvSpPr>
+          <p:cNvPr id="5" name="Speech Bubble: Rectangle 4">
+            <a:extLst>
+              <a:ext uri="{FF2B5EF4-FFF2-40B4-BE49-F238E27FC236}">
+                <a16:creationId xmlns:a16="http://schemas.microsoft.com/office/drawing/2014/main" id="{8D04A5B7-3D88-2489-7F4B-C46BDE4A2C5B}"/>
+              </a:ext>
+            </a:extLst>
+          </p:cNvPr>
+          <p:cNvSpPr/>
+          <p:nvPr/>
+        </p:nvSpPr>
+        <p:spPr>
+          <a:xfrm>
+            <a:off x="2441558" y="2967668"/>
+            <a:ext cx="1264776" cy="493181"/>
+          </a:xfrm>
+          <a:prstGeom prst="wedgeRectCallout">
+            <a:avLst>
+              <a:gd name="adj1" fmla="val 20121"/>
+              <a:gd name="adj2" fmla="val 102652"/>
+            </a:avLst>
+          </a:prstGeom>
+          <a:solidFill>
+            <a:schemeClr val="bg1"/>
+          </a:solidFill>
+          <a:ln w="38100">
+            <a:solidFill>
+              <a:schemeClr val="accent5">
+                <a:lumMod val="75000"/>
+              </a:schemeClr>
+            </a:solidFill>
           </a:ln>
-          <a:effectLst/>
-          <a:extLst>
-            <a:ext uri="{91240B29-F687-4F45-9708-019B960494DF}">
-              <a14:hiddenLine xmlns:a14="http://schemas.microsoft.com/office/drawing/2010/main" w="12700" cap="flat" cmpd="sng" algn="ctr">
-                <a:solidFill>
-                  <a:schemeClr val="accent1">
-                    <a:shade val="50000"/>
-                  </a:schemeClr>
-                </a:solidFill>
-                <a:prstDash val="solid"/>
-                <a:miter lim="800000"/>
-              </a14:hiddenLine>
-            </a:ext>
-          </a:extLst>
         </p:spPr>
         <p:style>
           <a:lnRef idx="2">
             <a:schemeClr val="accent1">
-              <a:shade val="50000"/>
+              <a:shade val="15000"/>
             </a:schemeClr>
           </a:lnRef>
           <a:fillRef idx="1">
@@ -11238,258 +13340,58 @@
           <a:lstStyle/>
           <a:p>
             <a:pPr algn="ctr"/>
-            <a:endParaRPr lang="en-US"/>
+            <a:r>
+              <a:rPr lang="en-GB" sz="1000" dirty="0">
+                <a:solidFill>
+                  <a:schemeClr val="tx1"/>
+                </a:solidFill>
+                <a:latin typeface="CMU Sans Serif" panose="02000603000000000000" pitchFamily="2" charset="0"/>
+                <a:ea typeface="CMU Sans Serif" panose="02000603000000000000" pitchFamily="2" charset="0"/>
+                <a:cs typeface="CMU Sans Serif" panose="02000603000000000000" pitchFamily="2" charset="0"/>
+              </a:rPr>
+              <a:t>Favourability of decision outcome</a:t>
+            </a:r>
           </a:p>
         </p:txBody>
       </p:sp>
       <p:sp>
         <p:nvSpPr>
-          <p:cNvPr id="4" name="Title 3">
+          <p:cNvPr id="6" name="Speech Bubble: Rectangle 5">
             <a:extLst>
               <a:ext uri="{FF2B5EF4-FFF2-40B4-BE49-F238E27FC236}">
-                <a16:creationId xmlns:a16="http://schemas.microsoft.com/office/drawing/2014/main" id="{5BCB1478-199E-687F-C052-924337C8D6EE}"/>
+                <a16:creationId xmlns:a16="http://schemas.microsoft.com/office/drawing/2014/main" id="{7AE5F20B-D6A6-DDBC-9B3D-735526E1C6AB}"/>
               </a:ext>
             </a:extLst>
           </p:cNvPr>
-          <p:cNvSpPr>
-            <a:spLocks noGrp="1"/>
-          </p:cNvSpPr>
-          <p:nvPr>
-            <p:ph type="title"/>
-          </p:nvPr>
+          <p:cNvSpPr/>
+          <p:nvPr/>
         </p:nvSpPr>
         <p:spPr>
           <a:xfrm>
-            <a:off x="210422" y="194941"/>
-            <a:ext cx="5588494" cy="1014263"/>
+            <a:off x="3894040" y="3019176"/>
+            <a:ext cx="1061947" cy="404059"/>
           </a:xfrm>
-        </p:spPr>
-        <p:txBody>
-          <a:bodyPr vert="horz" lIns="91440" tIns="45720" rIns="91440" bIns="45720" rtlCol="0" anchor="b">
-            <a:normAutofit/>
-          </a:bodyPr>
-          <a:lstStyle/>
-          <a:p>
-            <a:r>
-              <a:rPr lang="en-US" sz="4800" kern="1200" dirty="0">
-                <a:solidFill>
-                  <a:schemeClr val="tx1"/>
-                </a:solidFill>
-                <a:latin typeface="DM Serif Display" pitchFamily="2" charset="0"/>
-              </a:rPr>
-              <a:t>Original Study</a:t>
-            </a:r>
-          </a:p>
-        </p:txBody>
-      </p:sp>
-      <p:sp>
-        <p:nvSpPr>
-          <p:cNvPr id="6" name="Content Placeholder 5">
-            <a:extLst>
-              <a:ext uri="{FF2B5EF4-FFF2-40B4-BE49-F238E27FC236}">
-                <a16:creationId xmlns:a16="http://schemas.microsoft.com/office/drawing/2014/main" id="{3105E852-38E2-5CFC-BA22-863AC7208CAA}"/>
-              </a:ext>
-            </a:extLst>
-          </p:cNvPr>
-          <p:cNvSpPr>
-            <a:spLocks noGrp="1"/>
-          </p:cNvSpPr>
-          <p:nvPr>
-            <p:ph sz="half" idx="2"/>
-          </p:nvPr>
-        </p:nvSpPr>
-        <p:spPr>
-          <a:xfrm>
-            <a:off x="210422" y="1711738"/>
-            <a:ext cx="5588494" cy="4186526"/>
-          </a:xfrm>
-        </p:spPr>
-        <p:txBody>
-          <a:bodyPr vert="horz" lIns="91440" tIns="45720" rIns="91440" bIns="45720" rtlCol="0" anchor="t">
-            <a:normAutofit/>
-          </a:bodyPr>
-          <a:lstStyle/>
-          <a:p>
-            <a:pPr marL="285750"/>
-            <a:r>
-              <a:rPr lang="en-US" sz="2000" dirty="0">
-                <a:latin typeface="CMU Sans Serif" panose="02000603000000000000" pitchFamily="2" charset="0"/>
-                <a:ea typeface="CMU Sans Serif" panose="02000603000000000000" pitchFamily="2" charset="0"/>
-                <a:cs typeface="CMU Sans Serif" panose="02000603000000000000" pitchFamily="2" charset="0"/>
-              </a:rPr>
-              <a:t>The author conducts four OLS linear regression, with the two trust outcomes variables testing simple and interaction models </a:t>
-            </a:r>
-          </a:p>
-          <a:p>
-            <a:pPr marL="285750"/>
-            <a:r>
-              <a:rPr lang="en-US" sz="2000" dirty="0">
-                <a:latin typeface="CMU Sans Serif" panose="02000603000000000000" pitchFamily="2" charset="0"/>
-                <a:ea typeface="CMU Sans Serif" panose="02000603000000000000" pitchFamily="2" charset="0"/>
-                <a:cs typeface="CMU Sans Serif" panose="02000603000000000000" pitchFamily="2" charset="0"/>
-              </a:rPr>
-              <a:t>Decision </a:t>
-            </a:r>
-            <a:r>
-              <a:rPr lang="en-US" sz="2000" dirty="0" err="1">
-                <a:latin typeface="CMU Sans Serif" panose="02000603000000000000" pitchFamily="2" charset="0"/>
-                <a:ea typeface="CMU Sans Serif" panose="02000603000000000000" pitchFamily="2" charset="0"/>
-                <a:cs typeface="CMU Sans Serif" panose="02000603000000000000" pitchFamily="2" charset="0"/>
-              </a:rPr>
-              <a:t>favourability</a:t>
-            </a:r>
-            <a:r>
-              <a:rPr lang="en-US" sz="2000" dirty="0">
-                <a:latin typeface="CMU Sans Serif" panose="02000603000000000000" pitchFamily="2" charset="0"/>
-                <a:ea typeface="CMU Sans Serif" panose="02000603000000000000" pitchFamily="2" charset="0"/>
-                <a:cs typeface="CMU Sans Serif" panose="02000603000000000000" pitchFamily="2" charset="0"/>
-              </a:rPr>
-              <a:t> significantly increases citizens level of trust in both the bureaucrat and the municipality, an increase of  18.8% points and  17.9% points respectively </a:t>
-            </a:r>
-            <a:r>
-              <a:rPr lang="en-GB" sz="2000" dirty="0">
-                <a:latin typeface="CMU Sans Serif" panose="02000603000000000000" pitchFamily="2" charset="0"/>
-                <a:ea typeface="CMU Sans Serif" panose="02000603000000000000" pitchFamily="2" charset="0"/>
-                <a:cs typeface="CMU Sans Serif" panose="02000603000000000000" pitchFamily="2" charset="0"/>
-              </a:rPr>
-              <a:t>→  supporting H1</a:t>
-            </a:r>
-            <a:r>
-              <a:rPr lang="en-US" sz="2000" dirty="0">
-                <a:latin typeface="CMU Sans Serif" panose="02000603000000000000" pitchFamily="2" charset="0"/>
-                <a:ea typeface="CMU Sans Serif" panose="02000603000000000000" pitchFamily="2" charset="0"/>
-                <a:cs typeface="CMU Sans Serif" panose="02000603000000000000" pitchFamily="2" charset="0"/>
-              </a:rPr>
-              <a:t> </a:t>
-            </a:r>
-          </a:p>
-          <a:p>
-            <a:pPr marL="285750"/>
-            <a:r>
-              <a:rPr lang="en-US" sz="2000" dirty="0">
-                <a:latin typeface="CMU Sans Serif" panose="02000603000000000000" pitchFamily="2" charset="0"/>
-                <a:ea typeface="CMU Sans Serif" panose="02000603000000000000" pitchFamily="2" charset="0"/>
-                <a:cs typeface="CMU Sans Serif" panose="02000603000000000000" pitchFamily="2" charset="0"/>
-              </a:rPr>
-              <a:t>The effect of outcome </a:t>
-            </a:r>
-            <a:r>
-              <a:rPr lang="en-US" sz="2000" dirty="0" err="1">
-                <a:latin typeface="CMU Sans Serif" panose="02000603000000000000" pitchFamily="2" charset="0"/>
-                <a:ea typeface="CMU Sans Serif" panose="02000603000000000000" pitchFamily="2" charset="0"/>
-                <a:cs typeface="CMU Sans Serif" panose="02000603000000000000" pitchFamily="2" charset="0"/>
-              </a:rPr>
-              <a:t>favourability</a:t>
-            </a:r>
-            <a:r>
-              <a:rPr lang="en-US" sz="2000" dirty="0">
-                <a:latin typeface="CMU Sans Serif" panose="02000603000000000000" pitchFamily="2" charset="0"/>
-                <a:ea typeface="CMU Sans Serif" panose="02000603000000000000" pitchFamily="2" charset="0"/>
-                <a:cs typeface="CMU Sans Serif" panose="02000603000000000000" pitchFamily="2" charset="0"/>
-              </a:rPr>
-              <a:t> is not weaker when bureaucrats showed high warmth versus low warmth, as demonstrated by the non-significant interaction terms for both outcome </a:t>
-            </a:r>
-            <a:r>
-              <a:rPr lang="en-GB" sz="2000" dirty="0">
-                <a:latin typeface="CMU Sans Serif" panose="02000603000000000000" pitchFamily="2" charset="0"/>
-                <a:ea typeface="CMU Sans Serif" panose="02000603000000000000" pitchFamily="2" charset="0"/>
-                <a:cs typeface="CMU Sans Serif" panose="02000603000000000000" pitchFamily="2" charset="0"/>
-              </a:rPr>
-              <a:t>→  not supporting </a:t>
-            </a:r>
-            <a:r>
-              <a:rPr lang="en-US" sz="2000" dirty="0">
-                <a:latin typeface="CMU Sans Serif" panose="02000603000000000000" pitchFamily="2" charset="0"/>
-                <a:ea typeface="CMU Sans Serif" panose="02000603000000000000" pitchFamily="2" charset="0"/>
-                <a:cs typeface="CMU Sans Serif" panose="02000603000000000000" pitchFamily="2" charset="0"/>
-              </a:rPr>
-              <a:t>H2</a:t>
-            </a:r>
-          </a:p>
-        </p:txBody>
-      </p:sp>
-      <p:pic>
-        <p:nvPicPr>
-          <p:cNvPr id="7" name="Content Placeholder 14" descr="A table of results with numbers&#10;&#10;AI-generated content may be incorrect.">
-            <a:extLst>
-              <a:ext uri="{FF2B5EF4-FFF2-40B4-BE49-F238E27FC236}">
-                <a16:creationId xmlns:a16="http://schemas.microsoft.com/office/drawing/2014/main" id="{246EF6BF-AF4F-CFC5-0D10-8CC02B19D200}"/>
-              </a:ext>
-            </a:extLst>
-          </p:cNvPr>
-          <p:cNvPicPr>
-            <a:picLocks noGrp="1" noChangeAspect="1"/>
-          </p:cNvPicPr>
-          <p:nvPr>
-            <p:ph sz="half" idx="1"/>
-          </p:nvPr>
-        </p:nvPicPr>
-        <p:blipFill>
-          <a:blip r:embed="rId2"/>
-          <a:stretch>
-            <a:fillRect/>
-          </a:stretch>
-        </p:blipFill>
-        <p:spPr>
-          <a:xfrm>
-            <a:off x="5798916" y="1711738"/>
-            <a:ext cx="6224538" cy="3423494"/>
-          </a:xfrm>
-          <a:prstGeom prst="rect">
-            <a:avLst/>
+          <a:prstGeom prst="wedgeRectCallout">
+            <a:avLst>
+              <a:gd name="adj1" fmla="val 18343"/>
+              <a:gd name="adj2" fmla="val 121193"/>
+            </a:avLst>
           </a:prstGeom>
-        </p:spPr>
-      </p:pic>
-      <p:sp>
-        <p:nvSpPr>
-          <p:cNvPr id="14" name="Rectangle 13">
-            <a:extLst>
-              <a:ext uri="{FF2B5EF4-FFF2-40B4-BE49-F238E27FC236}">
-                <a16:creationId xmlns:a16="http://schemas.microsoft.com/office/drawing/2014/main" id="{EEBF1590-3B36-48EE-A89D-3B6F3CB256AB}"/>
-              </a:ext>
-              <a:ext uri="{C183D7F6-B498-43B3-948B-1728B52AA6E4}">
-                <adec:decorative xmlns:adec="http://schemas.microsoft.com/office/drawing/2017/decorative" val="1"/>
-              </a:ext>
-            </a:extLst>
-          </p:cNvPr>
-          <p:cNvSpPr>
-            <a:spLocks noGrp="1" noRot="1" noChangeAspect="1" noMove="1" noResize="1" noEditPoints="1" noAdjustHandles="1" noChangeArrowheads="1" noChangeShapeType="1" noTextEdit="1"/>
-          </p:cNvSpPr>
-          <p:nvPr>
-            <p:extLst>
-              <p:ext uri="{386F3935-93C4-4BCD-93E2-E3B085C9AB24}">
-                <p16:designElem xmlns:p16="http://schemas.microsoft.com/office/powerpoint/2015/main" val="1"/>
-              </p:ext>
-            </p:extLst>
-          </p:nvPr>
-        </p:nvSpPr>
-        <p:spPr>
-          <a:xfrm rot="10800000" flipH="1">
-            <a:off x="0" y="6400799"/>
-            <a:ext cx="12192000" cy="456773"/>
-          </a:xfrm>
-          <a:prstGeom prst="rect">
-            <a:avLst/>
-          </a:prstGeom>
-          <a:gradFill>
-            <a:gsLst>
-              <a:gs pos="0">
-                <a:schemeClr val="accent1"/>
-              </a:gs>
-              <a:gs pos="78000">
-                <a:srgbClr val="000000"/>
-              </a:gs>
-            </a:gsLst>
-            <a:lin ang="2400000" scaled="0"/>
-          </a:gradFill>
-          <a:ln>
-            <a:noFill/>
+          <a:solidFill>
+            <a:schemeClr val="bg1"/>
+          </a:solidFill>
+          <a:ln w="38100">
+            <a:solidFill>
+              <a:schemeClr val="accent5">
+                <a:lumMod val="75000"/>
+              </a:schemeClr>
+            </a:solidFill>
           </a:ln>
         </p:spPr>
         <p:style>
           <a:lnRef idx="2">
             <a:schemeClr val="accent1">
-              <a:shade val="50000"/>
+              <a:shade val="15000"/>
             </a:schemeClr>
           </a:lnRef>
           <a:fillRef idx="1">
@@ -11507,64 +13409,58 @@
           <a:lstStyle/>
           <a:p>
             <a:pPr algn="ctr"/>
-            <a:endParaRPr lang="en-US"/>
+            <a:r>
+              <a:rPr lang="en-GB" sz="1000" dirty="0">
+                <a:solidFill>
+                  <a:schemeClr val="tx1"/>
+                </a:solidFill>
+                <a:latin typeface="CMU Sans Serif" panose="02000603000000000000" pitchFamily="2" charset="0"/>
+                <a:ea typeface="CMU Sans Serif" panose="02000603000000000000" pitchFamily="2" charset="0"/>
+                <a:cs typeface="CMU Sans Serif" panose="02000603000000000000" pitchFamily="2" charset="0"/>
+              </a:rPr>
+              <a:t>Warmth of Bureaucrat</a:t>
+            </a:r>
           </a:p>
         </p:txBody>
       </p:sp>
       <p:sp>
         <p:nvSpPr>
-          <p:cNvPr id="16" name="Rectangle 15">
+          <p:cNvPr id="7" name="Speech Bubble: Rectangle 6">
             <a:extLst>
               <a:ext uri="{FF2B5EF4-FFF2-40B4-BE49-F238E27FC236}">
-                <a16:creationId xmlns:a16="http://schemas.microsoft.com/office/drawing/2014/main" id="{AC8F6C8C-AB5A-4548-942D-E3FD40ACBC49}"/>
-              </a:ext>
-              <a:ext uri="{C183D7F6-B498-43B3-948B-1728B52AA6E4}">
-                <adec:decorative xmlns:adec="http://schemas.microsoft.com/office/drawing/2017/decorative" val="1"/>
+                <a16:creationId xmlns:a16="http://schemas.microsoft.com/office/drawing/2014/main" id="{674DCF63-26F3-ACC4-A4D7-FFBDB77755B1}"/>
               </a:ext>
             </a:extLst>
           </p:cNvPr>
-          <p:cNvSpPr>
-            <a:spLocks noGrp="1" noRot="1" noChangeAspect="1" noMove="1" noResize="1" noEditPoints="1" noAdjustHandles="1" noChangeArrowheads="1" noChangeShapeType="1" noTextEdit="1"/>
-          </p:cNvSpPr>
-          <p:nvPr>
-            <p:extLst>
-              <p:ext uri="{386F3935-93C4-4BCD-93E2-E3B085C9AB24}">
-                <p16:designElem xmlns:p16="http://schemas.microsoft.com/office/powerpoint/2015/main" val="1"/>
-              </p:ext>
-            </p:extLst>
-          </p:nvPr>
+          <p:cNvSpPr/>
+          <p:nvPr/>
         </p:nvSpPr>
         <p:spPr>
-          <a:xfrm flipH="1">
-            <a:off x="4038600" y="6400799"/>
-            <a:ext cx="8153398" cy="456772"/>
+          <a:xfrm>
+            <a:off x="5275540" y="3068320"/>
+            <a:ext cx="1154604" cy="392529"/>
           </a:xfrm>
-          <a:prstGeom prst="rect">
-            <a:avLst/>
+          <a:prstGeom prst="wedgeRectCallout">
+            <a:avLst>
+              <a:gd name="adj1" fmla="val 15470"/>
+              <a:gd name="adj2" fmla="val 126000"/>
+            </a:avLst>
           </a:prstGeom>
-          <a:gradFill>
-            <a:gsLst>
-              <a:gs pos="0">
-                <a:srgbClr val="000000">
-                  <a:alpha val="63000"/>
-                </a:srgbClr>
-              </a:gs>
-              <a:gs pos="100000">
-                <a:schemeClr val="accent1">
-                  <a:lumMod val="75000"/>
-                </a:schemeClr>
-              </a:gs>
-            </a:gsLst>
-            <a:lin ang="13800000" scaled="0"/>
-          </a:gradFill>
-          <a:ln>
-            <a:noFill/>
+          <a:solidFill>
+            <a:schemeClr val="bg1"/>
+          </a:solidFill>
+          <a:ln w="38100">
+            <a:solidFill>
+              <a:schemeClr val="accent5">
+                <a:lumMod val="75000"/>
+              </a:schemeClr>
+            </a:solidFill>
           </a:ln>
         </p:spPr>
         <p:style>
           <a:lnRef idx="2">
             <a:schemeClr val="accent1">
-              <a:shade val="50000"/>
+              <a:shade val="15000"/>
             </a:schemeClr>
           </a:lnRef>
           <a:fillRef idx="1">
@@ -11582,14 +13478,93 @@
           <a:lstStyle/>
           <a:p>
             <a:pPr algn="ctr"/>
-            <a:endParaRPr lang="en-US"/>
+            <a:r>
+              <a:rPr lang="en-GB" sz="1000" dirty="0">
+                <a:solidFill>
+                  <a:schemeClr val="tx1"/>
+                </a:solidFill>
+                <a:latin typeface="CMU Sans Serif" panose="02000603000000000000" pitchFamily="2" charset="0"/>
+                <a:ea typeface="CMU Sans Serif" panose="02000603000000000000" pitchFamily="2" charset="0"/>
+                <a:cs typeface="CMU Sans Serif" panose="02000603000000000000" pitchFamily="2" charset="0"/>
+              </a:rPr>
+              <a:t>Trust in Bureaucrat</a:t>
+            </a:r>
+          </a:p>
+        </p:txBody>
+      </p:sp>
+      <p:sp>
+        <p:nvSpPr>
+          <p:cNvPr id="8" name="Speech Bubble: Rectangle 7">
+            <a:extLst>
+              <a:ext uri="{FF2B5EF4-FFF2-40B4-BE49-F238E27FC236}">
+                <a16:creationId xmlns:a16="http://schemas.microsoft.com/office/drawing/2014/main" id="{C8C37B76-13C7-6E27-403D-9A065C412945}"/>
+              </a:ext>
+            </a:extLst>
+          </p:cNvPr>
+          <p:cNvSpPr/>
+          <p:nvPr/>
+        </p:nvSpPr>
+        <p:spPr>
+          <a:xfrm>
+            <a:off x="6635670" y="3036470"/>
+            <a:ext cx="1031320" cy="392529"/>
+          </a:xfrm>
+          <a:prstGeom prst="wedgeRectCallout">
+            <a:avLst>
+              <a:gd name="adj1" fmla="val -23620"/>
+              <a:gd name="adj2" fmla="val 142947"/>
+            </a:avLst>
+          </a:prstGeom>
+          <a:solidFill>
+            <a:schemeClr val="bg1"/>
+          </a:solidFill>
+          <a:ln w="38100">
+            <a:solidFill>
+              <a:schemeClr val="accent5">
+                <a:lumMod val="75000"/>
+              </a:schemeClr>
+            </a:solidFill>
+          </a:ln>
+        </p:spPr>
+        <p:style>
+          <a:lnRef idx="2">
+            <a:schemeClr val="accent1">
+              <a:shade val="15000"/>
+            </a:schemeClr>
+          </a:lnRef>
+          <a:fillRef idx="1">
+            <a:schemeClr val="accent1"/>
+          </a:fillRef>
+          <a:effectRef idx="0">
+            <a:schemeClr val="accent1"/>
+          </a:effectRef>
+          <a:fontRef idx="minor">
+            <a:schemeClr val="lt1"/>
+          </a:fontRef>
+        </p:style>
+        <p:txBody>
+          <a:bodyPr rtlCol="0" anchor="ctr"/>
+          <a:lstStyle/>
+          <a:p>
+            <a:pPr algn="ctr"/>
+            <a:r>
+              <a:rPr lang="en-GB" sz="1000" dirty="0">
+                <a:solidFill>
+                  <a:schemeClr val="tx1"/>
+                </a:solidFill>
+                <a:latin typeface="CMU Sans Serif" panose="02000603000000000000" pitchFamily="2" charset="0"/>
+                <a:ea typeface="CMU Sans Serif" panose="02000603000000000000" pitchFamily="2" charset="0"/>
+                <a:cs typeface="CMU Sans Serif" panose="02000603000000000000" pitchFamily="2" charset="0"/>
+              </a:rPr>
+              <a:t>Trust in Municipality</a:t>
+            </a:r>
           </a:p>
         </p:txBody>
       </p:sp>
     </p:spTree>
     <p:extLst>
       <p:ext uri="{BB962C8B-B14F-4D97-AF65-F5344CB8AC3E}">
-        <p14:creationId xmlns:p14="http://schemas.microsoft.com/office/powerpoint/2010/main" val="1386954468"/>
+        <p14:creationId xmlns:p14="http://schemas.microsoft.com/office/powerpoint/2010/main" val="283605075"/>
       </p:ext>
     </p:extLst>
   </p:cSld>
@@ -11599,7 +13574,7 @@
 </p:sld>
 </file>
 
-<file path=ppt/slides/slide7.xml><?xml version="1.0" encoding="utf-8"?>
+<file path=ppt/slides/slide6.xml><?xml version="1.0" encoding="utf-8"?>
 <p:sld xmlns:a="http://schemas.openxmlformats.org/drawingml/2006/main" xmlns:r="http://schemas.openxmlformats.org/officeDocument/2006/relationships" xmlns:p="http://schemas.openxmlformats.org/presentationml/2006/main">
   <p:cSld>
     <p:bg>
@@ -11741,7 +13716,7 @@
                 </a:solidFill>
                 <a:latin typeface="DM Serif Display" pitchFamily="2" charset="0"/>
               </a:rPr>
-              <a:t>Original Study</a:t>
+              <a:t>Overall Findings</a:t>
             </a:r>
           </a:p>
         </p:txBody>
@@ -11910,43 +13885,31 @@
         </p:nvSpPr>
         <p:spPr>
           <a:xfrm>
-            <a:off x="556066" y="1209204"/>
-            <a:ext cx="5518355" cy="4743923"/>
+            <a:off x="439893" y="1404144"/>
+            <a:ext cx="4629947" cy="4580096"/>
           </a:xfrm>
         </p:spPr>
         <p:txBody>
           <a:bodyPr>
-            <a:normAutofit/>
+            <a:normAutofit lnSpcReduction="10000"/>
           </a:bodyPr>
           <a:lstStyle/>
           <a:p>
-            <a:pPr marL="285750"/>
-            <a:r>
-              <a:rPr lang="en-US" sz="2000" dirty="0">
+            <a:pPr marL="285750">
+              <a:lnSpc>
+                <a:spcPct val="110000"/>
+              </a:lnSpc>
+            </a:pPr>
+            <a:r>
+              <a:rPr lang="en-US" sz="1800" dirty="0">
                 <a:latin typeface="CMU Sans Serif" panose="02000603000000000000" pitchFamily="2" charset="0"/>
                 <a:ea typeface="CMU Sans Serif" panose="02000603000000000000" pitchFamily="2" charset="0"/>
                 <a:cs typeface="CMU Sans Serif" panose="02000603000000000000" pitchFamily="2" charset="0"/>
               </a:rPr>
-              <a:t>Warmth significantly increases the level of trust in the bureaucrat and the municipality, both for both </a:t>
-            </a:r>
-            <a:r>
-              <a:rPr lang="en-US" sz="2000" dirty="0" err="1">
-                <a:latin typeface="CMU Sans Serif" panose="02000603000000000000" pitchFamily="2" charset="0"/>
-                <a:ea typeface="CMU Sans Serif" panose="02000603000000000000" pitchFamily="2" charset="0"/>
-                <a:cs typeface="CMU Sans Serif" panose="02000603000000000000" pitchFamily="2" charset="0"/>
-              </a:rPr>
-              <a:t>unfavourable</a:t>
-            </a:r>
-            <a:r>
-              <a:rPr lang="en-US" sz="2000" dirty="0">
-                <a:latin typeface="CMU Sans Serif" panose="02000603000000000000" pitchFamily="2" charset="0"/>
-                <a:ea typeface="CMU Sans Serif" panose="02000603000000000000" pitchFamily="2" charset="0"/>
-                <a:cs typeface="CMU Sans Serif" panose="02000603000000000000" pitchFamily="2" charset="0"/>
-              </a:rPr>
-              <a:t> and </a:t>
-            </a:r>
-            <a:r>
-              <a:rPr lang="en-US" sz="2000" dirty="0" err="1">
+              <a:t>The level of trust in the bureaucrat and the municipality increases based both on </a:t>
+            </a:r>
+            <a:r>
+              <a:rPr lang="en-US" sz="1800" dirty="0" err="1">
                 <a:latin typeface="CMU Sans Serif" panose="02000603000000000000" pitchFamily="2" charset="0"/>
                 <a:ea typeface="CMU Sans Serif" panose="02000603000000000000" pitchFamily="2" charset="0"/>
                 <a:cs typeface="CMU Sans Serif" panose="02000603000000000000" pitchFamily="2" charset="0"/>
@@ -11954,26 +13917,22 @@
               <a:t>favourable</a:t>
             </a:r>
             <a:r>
-              <a:rPr lang="en-US" sz="2000" dirty="0">
+              <a:rPr lang="en-US" sz="1800" dirty="0">
                 <a:latin typeface="CMU Sans Serif" panose="02000603000000000000" pitchFamily="2" charset="0"/>
                 <a:ea typeface="CMU Sans Serif" panose="02000603000000000000" pitchFamily="2" charset="0"/>
                 <a:cs typeface="CMU Sans Serif" panose="02000603000000000000" pitchFamily="2" charset="0"/>
               </a:rPr>
-              <a:t> conditions</a:t>
-            </a:r>
-          </a:p>
-          <a:p>
-            <a:pPr marL="285750"/>
-            <a:r>
-              <a:rPr lang="en-US" sz="2000" dirty="0">
-                <a:latin typeface="CMU Sans Serif" panose="02000603000000000000" pitchFamily="2" charset="0"/>
-                <a:ea typeface="CMU Sans Serif" panose="02000603000000000000" pitchFamily="2" charset="0"/>
-                <a:cs typeface="CMU Sans Serif" panose="02000603000000000000" pitchFamily="2" charset="0"/>
-              </a:rPr>
-              <a:t>The </a:t>
-            </a:r>
-            <a:r>
-              <a:rPr lang="en-US" sz="2000" dirty="0" err="1">
+              <a:t> outcomes and on warmth</a:t>
+            </a:r>
+          </a:p>
+          <a:p>
+            <a:pPr marL="285750">
+              <a:lnSpc>
+                <a:spcPct val="110000"/>
+              </a:lnSpc>
+            </a:pPr>
+            <a:r>
+              <a:rPr lang="en-US" sz="1800" dirty="0" err="1">
                 <a:latin typeface="CMU Sans Serif" panose="02000603000000000000" pitchFamily="2" charset="0"/>
                 <a:ea typeface="CMU Sans Serif" panose="02000603000000000000" pitchFamily="2" charset="0"/>
                 <a:cs typeface="CMU Sans Serif" panose="02000603000000000000" pitchFamily="2" charset="0"/>
@@ -11981,26 +13940,83 @@
               <a:t>Favourable</a:t>
             </a:r>
             <a:r>
-              <a:rPr lang="en-US" sz="2000" dirty="0">
+              <a:rPr lang="en-US" sz="1800" dirty="0">
                 <a:latin typeface="CMU Sans Serif" panose="02000603000000000000" pitchFamily="2" charset="0"/>
                 <a:ea typeface="CMU Sans Serif" panose="02000603000000000000" pitchFamily="2" charset="0"/>
                 <a:cs typeface="CMU Sans Serif" panose="02000603000000000000" pitchFamily="2" charset="0"/>
               </a:rPr>
-              <a:t>  + High Warmth group had the largest average trust scores of 0.617 and 0.585 respectively </a:t>
-            </a:r>
-          </a:p>
-          <a:p>
-            <a:pPr marL="285750"/>
-            <a:r>
-              <a:rPr lang="en-US" sz="2000" dirty="0">
+              <a:t> outcome has a higher impact on trust than warmth in both cases</a:t>
+            </a:r>
+          </a:p>
+          <a:p>
+            <a:pPr marL="285750">
+              <a:lnSpc>
+                <a:spcPct val="110000"/>
+              </a:lnSpc>
+            </a:pPr>
+            <a:r>
+              <a:rPr lang="en-US" sz="1800" dirty="0">
                 <a:latin typeface="CMU Sans Serif" panose="02000603000000000000" pitchFamily="2" charset="0"/>
                 <a:ea typeface="CMU Sans Serif" panose="02000603000000000000" pitchFamily="2" charset="0"/>
                 <a:cs typeface="CMU Sans Serif" panose="02000603000000000000" pitchFamily="2" charset="0"/>
               </a:rPr>
-              <a:t>Hansen concludes that “</a:t>
-            </a:r>
-            <a:r>
-              <a:rPr lang="en-US" sz="2000" i="1" dirty="0">
+              <a:t>Results for the bureaucrat and the municipality are similar</a:t>
+            </a:r>
+          </a:p>
+          <a:p>
+            <a:pPr marL="57150" indent="0">
+              <a:lnSpc>
+                <a:spcPct val="110000"/>
+              </a:lnSpc>
+              <a:buNone/>
+            </a:pPr>
+            <a:endParaRPr lang="en-US" sz="1800" dirty="0">
+              <a:latin typeface="CMU Sans Serif" panose="02000603000000000000" pitchFamily="2" charset="0"/>
+              <a:ea typeface="CMU Sans Serif" panose="02000603000000000000" pitchFamily="2" charset="0"/>
+              <a:cs typeface="CMU Sans Serif" panose="02000603000000000000" pitchFamily="2" charset="0"/>
+            </a:endParaRPr>
+          </a:p>
+          <a:p>
+            <a:pPr marL="57150" indent="0">
+              <a:lnSpc>
+                <a:spcPct val="110000"/>
+              </a:lnSpc>
+              <a:buNone/>
+            </a:pPr>
+            <a:r>
+              <a:rPr lang="en-US" sz="1800" dirty="0">
+                <a:latin typeface="CMU Sans Serif" panose="02000603000000000000" pitchFamily="2" charset="0"/>
+                <a:ea typeface="CMU Sans Serif" panose="02000603000000000000" pitchFamily="2" charset="0"/>
+                <a:cs typeface="CMU Sans Serif" panose="02000603000000000000" pitchFamily="2" charset="0"/>
+              </a:rPr>
+              <a:t>Hansen concludes that:</a:t>
+            </a:r>
+          </a:p>
+          <a:p>
+            <a:pPr marL="57150" indent="0">
+              <a:lnSpc>
+                <a:spcPct val="110000"/>
+              </a:lnSpc>
+              <a:buNone/>
+            </a:pPr>
+            <a:r>
+              <a:rPr lang="en-US" sz="1800" dirty="0">
+                <a:latin typeface="CMU Sans Serif" panose="02000603000000000000" pitchFamily="2" charset="0"/>
+                <a:ea typeface="CMU Sans Serif" panose="02000603000000000000" pitchFamily="2" charset="0"/>
+                <a:cs typeface="CMU Sans Serif" panose="02000603000000000000" pitchFamily="2" charset="0"/>
+              </a:rPr>
+              <a:t> </a:t>
+            </a:r>
+            <a:r>
+              <a:rPr lang="en-US" sz="1800" b="1" dirty="0">
+                <a:latin typeface="CMU Sans Serif" panose="02000603000000000000" pitchFamily="2" charset="0"/>
+                <a:ea typeface="CMU Sans Serif" panose="02000603000000000000" pitchFamily="2" charset="0"/>
+                <a:cs typeface="CMU Sans Serif" panose="02000603000000000000" pitchFamily="2" charset="0"/>
+              </a:rPr>
+              <a:t>“</a:t>
+            </a:r>
+            <a:r>
+              <a:rPr lang="en-US" sz="1800" b="1" i="1" dirty="0">
                 <a:latin typeface="CMU Sans Serif" panose="02000603000000000000" pitchFamily="2" charset="0"/>
                 <a:ea typeface="CMU Sans Serif" panose="02000603000000000000" pitchFamily="2" charset="0"/>
                 <a:cs typeface="CMU Sans Serif" panose="02000603000000000000" pitchFamily="2" charset="0"/>
@@ -12008,13 +14024,26 @@
               <a:t>public leaders should be concerned about whether their employees behave in a warm manner if they want to build greater trust</a:t>
             </a:r>
             <a:r>
-              <a:rPr lang="en-US" sz="2000" dirty="0">
+              <a:rPr lang="en-US" sz="1800" b="1" dirty="0">
                 <a:latin typeface="CMU Sans Serif" panose="02000603000000000000" pitchFamily="2" charset="0"/>
                 <a:ea typeface="CMU Sans Serif" panose="02000603000000000000" pitchFamily="2" charset="0"/>
                 <a:cs typeface="CMU Sans Serif" panose="02000603000000000000" pitchFamily="2" charset="0"/>
               </a:rPr>
               <a:t>”</a:t>
             </a:r>
+          </a:p>
+          <a:p>
+            <a:pPr marL="57150" indent="0">
+              <a:lnSpc>
+                <a:spcPct val="110000"/>
+              </a:lnSpc>
+              <a:buNone/>
+            </a:pPr>
+            <a:endParaRPr lang="en-US" sz="1800" b="1" dirty="0">
+              <a:latin typeface="CMU Sans Serif" panose="02000603000000000000" pitchFamily="2" charset="0"/>
+              <a:ea typeface="CMU Sans Serif" panose="02000603000000000000" pitchFamily="2" charset="0"/>
+              <a:cs typeface="CMU Sans Serif" panose="02000603000000000000" pitchFamily="2" charset="0"/>
+            </a:endParaRPr>
           </a:p>
         </p:txBody>
       </p:sp>
@@ -12033,34 +14062,458 @@
           <p:nvPr/>
         </p:nvPicPr>
         <p:blipFill>
-          <a:blip r:embed="rId2"/>
+          <a:blip r:embed="rId3"/>
           <a:stretch>
             <a:fillRect/>
           </a:stretch>
         </p:blipFill>
         <p:spPr>
           <a:xfrm>
-            <a:off x="6630486" y="457200"/>
-            <a:ext cx="5262181" cy="5719763"/>
+            <a:off x="7127378" y="676487"/>
+            <a:ext cx="5064622" cy="5505025"/>
           </a:xfrm>
           <a:prstGeom prst="rect">
             <a:avLst/>
           </a:prstGeom>
         </p:spPr>
       </p:pic>
+      <p:sp>
+        <p:nvSpPr>
+          <p:cNvPr id="2" name="TextBox 1">
+            <a:extLst>
+              <a:ext uri="{FF2B5EF4-FFF2-40B4-BE49-F238E27FC236}">
+                <a16:creationId xmlns:a16="http://schemas.microsoft.com/office/drawing/2014/main" id="{57A3D2D5-5F44-470B-D2BE-40F91D75E93F}"/>
+              </a:ext>
+            </a:extLst>
+          </p:cNvPr>
+          <p:cNvSpPr txBox="1"/>
+          <p:nvPr/>
+        </p:nvSpPr>
+        <p:spPr>
+          <a:xfrm>
+            <a:off x="6096000" y="1857395"/>
+            <a:ext cx="1503680" cy="307777"/>
+          </a:xfrm>
+          <a:prstGeom prst="rect">
+            <a:avLst/>
+          </a:prstGeom>
+          <a:noFill/>
+        </p:spPr>
+        <p:txBody>
+          <a:bodyPr wrap="square" rtlCol="0">
+            <a:spAutoFit/>
+          </a:bodyPr>
+          <a:lstStyle/>
+          <a:p>
+            <a:r>
+              <a:rPr lang="en-GB" sz="1400" dirty="0">
+                <a:latin typeface="DM Serif Display" pitchFamily="2" charset="0"/>
+              </a:rPr>
+              <a:t>Bureaucrat</a:t>
+            </a:r>
+          </a:p>
+        </p:txBody>
+      </p:sp>
+      <p:sp>
+        <p:nvSpPr>
+          <p:cNvPr id="5" name="TextBox 4">
+            <a:extLst>
+              <a:ext uri="{FF2B5EF4-FFF2-40B4-BE49-F238E27FC236}">
+                <a16:creationId xmlns:a16="http://schemas.microsoft.com/office/drawing/2014/main" id="{A662DA95-BED3-9AA0-1CF0-F9ED1D0F068B}"/>
+              </a:ext>
+            </a:extLst>
+          </p:cNvPr>
+          <p:cNvSpPr txBox="1"/>
+          <p:nvPr/>
+        </p:nvSpPr>
+        <p:spPr>
+          <a:xfrm>
+            <a:off x="5953304" y="4385052"/>
+            <a:ext cx="1503680" cy="307777"/>
+          </a:xfrm>
+          <a:prstGeom prst="rect">
+            <a:avLst/>
+          </a:prstGeom>
+          <a:noFill/>
+        </p:spPr>
+        <p:txBody>
+          <a:bodyPr wrap="square" rtlCol="0">
+            <a:spAutoFit/>
+          </a:bodyPr>
+          <a:lstStyle/>
+          <a:p>
+            <a:r>
+              <a:rPr lang="en-GB" sz="1400" dirty="0">
+                <a:latin typeface="DM Serif Display" pitchFamily="2" charset="0"/>
+              </a:rPr>
+              <a:t>Municipality </a:t>
+            </a:r>
+          </a:p>
+        </p:txBody>
+      </p:sp>
+      <p:sp>
+        <p:nvSpPr>
+          <p:cNvPr id="6" name="TextBox 5">
+            <a:extLst>
+              <a:ext uri="{FF2B5EF4-FFF2-40B4-BE49-F238E27FC236}">
+                <a16:creationId xmlns:a16="http://schemas.microsoft.com/office/drawing/2014/main" id="{68BC01B2-ACC6-B0C9-5DE7-2823A57BB608}"/>
+              </a:ext>
+            </a:extLst>
+          </p:cNvPr>
+          <p:cNvSpPr txBox="1"/>
+          <p:nvPr/>
+        </p:nvSpPr>
+        <p:spPr>
+          <a:xfrm>
+            <a:off x="10513102" y="457200"/>
+            <a:ext cx="1503680" cy="307777"/>
+          </a:xfrm>
+          <a:prstGeom prst="rect">
+            <a:avLst/>
+          </a:prstGeom>
+          <a:noFill/>
+        </p:spPr>
+        <p:txBody>
+          <a:bodyPr wrap="square" rtlCol="0">
+            <a:spAutoFit/>
+          </a:bodyPr>
+          <a:lstStyle/>
+          <a:p>
+            <a:r>
+              <a:rPr lang="en-GB" sz="1400" dirty="0">
+                <a:latin typeface="DM Serif Display" pitchFamily="2" charset="0"/>
+              </a:rPr>
+              <a:t>Warm</a:t>
+            </a:r>
+          </a:p>
+        </p:txBody>
+      </p:sp>
+      <p:sp>
+        <p:nvSpPr>
+          <p:cNvPr id="7" name="TextBox 6">
+            <a:extLst>
+              <a:ext uri="{FF2B5EF4-FFF2-40B4-BE49-F238E27FC236}">
+                <a16:creationId xmlns:a16="http://schemas.microsoft.com/office/drawing/2014/main" id="{F2EE0424-9FAF-0716-526B-3E7B92ECB507}"/>
+              </a:ext>
+            </a:extLst>
+          </p:cNvPr>
+          <p:cNvSpPr txBox="1"/>
+          <p:nvPr/>
+        </p:nvSpPr>
+        <p:spPr>
+          <a:xfrm>
+            <a:off x="8243618" y="457200"/>
+            <a:ext cx="1503680" cy="307777"/>
+          </a:xfrm>
+          <a:prstGeom prst="rect">
+            <a:avLst/>
+          </a:prstGeom>
+          <a:noFill/>
+        </p:spPr>
+        <p:txBody>
+          <a:bodyPr wrap="square" rtlCol="0">
+            <a:spAutoFit/>
+          </a:bodyPr>
+          <a:lstStyle/>
+          <a:p>
+            <a:r>
+              <a:rPr lang="en-GB" sz="1400" dirty="0">
+                <a:latin typeface="DM Serif Display" pitchFamily="2" charset="0"/>
+              </a:rPr>
+              <a:t>Not Warm </a:t>
+            </a:r>
+          </a:p>
+        </p:txBody>
+      </p:sp>
+    </p:spTree>
+    <p:extLst>
+      <p:ext uri="{BB962C8B-B14F-4D97-AF65-F5344CB8AC3E}">
+        <p14:creationId xmlns:p14="http://schemas.microsoft.com/office/powerpoint/2010/main" val="1971965409"/>
+      </p:ext>
+    </p:extLst>
+  </p:cSld>
+  <p:clrMapOvr>
+    <a:masterClrMapping/>
+  </p:clrMapOvr>
+</p:sld>
+</file>
+
+<file path=ppt/slides/slide7.xml><?xml version="1.0" encoding="utf-8"?>
+<p:sld xmlns:a="http://schemas.openxmlformats.org/drawingml/2006/main" xmlns:r="http://schemas.openxmlformats.org/officeDocument/2006/relationships" xmlns:p="http://schemas.openxmlformats.org/presentationml/2006/main">
+  <p:cSld>
+    <p:bg>
+      <p:bgPr>
+        <a:solidFill>
+          <a:schemeClr val="bg1"/>
+        </a:solidFill>
+        <a:effectLst/>
+      </p:bgPr>
+    </p:bg>
+    <p:spTree>
+      <p:nvGrpSpPr>
+        <p:cNvPr id="1" name=""/>
+        <p:cNvGrpSpPr/>
+        <p:nvPr/>
+      </p:nvGrpSpPr>
+      <p:grpSpPr>
+        <a:xfrm>
+          <a:off x="0" y="0"/>
+          <a:ext cx="0" cy="0"/>
+          <a:chOff x="0" y="0"/>
+          <a:chExt cx="0" cy="0"/>
+        </a:xfrm>
+      </p:grpSpPr>
+      <p:sp useBgFill="1">
+        <p:nvSpPr>
+          <p:cNvPr id="12" name="Rectangle 11">
+            <a:extLst>
+              <a:ext uri="{FF2B5EF4-FFF2-40B4-BE49-F238E27FC236}">
+                <a16:creationId xmlns:a16="http://schemas.microsoft.com/office/drawing/2014/main" id="{979E27D9-03C7-44E2-9FF8-15D0C8506AF7}"/>
+              </a:ext>
+              <a:ext uri="{C183D7F6-B498-43B3-948B-1728B52AA6E4}">
+                <adec:decorative xmlns:adec="http://schemas.microsoft.com/office/drawing/2017/decorative" val="1"/>
+              </a:ext>
+            </a:extLst>
+          </p:cNvPr>
+          <p:cNvSpPr>
+            <a:spLocks noGrp="1" noRot="1" noChangeAspect="1" noMove="1" noResize="1" noEditPoints="1" noAdjustHandles="1" noChangeArrowheads="1" noChangeShapeType="1" noTextEdit="1"/>
+          </p:cNvSpPr>
+          <p:nvPr>
+            <p:extLst>
+              <p:ext uri="{386F3935-93C4-4BCD-93E2-E3B085C9AB24}">
+                <p16:designElem xmlns:p16="http://schemas.microsoft.com/office/powerpoint/2015/main" val="1"/>
+              </p:ext>
+            </p:extLst>
+          </p:nvPr>
+        </p:nvSpPr>
+        <p:spPr>
+          <a:xfrm>
+            <a:off x="0" y="0"/>
+            <a:ext cx="12192000" cy="6858000"/>
+          </a:xfrm>
+          <a:prstGeom prst="rect">
+            <a:avLst/>
+          </a:prstGeom>
+          <a:ln w="12700" cap="flat" cmpd="sng" algn="ctr">
+            <a:noFill/>
+            <a:prstDash val="solid"/>
+            <a:miter lim="800000"/>
+          </a:ln>
+          <a:effectLst/>
+          <a:extLst>
+            <a:ext uri="{91240B29-F687-4F45-9708-019B960494DF}">
+              <a14:hiddenLine xmlns:a14="http://schemas.microsoft.com/office/drawing/2010/main" w="12700" cap="flat" cmpd="sng" algn="ctr">
+                <a:solidFill>
+                  <a:schemeClr val="accent1">
+                    <a:shade val="50000"/>
+                  </a:schemeClr>
+                </a:solidFill>
+                <a:prstDash val="solid"/>
+                <a:miter lim="800000"/>
+              </a14:hiddenLine>
+            </a:ext>
+          </a:extLst>
+        </p:spPr>
+        <p:style>
+          <a:lnRef idx="2">
+            <a:schemeClr val="accent1">
+              <a:shade val="50000"/>
+            </a:schemeClr>
+          </a:lnRef>
+          <a:fillRef idx="1">
+            <a:schemeClr val="accent1"/>
+          </a:fillRef>
+          <a:effectRef idx="0">
+            <a:schemeClr val="accent1"/>
+          </a:effectRef>
+          <a:fontRef idx="minor">
+            <a:schemeClr val="lt1"/>
+          </a:fontRef>
+        </p:style>
+        <p:txBody>
+          <a:bodyPr rtlCol="0" anchor="ctr"/>
+          <a:lstStyle/>
+          <a:p>
+            <a:pPr algn="ctr"/>
+            <a:endParaRPr lang="en-US"/>
+          </a:p>
+        </p:txBody>
+      </p:sp>
+      <p:sp>
+        <p:nvSpPr>
+          <p:cNvPr id="4" name="Title 3">
+            <a:extLst>
+              <a:ext uri="{FF2B5EF4-FFF2-40B4-BE49-F238E27FC236}">
+                <a16:creationId xmlns:a16="http://schemas.microsoft.com/office/drawing/2014/main" id="{5BCB1478-199E-687F-C052-924337C8D6EE}"/>
+              </a:ext>
+            </a:extLst>
+          </p:cNvPr>
+          <p:cNvSpPr>
+            <a:spLocks noGrp="1"/>
+          </p:cNvSpPr>
+          <p:nvPr>
+            <p:ph type="title"/>
+          </p:nvPr>
+        </p:nvSpPr>
+        <p:spPr>
+          <a:xfrm>
+            <a:off x="164122" y="227924"/>
+            <a:ext cx="4199533" cy="1014263"/>
+          </a:xfrm>
+        </p:spPr>
+        <p:txBody>
+          <a:bodyPr vert="horz" lIns="91440" tIns="45720" rIns="91440" bIns="45720" rtlCol="0" anchor="b">
+            <a:normAutofit/>
+          </a:bodyPr>
+          <a:lstStyle/>
+          <a:p>
+            <a:r>
+              <a:rPr lang="en-US" sz="4800" kern="1200" dirty="0">
+                <a:solidFill>
+                  <a:schemeClr val="tx1"/>
+                </a:solidFill>
+                <a:latin typeface="DM Serif Display" pitchFamily="2" charset="0"/>
+              </a:rPr>
+              <a:t>OLS Results</a:t>
+            </a:r>
+          </a:p>
+        </p:txBody>
+      </p:sp>
+      <p:sp>
+        <p:nvSpPr>
+          <p:cNvPr id="6" name="Content Placeholder 5">
+            <a:extLst>
+              <a:ext uri="{FF2B5EF4-FFF2-40B4-BE49-F238E27FC236}">
+                <a16:creationId xmlns:a16="http://schemas.microsoft.com/office/drawing/2014/main" id="{3105E852-38E2-5CFC-BA22-863AC7208CAA}"/>
+              </a:ext>
+            </a:extLst>
+          </p:cNvPr>
+          <p:cNvSpPr>
+            <a:spLocks noGrp="1"/>
+          </p:cNvSpPr>
+          <p:nvPr>
+            <p:ph sz="half" idx="2"/>
+          </p:nvPr>
+        </p:nvSpPr>
+        <p:spPr>
+          <a:xfrm>
+            <a:off x="215882" y="1470111"/>
+            <a:ext cx="3606836" cy="4456127"/>
+          </a:xfrm>
+        </p:spPr>
+        <p:txBody>
+          <a:bodyPr vert="horz" lIns="91440" tIns="45720" rIns="91440" bIns="45720" rtlCol="0" anchor="t">
+            <a:normAutofit/>
+          </a:bodyPr>
+          <a:lstStyle/>
+          <a:p>
+            <a:pPr marL="285750">
+              <a:lnSpc>
+                <a:spcPct val="100000"/>
+              </a:lnSpc>
+            </a:pPr>
+            <a:r>
+              <a:rPr lang="en-US" sz="1800" dirty="0">
+                <a:latin typeface="CMU Sans Serif" panose="02000603000000000000" pitchFamily="2" charset="0"/>
+                <a:ea typeface="CMU Sans Serif" panose="02000603000000000000" pitchFamily="2" charset="0"/>
+                <a:cs typeface="CMU Sans Serif" panose="02000603000000000000" pitchFamily="2" charset="0"/>
+              </a:rPr>
+              <a:t>Positive outcome significantly increases level of trust in both bureaucrat and municipality by 18.8% points and  17.9% points respectively </a:t>
+            </a:r>
+            <a:r>
+              <a:rPr lang="en-GB" sz="1800" dirty="0">
+                <a:latin typeface="CMU Sans Serif" panose="02000603000000000000" pitchFamily="2" charset="0"/>
+                <a:ea typeface="CMU Sans Serif" panose="02000603000000000000" pitchFamily="2" charset="0"/>
+                <a:cs typeface="CMU Sans Serif" panose="02000603000000000000" pitchFamily="2" charset="0"/>
+              </a:rPr>
+              <a:t>→  </a:t>
+            </a:r>
+            <a:r>
+              <a:rPr lang="en-GB" sz="1800" b="1" dirty="0">
+                <a:latin typeface="CMU Sans Serif" panose="02000603000000000000" pitchFamily="2" charset="0"/>
+                <a:ea typeface="CMU Sans Serif" panose="02000603000000000000" pitchFamily="2" charset="0"/>
+                <a:cs typeface="CMU Sans Serif" panose="02000603000000000000" pitchFamily="2" charset="0"/>
+              </a:rPr>
+              <a:t>supporting H1</a:t>
+            </a:r>
+            <a:r>
+              <a:rPr lang="en-US" sz="1800" b="1" dirty="0">
+                <a:latin typeface="CMU Sans Serif" panose="02000603000000000000" pitchFamily="2" charset="0"/>
+                <a:ea typeface="CMU Sans Serif" panose="02000603000000000000" pitchFamily="2" charset="0"/>
+                <a:cs typeface="CMU Sans Serif" panose="02000603000000000000" pitchFamily="2" charset="0"/>
+              </a:rPr>
+              <a:t> </a:t>
+            </a:r>
+          </a:p>
+          <a:p>
+            <a:pPr marL="285750">
+              <a:lnSpc>
+                <a:spcPct val="100000"/>
+              </a:lnSpc>
+            </a:pPr>
+            <a:r>
+              <a:rPr lang="en-US" sz="1800" dirty="0">
+                <a:latin typeface="CMU Sans Serif" panose="02000603000000000000" pitchFamily="2" charset="0"/>
+                <a:ea typeface="CMU Sans Serif" panose="02000603000000000000" pitchFamily="2" charset="0"/>
+                <a:cs typeface="CMU Sans Serif" panose="02000603000000000000" pitchFamily="2" charset="0"/>
+              </a:rPr>
+              <a:t>The negative effect of outcome is not reduced when bureaucrats showed high warmth versus low warmth, as interaction terms are not significant for either outcome </a:t>
+            </a:r>
+            <a:r>
+              <a:rPr lang="en-GB" sz="1800" dirty="0">
+                <a:latin typeface="CMU Sans Serif" panose="02000603000000000000" pitchFamily="2" charset="0"/>
+                <a:ea typeface="CMU Sans Serif" panose="02000603000000000000" pitchFamily="2" charset="0"/>
+                <a:cs typeface="CMU Sans Serif" panose="02000603000000000000" pitchFamily="2" charset="0"/>
+              </a:rPr>
+              <a:t>→  </a:t>
+            </a:r>
+            <a:r>
+              <a:rPr lang="en-GB" sz="1800" b="1" dirty="0">
+                <a:latin typeface="CMU Sans Serif" panose="02000603000000000000" pitchFamily="2" charset="0"/>
+                <a:ea typeface="CMU Sans Serif" panose="02000603000000000000" pitchFamily="2" charset="0"/>
+                <a:cs typeface="CMU Sans Serif" panose="02000603000000000000" pitchFamily="2" charset="0"/>
+              </a:rPr>
+              <a:t>not supporting </a:t>
+            </a:r>
+            <a:r>
+              <a:rPr lang="en-US" sz="1800" b="1" dirty="0">
+                <a:latin typeface="CMU Sans Serif" panose="02000603000000000000" pitchFamily="2" charset="0"/>
+                <a:ea typeface="CMU Sans Serif" panose="02000603000000000000" pitchFamily="2" charset="0"/>
+                <a:cs typeface="CMU Sans Serif" panose="02000603000000000000" pitchFamily="2" charset="0"/>
+              </a:rPr>
+              <a:t>H2</a:t>
+            </a:r>
+          </a:p>
+          <a:p>
+            <a:pPr marL="57150" indent="0">
+              <a:lnSpc>
+                <a:spcPct val="100000"/>
+              </a:lnSpc>
+              <a:buNone/>
+            </a:pPr>
+            <a:endParaRPr lang="en-US" sz="1800" dirty="0">
+              <a:latin typeface="CMU Sans Serif" panose="02000603000000000000" pitchFamily="2" charset="0"/>
+              <a:ea typeface="CMU Sans Serif" panose="02000603000000000000" pitchFamily="2" charset="0"/>
+              <a:cs typeface="CMU Sans Serif" panose="02000603000000000000" pitchFamily="2" charset="0"/>
+            </a:endParaRPr>
+          </a:p>
+        </p:txBody>
+      </p:sp>
       <p:pic>
         <p:nvPicPr>
-          <p:cNvPr id="23" name="Picture 22" descr="A group of black text&#10;&#10;AI-generated content may be incorrect.">
+          <p:cNvPr id="7" name="Content Placeholder 14" descr="A table of results with numbers&#10;&#10;AI-generated content may be incorrect.">
             <a:extLst>
               <a:ext uri="{FF2B5EF4-FFF2-40B4-BE49-F238E27FC236}">
-                <a16:creationId xmlns:a16="http://schemas.microsoft.com/office/drawing/2014/main" id="{960C9821-3D42-19EB-54B0-0DB226754925}"/>
+                <a16:creationId xmlns:a16="http://schemas.microsoft.com/office/drawing/2014/main" id="{246EF6BF-AF4F-CFC5-0D10-8CC02B19D200}"/>
               </a:ext>
             </a:extLst>
           </p:cNvPr>
           <p:cNvPicPr>
-            <a:picLocks noChangeAspect="1"/>
+            <a:picLocks noGrp="1" noChangeAspect="1"/>
           </p:cNvPicPr>
-          <p:nvPr/>
+          <p:nvPr>
+            <p:ph sz="half" idx="1"/>
+          </p:nvPr>
         </p:nvPicPr>
         <p:blipFill>
           <a:blip r:embed="rId3"/>
@@ -12070,18 +14523,353 @@
         </p:blipFill>
         <p:spPr>
           <a:xfrm>
-            <a:off x="788924" y="4747763"/>
-            <a:ext cx="4600354" cy="1541118"/>
+            <a:off x="4081826" y="1258071"/>
+            <a:ext cx="7894292" cy="4341858"/>
           </a:xfrm>
           <a:prstGeom prst="rect">
             <a:avLst/>
           </a:prstGeom>
+          <a:ln w="19050">
+            <a:solidFill>
+              <a:schemeClr val="accent5">
+                <a:lumMod val="75000"/>
+              </a:schemeClr>
+            </a:solidFill>
+          </a:ln>
         </p:spPr>
       </p:pic>
+      <p:sp>
+        <p:nvSpPr>
+          <p:cNvPr id="14" name="Rectangle 13">
+            <a:extLst>
+              <a:ext uri="{FF2B5EF4-FFF2-40B4-BE49-F238E27FC236}">
+                <a16:creationId xmlns:a16="http://schemas.microsoft.com/office/drawing/2014/main" id="{EEBF1590-3B36-48EE-A89D-3B6F3CB256AB}"/>
+              </a:ext>
+              <a:ext uri="{C183D7F6-B498-43B3-948B-1728B52AA6E4}">
+                <adec:decorative xmlns:adec="http://schemas.microsoft.com/office/drawing/2017/decorative" val="1"/>
+              </a:ext>
+            </a:extLst>
+          </p:cNvPr>
+          <p:cNvSpPr>
+            <a:spLocks noGrp="1" noRot="1" noChangeAspect="1" noMove="1" noResize="1" noEditPoints="1" noAdjustHandles="1" noChangeArrowheads="1" noChangeShapeType="1" noTextEdit="1"/>
+          </p:cNvSpPr>
+          <p:nvPr>
+            <p:extLst>
+              <p:ext uri="{386F3935-93C4-4BCD-93E2-E3B085C9AB24}">
+                <p16:designElem xmlns:p16="http://schemas.microsoft.com/office/powerpoint/2015/main" val="1"/>
+              </p:ext>
+            </p:extLst>
+          </p:nvPr>
+        </p:nvSpPr>
+        <p:spPr>
+          <a:xfrm rot="10800000" flipH="1">
+            <a:off x="0" y="6400799"/>
+            <a:ext cx="12192000" cy="456773"/>
+          </a:xfrm>
+          <a:prstGeom prst="rect">
+            <a:avLst/>
+          </a:prstGeom>
+          <a:gradFill>
+            <a:gsLst>
+              <a:gs pos="0">
+                <a:schemeClr val="accent1"/>
+              </a:gs>
+              <a:gs pos="78000">
+                <a:srgbClr val="000000"/>
+              </a:gs>
+            </a:gsLst>
+            <a:lin ang="2400000" scaled="0"/>
+          </a:gradFill>
+          <a:ln>
+            <a:noFill/>
+          </a:ln>
+        </p:spPr>
+        <p:style>
+          <a:lnRef idx="2">
+            <a:schemeClr val="accent1">
+              <a:shade val="50000"/>
+            </a:schemeClr>
+          </a:lnRef>
+          <a:fillRef idx="1">
+            <a:schemeClr val="accent1"/>
+          </a:fillRef>
+          <a:effectRef idx="0">
+            <a:schemeClr val="accent1"/>
+          </a:effectRef>
+          <a:fontRef idx="minor">
+            <a:schemeClr val="lt1"/>
+          </a:fontRef>
+        </p:style>
+        <p:txBody>
+          <a:bodyPr rtlCol="0" anchor="ctr"/>
+          <a:lstStyle/>
+          <a:p>
+            <a:pPr algn="ctr"/>
+            <a:endParaRPr lang="en-US"/>
+          </a:p>
+        </p:txBody>
+      </p:sp>
+      <p:sp>
+        <p:nvSpPr>
+          <p:cNvPr id="16" name="Rectangle 15">
+            <a:extLst>
+              <a:ext uri="{FF2B5EF4-FFF2-40B4-BE49-F238E27FC236}">
+                <a16:creationId xmlns:a16="http://schemas.microsoft.com/office/drawing/2014/main" id="{AC8F6C8C-AB5A-4548-942D-E3FD40ACBC49}"/>
+              </a:ext>
+              <a:ext uri="{C183D7F6-B498-43B3-948B-1728B52AA6E4}">
+                <adec:decorative xmlns:adec="http://schemas.microsoft.com/office/drawing/2017/decorative" val="1"/>
+              </a:ext>
+            </a:extLst>
+          </p:cNvPr>
+          <p:cNvSpPr>
+            <a:spLocks noGrp="1" noRot="1" noChangeAspect="1" noMove="1" noResize="1" noEditPoints="1" noAdjustHandles="1" noChangeArrowheads="1" noChangeShapeType="1" noTextEdit="1"/>
+          </p:cNvSpPr>
+          <p:nvPr>
+            <p:extLst>
+              <p:ext uri="{386F3935-93C4-4BCD-93E2-E3B085C9AB24}">
+                <p16:designElem xmlns:p16="http://schemas.microsoft.com/office/powerpoint/2015/main" val="1"/>
+              </p:ext>
+            </p:extLst>
+          </p:nvPr>
+        </p:nvSpPr>
+        <p:spPr>
+          <a:xfrm flipH="1">
+            <a:off x="4038600" y="6400799"/>
+            <a:ext cx="8153398" cy="456772"/>
+          </a:xfrm>
+          <a:prstGeom prst="rect">
+            <a:avLst/>
+          </a:prstGeom>
+          <a:gradFill>
+            <a:gsLst>
+              <a:gs pos="0">
+                <a:srgbClr val="000000">
+                  <a:alpha val="63000"/>
+                </a:srgbClr>
+              </a:gs>
+              <a:gs pos="100000">
+                <a:schemeClr val="accent1">
+                  <a:lumMod val="75000"/>
+                </a:schemeClr>
+              </a:gs>
+            </a:gsLst>
+            <a:lin ang="13800000" scaled="0"/>
+          </a:gradFill>
+          <a:ln>
+            <a:noFill/>
+          </a:ln>
+        </p:spPr>
+        <p:style>
+          <a:lnRef idx="2">
+            <a:schemeClr val="accent1">
+              <a:shade val="50000"/>
+            </a:schemeClr>
+          </a:lnRef>
+          <a:fillRef idx="1">
+            <a:schemeClr val="accent1"/>
+          </a:fillRef>
+          <a:effectRef idx="0">
+            <a:schemeClr val="accent1"/>
+          </a:effectRef>
+          <a:fontRef idx="minor">
+            <a:schemeClr val="lt1"/>
+          </a:fontRef>
+        </p:style>
+        <p:txBody>
+          <a:bodyPr rtlCol="0" anchor="ctr"/>
+          <a:lstStyle/>
+          <a:p>
+            <a:pPr algn="ctr"/>
+            <a:endParaRPr lang="en-US"/>
+          </a:p>
+        </p:txBody>
+      </p:sp>
+      <p:sp>
+        <p:nvSpPr>
+          <p:cNvPr id="3" name="TextBox 2">
+            <a:extLst>
+              <a:ext uri="{FF2B5EF4-FFF2-40B4-BE49-F238E27FC236}">
+                <a16:creationId xmlns:a16="http://schemas.microsoft.com/office/drawing/2014/main" id="{7118C3BF-AC6F-CDAA-3CAF-B018FF46A38A}"/>
+              </a:ext>
+            </a:extLst>
+          </p:cNvPr>
+          <p:cNvSpPr txBox="1"/>
+          <p:nvPr/>
+        </p:nvSpPr>
+        <p:spPr>
+          <a:xfrm>
+            <a:off x="9584699" y="6042567"/>
+            <a:ext cx="2499360" cy="307777"/>
+          </a:xfrm>
+          <a:prstGeom prst="rect">
+            <a:avLst/>
+          </a:prstGeom>
+          <a:noFill/>
+        </p:spPr>
+        <p:txBody>
+          <a:bodyPr wrap="square" rtlCol="0">
+            <a:spAutoFit/>
+          </a:bodyPr>
+          <a:lstStyle/>
+          <a:p>
+            <a:r>
+              <a:rPr lang="en-GB" sz="1400" dirty="0">
+                <a:latin typeface="DM Serif Display" pitchFamily="2" charset="0"/>
+              </a:rPr>
+              <a:t>including interaction term</a:t>
+            </a:r>
+          </a:p>
+        </p:txBody>
+      </p:sp>
+      <p:sp>
+        <p:nvSpPr>
+          <p:cNvPr id="5" name="Left Brace 4">
+            <a:extLst>
+              <a:ext uri="{FF2B5EF4-FFF2-40B4-BE49-F238E27FC236}">
+                <a16:creationId xmlns:a16="http://schemas.microsoft.com/office/drawing/2014/main" id="{9FDE7625-C722-2D08-EF79-92F863E72419}"/>
+              </a:ext>
+            </a:extLst>
+          </p:cNvPr>
+          <p:cNvSpPr/>
+          <p:nvPr/>
+        </p:nvSpPr>
+        <p:spPr>
+          <a:xfrm rot="16200000">
+            <a:off x="10477235" y="4609232"/>
+            <a:ext cx="363754" cy="2634012"/>
+          </a:xfrm>
+          <a:prstGeom prst="leftBrace">
+            <a:avLst>
+              <a:gd name="adj1" fmla="val 8333"/>
+              <a:gd name="adj2" fmla="val 49691"/>
+            </a:avLst>
+          </a:prstGeom>
+          <a:ln w="19050">
+            <a:solidFill>
+              <a:schemeClr val="accent2">
+                <a:lumMod val="75000"/>
+              </a:schemeClr>
+            </a:solidFill>
+          </a:ln>
+        </p:spPr>
+        <p:style>
+          <a:lnRef idx="1">
+            <a:schemeClr val="accent1"/>
+          </a:lnRef>
+          <a:fillRef idx="0">
+            <a:schemeClr val="accent1"/>
+          </a:fillRef>
+          <a:effectRef idx="0">
+            <a:schemeClr val="accent1"/>
+          </a:effectRef>
+          <a:fontRef idx="minor">
+            <a:schemeClr val="tx1"/>
+          </a:fontRef>
+        </p:style>
+        <p:txBody>
+          <a:bodyPr rtlCol="0" anchor="ctr"/>
+          <a:lstStyle/>
+          <a:p>
+            <a:pPr algn="ctr"/>
+            <a:endParaRPr lang="en-GB"/>
+          </a:p>
+        </p:txBody>
+      </p:sp>
+      <p:sp>
+        <p:nvSpPr>
+          <p:cNvPr id="8" name="Left Brace 7">
+            <a:extLst>
+              <a:ext uri="{FF2B5EF4-FFF2-40B4-BE49-F238E27FC236}">
+                <a16:creationId xmlns:a16="http://schemas.microsoft.com/office/drawing/2014/main" id="{7EDE7A62-A7B0-E0A1-41E3-32F991F17AF9}"/>
+              </a:ext>
+            </a:extLst>
+          </p:cNvPr>
+          <p:cNvSpPr/>
+          <p:nvPr/>
+        </p:nvSpPr>
+        <p:spPr>
+          <a:xfrm rot="16200000">
+            <a:off x="7388595" y="4664636"/>
+            <a:ext cx="363754" cy="2634012"/>
+          </a:xfrm>
+          <a:prstGeom prst="leftBrace">
+            <a:avLst>
+              <a:gd name="adj1" fmla="val 8333"/>
+              <a:gd name="adj2" fmla="val 49691"/>
+            </a:avLst>
+          </a:prstGeom>
+          <a:ln w="19050">
+            <a:solidFill>
+              <a:schemeClr val="accent2">
+                <a:lumMod val="75000"/>
+              </a:schemeClr>
+            </a:solidFill>
+          </a:ln>
+        </p:spPr>
+        <p:style>
+          <a:lnRef idx="1">
+            <a:schemeClr val="accent1"/>
+          </a:lnRef>
+          <a:fillRef idx="0">
+            <a:schemeClr val="accent1"/>
+          </a:fillRef>
+          <a:effectRef idx="0">
+            <a:schemeClr val="accent1"/>
+          </a:effectRef>
+          <a:fontRef idx="minor">
+            <a:schemeClr val="tx1"/>
+          </a:fontRef>
+        </p:style>
+        <p:txBody>
+          <a:bodyPr rtlCol="0" anchor="ctr"/>
+          <a:lstStyle/>
+          <a:p>
+            <a:pPr algn="ctr"/>
+            <a:endParaRPr lang="en-GB"/>
+          </a:p>
+        </p:txBody>
+      </p:sp>
+      <p:sp>
+        <p:nvSpPr>
+          <p:cNvPr id="9" name="TextBox 8">
+            <a:extLst>
+              <a:ext uri="{FF2B5EF4-FFF2-40B4-BE49-F238E27FC236}">
+                <a16:creationId xmlns:a16="http://schemas.microsoft.com/office/drawing/2014/main" id="{E2CB1B75-0172-A309-1046-724F38C485B4}"/>
+              </a:ext>
+            </a:extLst>
+          </p:cNvPr>
+          <p:cNvSpPr txBox="1"/>
+          <p:nvPr/>
+        </p:nvSpPr>
+        <p:spPr>
+          <a:xfrm>
+            <a:off x="6842746" y="6125472"/>
+            <a:ext cx="2499360" cy="307777"/>
+          </a:xfrm>
+          <a:prstGeom prst="rect">
+            <a:avLst/>
+          </a:prstGeom>
+          <a:noFill/>
+        </p:spPr>
+        <p:txBody>
+          <a:bodyPr wrap="square" rtlCol="0">
+            <a:spAutoFit/>
+          </a:bodyPr>
+          <a:lstStyle/>
+          <a:p>
+            <a:r>
+              <a:rPr lang="en-GB" sz="1400" dirty="0">
+                <a:latin typeface="DM Serif Display" pitchFamily="2" charset="0"/>
+              </a:rPr>
+              <a:t>simple model</a:t>
+            </a:r>
+          </a:p>
+        </p:txBody>
+      </p:sp>
     </p:spTree>
     <p:extLst>
       <p:ext uri="{BB962C8B-B14F-4D97-AF65-F5344CB8AC3E}">
-        <p14:creationId xmlns:p14="http://schemas.microsoft.com/office/powerpoint/2010/main" val="1971965409"/>
+        <p14:creationId xmlns:p14="http://schemas.microsoft.com/office/powerpoint/2010/main" val="1386954468"/>
       </p:ext>
     </p:extLst>
   </p:cSld>
@@ -12135,7 +14923,7 @@
         <p:spPr>
           <a:xfrm>
             <a:off x="387620" y="127819"/>
-            <a:ext cx="8333593" cy="973394"/>
+            <a:ext cx="9589500" cy="973394"/>
           </a:xfrm>
         </p:spPr>
         <p:txBody>
@@ -12146,7 +14934,7 @@
           <a:p>
             <a:r>
               <a:rPr lang="en-GB" sz="3600" dirty="0"/>
-              <a:t>Ordered Multinomial Regression</a:t>
+              <a:t>Extension - Ordered Multinomial Regression</a:t>
             </a:r>
           </a:p>
         </p:txBody>
@@ -12203,249 +14991,171 @@
           </a:fontRef>
         </p:style>
       </p:cxnSp>
-      <p:pic>
-        <p:nvPicPr>
-          <p:cNvPr id="7" name="Picture 6" descr="A table with numbers and text&#10;&#10;AI-generated content may be incorrect.">
+      <p:sp>
+        <p:nvSpPr>
+          <p:cNvPr id="3" name="Content Placeholder 2">
             <a:extLst>
               <a:ext uri="{FF2B5EF4-FFF2-40B4-BE49-F238E27FC236}">
-                <a16:creationId xmlns:a16="http://schemas.microsoft.com/office/drawing/2014/main" id="{87F5EA32-CBF4-21AF-E884-3848946CB9C0}"/>
+                <a16:creationId xmlns:a16="http://schemas.microsoft.com/office/drawing/2014/main" id="{531DCDDC-8B7D-D9D2-E7BF-8E8D495228FA}"/>
               </a:ext>
             </a:extLst>
           </p:cNvPr>
-          <p:cNvPicPr>
-            <a:picLocks noChangeAspect="1"/>
-          </p:cNvPicPr>
-          <p:nvPr/>
-        </p:nvPicPr>
-        <p:blipFill>
-          <a:blip r:embed="rId2"/>
-          <a:stretch>
-            <a:fillRect/>
-          </a:stretch>
-        </p:blipFill>
+          <p:cNvSpPr>
+            <a:spLocks noGrp="1"/>
+          </p:cNvSpPr>
+          <p:nvPr>
+            <p:ph idx="1"/>
+          </p:nvPr>
+        </p:nvSpPr>
         <p:spPr>
           <a:xfrm>
-            <a:off x="6735514" y="5360520"/>
-            <a:ext cx="5243126" cy="1258349"/>
+            <a:off x="213360" y="1050741"/>
+            <a:ext cx="11199278" cy="5679440"/>
           </a:xfrm>
-          <a:prstGeom prst="rect">
-            <a:avLst/>
-          </a:prstGeom>
         </p:spPr>
-      </p:pic>
-      <mc:AlternateContent xmlns:mc="http://schemas.openxmlformats.org/markup-compatibility/2006" xmlns:a14="http://schemas.microsoft.com/office/drawing/2010/main">
-        <mc:Choice Requires="a14">
-          <p:sp>
-            <p:nvSpPr>
-              <p:cNvPr id="3" name="Content Placeholder 2">
-                <a:extLst>
-                  <a:ext uri="{FF2B5EF4-FFF2-40B4-BE49-F238E27FC236}">
-                    <a16:creationId xmlns:a16="http://schemas.microsoft.com/office/drawing/2014/main" id="{531DCDDC-8B7D-D9D2-E7BF-8E8D495228FA}"/>
-                  </a:ext>
-                </a:extLst>
-              </p:cNvPr>
-              <p:cNvSpPr>
-                <a:spLocks noGrp="1"/>
-              </p:cNvSpPr>
-              <p:nvPr>
-                <p:ph idx="1"/>
-              </p:nvPr>
-            </p:nvSpPr>
-            <p:spPr>
-              <a:xfrm>
-                <a:off x="213360" y="1050741"/>
-                <a:ext cx="6610484" cy="5679440"/>
-              </a:xfrm>
-            </p:spPr>
-            <p:txBody>
-              <a:bodyPr>
-                <a:normAutofit fontScale="92500"/>
-              </a:bodyPr>
-              <a:lstStyle/>
-              <a:p>
-                <a:r>
-                  <a:rPr lang="en-GB" sz="1600" dirty="0">
-                    <a:latin typeface="CMU Sans Serif" panose="02000603000000000000" pitchFamily="2" charset="0"/>
-                    <a:ea typeface="CMU Sans Serif" panose="02000603000000000000" pitchFamily="2" charset="0"/>
-                    <a:cs typeface="CMU Sans Serif" panose="02000603000000000000" pitchFamily="2" charset="0"/>
-                  </a:rPr>
-                  <a:t>Potential issue of OLS assuming the outcome variable is continuous and unbounded when the 0-10 scale is technically both ordinal and bounded</a:t>
-                </a:r>
-              </a:p>
-              <a:p>
-                <a:r>
-                  <a:rPr lang="en-GB" sz="1600" dirty="0">
-                    <a:latin typeface="CMU Sans Serif" panose="02000603000000000000" pitchFamily="2" charset="0"/>
-                    <a:ea typeface="CMU Sans Serif" panose="02000603000000000000" pitchFamily="2" charset="0"/>
-                    <a:cs typeface="CMU Sans Serif" panose="02000603000000000000" pitchFamily="2" charset="0"/>
-                  </a:rPr>
-                  <a:t>Four ordered multinomial regression models were run, treating the original outcomes levels 0-10 as separate categories on an ordinal scale and the coefficients refers to whether the log-odds of being in a higher category changes in each treatment.</a:t>
-                </a:r>
-              </a:p>
-              <a:p>
-                <a:r>
-                  <a:rPr lang="en-GB" sz="1600" dirty="0">
-                    <a:latin typeface="CMU Sans Serif" panose="02000603000000000000" pitchFamily="2" charset="0"/>
-                    <a:ea typeface="CMU Sans Serif" panose="02000603000000000000" pitchFamily="2" charset="0"/>
-                    <a:cs typeface="CMU Sans Serif" panose="02000603000000000000" pitchFamily="2" charset="0"/>
-                  </a:rPr>
-                  <a:t>The positive impact of the treatments and insignificant interaction term are consistent with the OLS models, and the coefficients are interpreted in terms of log-odds. </a:t>
-                </a:r>
-              </a:p>
-              <a:p>
-                <a:pPr lvl="1"/>
-                <a:r>
-                  <a:rPr lang="en-GB" sz="1600" dirty="0">
-                    <a:latin typeface="CMU Sans Serif" panose="02000603000000000000" pitchFamily="2" charset="0"/>
-                    <a:ea typeface="CMU Sans Serif" panose="02000603000000000000" pitchFamily="2" charset="0"/>
-                    <a:cs typeface="CMU Sans Serif" panose="02000603000000000000" pitchFamily="2" charset="0"/>
-                  </a:rPr>
-                  <a:t>E.g. For model 1 and holding all else constant, participants in the warmth condition have on average about 2 times higher odds of choosing a higher trust category than those not in the warmth treatment (</a:t>
-                </a:r>
-                <a14:m>
-                  <m:oMath xmlns:m="http://schemas.openxmlformats.org/officeDocument/2006/math">
-                    <m:r>
-                      <a:rPr lang="en-GB" sz="1600">
-                        <a:latin typeface="Cambria Math" panose="02040503050406030204" pitchFamily="18" charset="0"/>
-                      </a:rPr>
-                      <m:t>𝑂𝑅</m:t>
-                    </m:r>
-                    <m:r>
-                      <a:rPr lang="en-GB" sz="1600">
-                        <a:latin typeface="Cambria Math" panose="02040503050406030204" pitchFamily="18" charset="0"/>
-                      </a:rPr>
-                      <m:t> = </m:t>
-                    </m:r>
-                    <m:sSup>
-                      <m:sSupPr>
-                        <m:ctrlPr>
-                          <a:rPr lang="en-GB" sz="1600" i="1">
-                            <a:latin typeface="Cambria Math" panose="02040503050406030204" pitchFamily="18" charset="0"/>
-                          </a:rPr>
-                        </m:ctrlPr>
-                      </m:sSupPr>
-                      <m:e>
-                        <m:r>
-                          <a:rPr lang="en-GB" sz="1600">
-                            <a:latin typeface="Cambria Math" panose="02040503050406030204" pitchFamily="18" charset="0"/>
-                          </a:rPr>
-                          <m:t>𝑒</m:t>
-                        </m:r>
-                      </m:e>
-                      <m:sup>
-                        <m:r>
-                          <a:rPr lang="en-GB" sz="1600">
-                            <a:latin typeface="Cambria Math" panose="02040503050406030204" pitchFamily="18" charset="0"/>
-                          </a:rPr>
-                          <m:t>0.692</m:t>
-                        </m:r>
-                      </m:sup>
-                    </m:sSup>
-                    <m:r>
-                      <a:rPr lang="en-GB" sz="1600">
-                        <a:latin typeface="Cambria Math" panose="02040503050406030204" pitchFamily="18" charset="0"/>
-                      </a:rPr>
-                      <m:t> ≈ 1.99</m:t>
-                    </m:r>
-                  </m:oMath>
-                </a14:m>
-                <a:r>
-                  <a:rPr lang="en-GB" sz="1600" dirty="0">
-                    <a:latin typeface="CMU Sans Serif" panose="02000603000000000000" pitchFamily="2" charset="0"/>
-                    <a:ea typeface="CMU Sans Serif" panose="02000603000000000000" pitchFamily="2" charset="0"/>
-                    <a:cs typeface="CMU Sans Serif" panose="02000603000000000000" pitchFamily="2" charset="0"/>
-                  </a:rPr>
-                  <a:t>)</a:t>
-                </a:r>
-              </a:p>
-              <a:p>
-                <a:r>
-                  <a:rPr lang="en-GB" sz="1600" dirty="0">
-                    <a:latin typeface="CMU Sans Serif" panose="02000603000000000000" pitchFamily="2" charset="0"/>
-                    <a:ea typeface="CMU Sans Serif" panose="02000603000000000000" pitchFamily="2" charset="0"/>
-                    <a:cs typeface="CMU Sans Serif" panose="02000603000000000000" pitchFamily="2" charset="0"/>
-                  </a:rPr>
-                  <a:t>Although the interpretation is slightly less intuitive than OLS, this approach does make movement across the ordinal responses clear</a:t>
-                </a:r>
-              </a:p>
-              <a:p>
-                <a:r>
-                  <a:rPr lang="en-GB" sz="1600" dirty="0">
-                    <a:latin typeface="CMU Sans Serif" panose="02000603000000000000" pitchFamily="2" charset="0"/>
-                    <a:ea typeface="CMU Sans Serif" panose="02000603000000000000" pitchFamily="2" charset="0"/>
-                    <a:cs typeface="CMU Sans Serif" panose="02000603000000000000" pitchFamily="2" charset="0"/>
-                  </a:rPr>
-                  <a:t>To obtain more interpretable results, the predicted probabilities of categories for each treatment group was calculated and then converted into an expected trust measure. </a:t>
-                </a:r>
-              </a:p>
-              <a:p>
-                <a:r>
-                  <a:rPr lang="en-GB" sz="1600" dirty="0">
-                    <a:latin typeface="CMU Sans Serif" panose="02000603000000000000" pitchFamily="2" charset="0"/>
-                    <a:ea typeface="CMU Sans Serif" panose="02000603000000000000" pitchFamily="2" charset="0"/>
-                    <a:cs typeface="CMU Sans Serif" panose="02000603000000000000" pitchFamily="2" charset="0"/>
-                  </a:rPr>
-                  <a:t>The results clearly show the differences between predicted average trust scores for each group that are reasonably similar to the actual experimental group mean suggesting that the ordered regression is reasonably well fit </a:t>
-                </a:r>
-              </a:p>
-              <a:p>
-                <a:pPr lvl="1"/>
-                <a:r>
-                  <a:rPr lang="en-GB" sz="1600" dirty="0">
-                    <a:latin typeface="CMU Sans Serif" panose="02000603000000000000" pitchFamily="2" charset="0"/>
-                    <a:ea typeface="CMU Sans Serif" panose="02000603000000000000" pitchFamily="2" charset="0"/>
-                    <a:cs typeface="CMU Sans Serif" panose="02000603000000000000" pitchFamily="2" charset="0"/>
-                  </a:rPr>
-                  <a:t>E.g. For Unfavourable Low Warmth the Trust B in the simple model predicted mean trust score was 3.25 compared to the observed 3.38. </a:t>
-                </a:r>
-              </a:p>
-            </p:txBody>
-          </p:sp>
-        </mc:Choice>
-        <mc:Fallback xmlns="">
-          <p:sp>
-            <p:nvSpPr>
-              <p:cNvPr id="3" name="Content Placeholder 2">
-                <a:extLst>
-                  <a:ext uri="{FF2B5EF4-FFF2-40B4-BE49-F238E27FC236}">
-                    <a16:creationId xmlns:a16="http://schemas.microsoft.com/office/drawing/2014/main" id="{531DCDDC-8B7D-D9D2-E7BF-8E8D495228FA}"/>
-                  </a:ext>
-                </a:extLst>
-              </p:cNvPr>
-              <p:cNvSpPr>
-                <a:spLocks noGrp="1" noRot="1" noChangeAspect="1" noMove="1" noResize="1" noEditPoints="1" noAdjustHandles="1" noChangeArrowheads="1" noChangeShapeType="1" noTextEdit="1"/>
-              </p:cNvSpPr>
-              <p:nvPr>
-                <p:ph idx="1"/>
-              </p:nvPr>
-            </p:nvSpPr>
-            <p:spPr>
-              <a:xfrm>
-                <a:off x="213360" y="1050741"/>
-                <a:ext cx="6610484" cy="5679440"/>
-              </a:xfrm>
-              <a:blipFill>
-                <a:blip r:embed="rId3"/>
-                <a:stretch>
-                  <a:fillRect l="-277" t="-536" r="-1292"/>
-                </a:stretch>
-              </a:blipFill>
-            </p:spPr>
-            <p:txBody>
-              <a:bodyPr/>
-              <a:lstStyle/>
-              <a:p>
-                <a:r>
-                  <a:rPr lang="en-GB">
-                    <a:noFill/>
-                  </a:rPr>
-                  <a:t> </a:t>
-                </a:r>
-              </a:p>
-            </p:txBody>
-          </p:sp>
-        </mc:Fallback>
-      </mc:AlternateContent>
+        <p:txBody>
+          <a:bodyPr>
+            <a:normAutofit/>
+          </a:bodyPr>
+          <a:lstStyle/>
+          <a:p>
+            <a:pPr marL="0" indent="0">
+              <a:buNone/>
+            </a:pPr>
+            <a:r>
+              <a:rPr lang="en-GB" sz="1800" b="1" dirty="0">
+                <a:latin typeface="CMU Sans Serif" panose="02000603000000000000" pitchFamily="2" charset="0"/>
+                <a:ea typeface="CMU Sans Serif" panose="02000603000000000000" pitchFamily="2" charset="0"/>
+                <a:cs typeface="CMU Sans Serif" panose="02000603000000000000" pitchFamily="2" charset="0"/>
+              </a:rPr>
+              <a:t>Method</a:t>
+            </a:r>
+          </a:p>
+          <a:p>
+            <a:r>
+              <a:rPr lang="en-GB" sz="1800" dirty="0">
+                <a:latin typeface="CMU Sans Serif" panose="02000603000000000000" pitchFamily="2" charset="0"/>
+                <a:ea typeface="CMU Sans Serif" panose="02000603000000000000" pitchFamily="2" charset="0"/>
+                <a:cs typeface="CMU Sans Serif" panose="02000603000000000000" pitchFamily="2" charset="0"/>
+              </a:rPr>
+              <a:t>OLS assumes the outcome variable is continuous and unbounded but the 0-10 scale is ordinal and bounded</a:t>
+            </a:r>
+          </a:p>
+          <a:p>
+            <a:r>
+              <a:rPr lang="en-GB" sz="1800" dirty="0">
+                <a:latin typeface="CMU Sans Serif" panose="02000603000000000000" pitchFamily="2" charset="0"/>
+                <a:ea typeface="CMU Sans Serif" panose="02000603000000000000" pitchFamily="2" charset="0"/>
+                <a:cs typeface="CMU Sans Serif" panose="02000603000000000000" pitchFamily="2" charset="0"/>
+              </a:rPr>
+              <a:t>Four ordered multinomial regression models were run, treating the original outcomes levels 0-10 as separate categories on an ordinal scale </a:t>
+            </a:r>
+          </a:p>
+          <a:p>
+            <a:r>
+              <a:rPr lang="en-GB" sz="1800" dirty="0">
+                <a:latin typeface="CMU Sans Serif" panose="02000603000000000000" pitchFamily="2" charset="0"/>
+                <a:ea typeface="CMU Sans Serif" panose="02000603000000000000" pitchFamily="2" charset="0"/>
+                <a:cs typeface="CMU Sans Serif" panose="02000603000000000000" pitchFamily="2" charset="0"/>
+              </a:rPr>
+              <a:t>Regression coefficients are the change in the log-odds of being in a higher category in each treatment</a:t>
+            </a:r>
+          </a:p>
+          <a:p>
+            <a:pPr marL="0" indent="0">
+              <a:buNone/>
+            </a:pPr>
+            <a:endParaRPr lang="en-GB" sz="1800" dirty="0">
+              <a:latin typeface="CMU Sans Serif" panose="02000603000000000000" pitchFamily="2" charset="0"/>
+              <a:ea typeface="CMU Sans Serif" panose="02000603000000000000" pitchFamily="2" charset="0"/>
+              <a:cs typeface="CMU Sans Serif" panose="02000603000000000000" pitchFamily="2" charset="0"/>
+            </a:endParaRPr>
+          </a:p>
+          <a:p>
+            <a:pPr marL="0" indent="0">
+              <a:buNone/>
+            </a:pPr>
+            <a:endParaRPr lang="en-GB" sz="1800" dirty="0">
+              <a:latin typeface="CMU Sans Serif" panose="02000603000000000000" pitchFamily="2" charset="0"/>
+              <a:ea typeface="CMU Sans Serif" panose="02000603000000000000" pitchFamily="2" charset="0"/>
+              <a:cs typeface="CMU Sans Serif" panose="02000603000000000000" pitchFamily="2" charset="0"/>
+            </a:endParaRPr>
+          </a:p>
+          <a:p>
+            <a:pPr marL="0" indent="0">
+              <a:buNone/>
+            </a:pPr>
+            <a:endParaRPr lang="en-GB" sz="1800" dirty="0">
+              <a:latin typeface="CMU Sans Serif" panose="02000603000000000000" pitchFamily="2" charset="0"/>
+              <a:ea typeface="CMU Sans Serif" panose="02000603000000000000" pitchFamily="2" charset="0"/>
+              <a:cs typeface="CMU Sans Serif" panose="02000603000000000000" pitchFamily="2" charset="0"/>
+            </a:endParaRPr>
+          </a:p>
+          <a:p>
+            <a:pPr marL="0" indent="0">
+              <a:buNone/>
+            </a:pPr>
+            <a:endParaRPr lang="en-GB" sz="1800" dirty="0">
+              <a:latin typeface="CMU Sans Serif" panose="02000603000000000000" pitchFamily="2" charset="0"/>
+              <a:ea typeface="CMU Sans Serif" panose="02000603000000000000" pitchFamily="2" charset="0"/>
+              <a:cs typeface="CMU Sans Serif" panose="02000603000000000000" pitchFamily="2" charset="0"/>
+            </a:endParaRPr>
+          </a:p>
+          <a:p>
+            <a:pPr marL="0" indent="0">
+              <a:buNone/>
+            </a:pPr>
+            <a:endParaRPr lang="en-GB" sz="1800" dirty="0">
+              <a:latin typeface="CMU Sans Serif" panose="02000603000000000000" pitchFamily="2" charset="0"/>
+              <a:ea typeface="CMU Sans Serif" panose="02000603000000000000" pitchFamily="2" charset="0"/>
+              <a:cs typeface="CMU Sans Serif" panose="02000603000000000000" pitchFamily="2" charset="0"/>
+            </a:endParaRPr>
+          </a:p>
+          <a:p>
+            <a:pPr marL="0" indent="0">
+              <a:buNone/>
+            </a:pPr>
+            <a:endParaRPr lang="en-GB" sz="1800" dirty="0">
+              <a:latin typeface="CMU Sans Serif" panose="02000603000000000000" pitchFamily="2" charset="0"/>
+              <a:ea typeface="CMU Sans Serif" panose="02000603000000000000" pitchFamily="2" charset="0"/>
+              <a:cs typeface="CMU Sans Serif" panose="02000603000000000000" pitchFamily="2" charset="0"/>
+            </a:endParaRPr>
+          </a:p>
+          <a:p>
+            <a:pPr marL="0" indent="0">
+              <a:buNone/>
+            </a:pPr>
+            <a:endParaRPr lang="en-GB" sz="1800" dirty="0">
+              <a:latin typeface="CMU Sans Serif" panose="02000603000000000000" pitchFamily="2" charset="0"/>
+              <a:ea typeface="CMU Sans Serif" panose="02000603000000000000" pitchFamily="2" charset="0"/>
+              <a:cs typeface="CMU Sans Serif" panose="02000603000000000000" pitchFamily="2" charset="0"/>
+            </a:endParaRPr>
+          </a:p>
+          <a:p>
+            <a:pPr marL="0" indent="0">
+              <a:buNone/>
+            </a:pPr>
+            <a:r>
+              <a:rPr lang="en-GB" sz="1800" b="1" dirty="0">
+                <a:latin typeface="CMU Sans Serif" panose="02000603000000000000" pitchFamily="2" charset="0"/>
+                <a:ea typeface="CMU Sans Serif" panose="02000603000000000000" pitchFamily="2" charset="0"/>
+                <a:cs typeface="CMU Sans Serif" panose="02000603000000000000" pitchFamily="2" charset="0"/>
+              </a:rPr>
+              <a:t>Outcome</a:t>
+            </a:r>
+          </a:p>
+          <a:p>
+            <a:r>
+              <a:rPr lang="en-GB" sz="1800" dirty="0">
+                <a:latin typeface="CMU Sans Serif" panose="02000603000000000000" pitchFamily="2" charset="0"/>
+                <a:ea typeface="CMU Sans Serif" panose="02000603000000000000" pitchFamily="2" charset="0"/>
+                <a:cs typeface="CMU Sans Serif" panose="02000603000000000000" pitchFamily="2" charset="0"/>
+              </a:rPr>
+              <a:t>The positive impact of the treatments and insignificant interaction term are consistent with the OLS models</a:t>
+            </a:r>
+          </a:p>
+        </p:txBody>
+      </p:sp>
       <p:pic>
         <p:nvPicPr>
           <p:cNvPr id="9" name="Picture 8" descr="A table with numbers and a number of multinomials&#10;&#10;AI-generated content may be incorrect.">
@@ -12461,45 +15171,15 @@
           <p:nvPr/>
         </p:nvPicPr>
         <p:blipFill>
-          <a:blip r:embed="rId4"/>
+          <a:blip r:embed="rId3"/>
           <a:stretch>
             <a:fillRect/>
           </a:stretch>
         </p:blipFill>
         <p:spPr>
           <a:xfrm>
-            <a:off x="7016558" y="674235"/>
-            <a:ext cx="4903844" cy="1164662"/>
-          </a:xfrm>
-          <a:prstGeom prst="rect">
-            <a:avLst/>
-          </a:prstGeom>
-        </p:spPr>
-      </p:pic>
-      <p:pic>
-        <p:nvPicPr>
-          <p:cNvPr id="12" name="Picture 11" descr="A graph of different colored bars&#10;&#10;AI-generated content may be incorrect.">
-            <a:extLst>
-              <a:ext uri="{FF2B5EF4-FFF2-40B4-BE49-F238E27FC236}">
-                <a16:creationId xmlns:a16="http://schemas.microsoft.com/office/drawing/2014/main" id="{ADEB4286-E3DF-C300-B96B-CAB23C07253D}"/>
-              </a:ext>
-            </a:extLst>
-          </p:cNvPr>
-          <p:cNvPicPr>
-            <a:picLocks noChangeAspect="1"/>
-          </p:cNvPicPr>
-          <p:nvPr/>
-        </p:nvPicPr>
-        <p:blipFill>
-          <a:blip r:embed="rId5"/>
-          <a:stretch>
-            <a:fillRect/>
-          </a:stretch>
-        </p:blipFill>
-        <p:spPr>
-          <a:xfrm>
-            <a:off x="7475624" y="2109932"/>
-            <a:ext cx="4025496" cy="3250588"/>
+            <a:off x="1839436" y="3096964"/>
+            <a:ext cx="7947126" cy="1887441"/>
           </a:xfrm>
           <a:prstGeom prst="rect">
             <a:avLst/>
@@ -12522,14 +15202,6 @@
 <file path=ppt/slides/slide9.xml><?xml version="1.0" encoding="utf-8"?>
 <p:sld xmlns:a="http://schemas.openxmlformats.org/drawingml/2006/main" xmlns:r="http://schemas.openxmlformats.org/officeDocument/2006/relationships" xmlns:p="http://schemas.openxmlformats.org/presentationml/2006/main">
   <p:cSld>
-    <p:bg>
-      <p:bgPr>
-        <a:solidFill>
-          <a:schemeClr val="bg1"/>
-        </a:solidFill>
-        <a:effectLst/>
-      </p:bgPr>
-    </p:bg>
     <p:spTree>
       <p:nvGrpSpPr>
         <p:cNvPr id="1" name=""/>
@@ -12544,72 +15216,12 @@
           <a:chExt cx="0" cy="0"/>
         </a:xfrm>
       </p:grpSpPr>
-      <p:sp useBgFill="1">
-        <p:nvSpPr>
-          <p:cNvPr id="24" name="Rectangle 23">
-            <a:extLst>
-              <a:ext uri="{FF2B5EF4-FFF2-40B4-BE49-F238E27FC236}">
-                <a16:creationId xmlns:a16="http://schemas.microsoft.com/office/drawing/2014/main" id="{53B475F8-50AE-46A0-9943-B2B63183D50C}"/>
-              </a:ext>
-              <a:ext uri="{C183D7F6-B498-43B3-948B-1728B52AA6E4}">
-                <adec:decorative xmlns:adec="http://schemas.microsoft.com/office/drawing/2017/decorative" val="1"/>
-              </a:ext>
-            </a:extLst>
-          </p:cNvPr>
-          <p:cNvSpPr>
-            <a:spLocks noGrp="1" noRot="1" noChangeAspect="1" noMove="1" noResize="1" noEditPoints="1" noAdjustHandles="1" noChangeArrowheads="1" noChangeShapeType="1" noTextEdit="1"/>
-          </p:cNvSpPr>
-          <p:nvPr>
-            <p:extLst>
-              <p:ext uri="{386F3935-93C4-4BCD-93E2-E3B085C9AB24}">
-                <p16:designElem xmlns:p16="http://schemas.microsoft.com/office/powerpoint/2015/main" val="1"/>
-              </p:ext>
-            </p:extLst>
-          </p:nvPr>
-        </p:nvSpPr>
-        <p:spPr>
-          <a:xfrm>
-            <a:off x="0" y="0"/>
-            <a:ext cx="12188952" cy="6858000"/>
-          </a:xfrm>
-          <a:prstGeom prst="rect">
-            <a:avLst/>
-          </a:prstGeom>
-          <a:ln>
-            <a:noFill/>
-          </a:ln>
-        </p:spPr>
-        <p:style>
-          <a:lnRef idx="2">
-            <a:schemeClr val="accent1">
-              <a:shade val="50000"/>
-            </a:schemeClr>
-          </a:lnRef>
-          <a:fillRef idx="1">
-            <a:schemeClr val="accent1"/>
-          </a:fillRef>
-          <a:effectRef idx="0">
-            <a:schemeClr val="accent1"/>
-          </a:effectRef>
-          <a:fontRef idx="minor">
-            <a:schemeClr val="lt1"/>
-          </a:fontRef>
-        </p:style>
-        <p:txBody>
-          <a:bodyPr rtlCol="0" anchor="ctr"/>
-          <a:lstStyle/>
-          <a:p>
-            <a:pPr algn="ctr"/>
-            <a:endParaRPr lang="en-US"/>
-          </a:p>
-        </p:txBody>
-      </p:sp>
       <p:sp>
         <p:nvSpPr>
           <p:cNvPr id="2" name="Title 1">
             <a:extLst>
               <a:ext uri="{FF2B5EF4-FFF2-40B4-BE49-F238E27FC236}">
-                <a16:creationId xmlns:a16="http://schemas.microsoft.com/office/drawing/2014/main" id="{27B84957-DB0F-668D-AE2D-17D041EAADAB}"/>
+                <a16:creationId xmlns:a16="http://schemas.microsoft.com/office/drawing/2014/main" id="{BB4148F3-D15B-E742-E66C-42662C98E64A}"/>
               </a:ext>
             </a:extLst>
           </p:cNvPr>
@@ -12622,33 +15234,103 @@
         </p:nvSpPr>
         <p:spPr>
           <a:xfrm>
-            <a:off x="219701" y="-638130"/>
-            <a:ext cx="12329652" cy="1776484"/>
+            <a:off x="358816" y="0"/>
+            <a:ext cx="11833184" cy="878116"/>
           </a:xfrm>
-          <a:noFill/>
-          <a:ln>
-            <a:noFill/>
-          </a:ln>
         </p:spPr>
         <p:txBody>
-          <a:bodyPr anchor="b">
+          <a:bodyPr>
             <a:normAutofit/>
           </a:bodyPr>
           <a:lstStyle/>
           <a:p>
             <a:r>
-              <a:rPr lang="en-GB" sz="5400" dirty="0"/>
-              <a:t>Ordered Beta Regression</a:t>
+              <a:rPr lang="en-GB" sz="3600" dirty="0"/>
+              <a:t>Extension - Ordered Multinomial Regression</a:t>
+            </a:r>
+          </a:p>
+        </p:txBody>
+      </p:sp>
+      <p:sp>
+        <p:nvSpPr>
+          <p:cNvPr id="3" name="Content Placeholder 2">
+            <a:extLst>
+              <a:ext uri="{FF2B5EF4-FFF2-40B4-BE49-F238E27FC236}">
+                <a16:creationId xmlns:a16="http://schemas.microsoft.com/office/drawing/2014/main" id="{237D34A5-80FE-8977-BAA6-B2599738FDDF}"/>
+              </a:ext>
+            </a:extLst>
+          </p:cNvPr>
+          <p:cNvSpPr>
+            <a:spLocks noGrp="1"/>
+          </p:cNvSpPr>
+          <p:nvPr>
+            <p:ph idx="1"/>
+          </p:nvPr>
+        </p:nvSpPr>
+        <p:spPr>
+          <a:xfrm>
+            <a:off x="6833300" y="1075378"/>
+            <a:ext cx="4563734" cy="2402668"/>
+          </a:xfrm>
+        </p:spPr>
+        <p:txBody>
+          <a:bodyPr>
+            <a:normAutofit/>
+          </a:bodyPr>
+          <a:lstStyle/>
+          <a:p>
+            <a:pPr>
+              <a:lnSpc>
+                <a:spcPct val="100000"/>
+              </a:lnSpc>
+            </a:pPr>
+            <a:r>
+              <a:rPr lang="en-GB" sz="1800" dirty="0">
+                <a:latin typeface="CMU Sans Serif" panose="02000603000000000000" pitchFamily="2" charset="0"/>
+                <a:ea typeface="CMU Sans Serif" panose="02000603000000000000" pitchFamily="2" charset="0"/>
+                <a:cs typeface="CMU Sans Serif" panose="02000603000000000000" pitchFamily="2" charset="0"/>
+              </a:rPr>
+              <a:t>Predicted trust levels for each experimental group were calculated using the models predicted probabilities</a:t>
+            </a:r>
+          </a:p>
+          <a:p>
+            <a:pPr>
+              <a:lnSpc>
+                <a:spcPct val="100000"/>
+              </a:lnSpc>
+            </a:pPr>
+            <a:r>
+              <a:rPr lang="en-GB" sz="1800" dirty="0">
+                <a:latin typeface="CMU Sans Serif" panose="02000603000000000000" pitchFamily="2" charset="0"/>
+                <a:ea typeface="CMU Sans Serif" panose="02000603000000000000" pitchFamily="2" charset="0"/>
+                <a:cs typeface="CMU Sans Serif" panose="02000603000000000000" pitchFamily="2" charset="0"/>
+              </a:rPr>
+              <a:t>The predicted trust values were similar to the experimental group means </a:t>
+            </a:r>
+          </a:p>
+          <a:p>
+            <a:pPr>
+              <a:lnSpc>
+                <a:spcPct val="100000"/>
+              </a:lnSpc>
+            </a:pPr>
+            <a:r>
+              <a:rPr lang="en-GB" sz="1800" dirty="0">
+                <a:latin typeface="CMU Sans Serif" panose="02000603000000000000" pitchFamily="2" charset="0"/>
+                <a:ea typeface="CMU Sans Serif" panose="02000603000000000000" pitchFamily="2" charset="0"/>
+                <a:cs typeface="CMU Sans Serif" panose="02000603000000000000" pitchFamily="2" charset="0"/>
+              </a:rPr>
+              <a:t>This approach validates OLS findings and makes predictions in original scale</a:t>
             </a:r>
           </a:p>
         </p:txBody>
       </p:sp>
       <p:pic>
         <p:nvPicPr>
-          <p:cNvPr id="19" name="Picture 18" descr="A screenshot of a graph&#10;&#10;AI-generated content may be incorrect.">
+          <p:cNvPr id="12" name="Picture 11" descr="A graph of different colored bars&#10;&#10;AI-generated content may be incorrect.">
             <a:extLst>
               <a:ext uri="{FF2B5EF4-FFF2-40B4-BE49-F238E27FC236}">
-                <a16:creationId xmlns:a16="http://schemas.microsoft.com/office/drawing/2014/main" id="{29F5565D-E9F3-97B1-EA03-28E9B924445E}"/>
+                <a16:creationId xmlns:a16="http://schemas.microsoft.com/office/drawing/2014/main" id="{ADEB4286-E3DF-C300-B96B-CAB23C07253D}"/>
               </a:ext>
             </a:extLst>
           </p:cNvPr>
@@ -12665,458 +15347,20 @@
         </p:blipFill>
         <p:spPr>
           <a:xfrm>
-            <a:off x="6045977" y="5490831"/>
-            <a:ext cx="5583398" cy="1228346"/>
+            <a:off x="569688" y="1372990"/>
+            <a:ext cx="5918662" cy="4779320"/>
           </a:xfrm>
           <a:prstGeom prst="rect">
             <a:avLst/>
           </a:prstGeom>
         </p:spPr>
       </p:pic>
-      <p:sp>
-        <p:nvSpPr>
-          <p:cNvPr id="26" name="sketch line">
+      <p:pic>
+        <p:nvPicPr>
+          <p:cNvPr id="23" name="Picture 22" descr="A group of black text&#10;&#10;AI-generated content may be incorrect.">
             <a:extLst>
               <a:ext uri="{FF2B5EF4-FFF2-40B4-BE49-F238E27FC236}">
-                <a16:creationId xmlns:a16="http://schemas.microsoft.com/office/drawing/2014/main" id="{75F6FDB4-2351-48C2-A863-2364A02343C0}"/>
-              </a:ext>
-              <a:ext uri="{C183D7F6-B498-43B3-948B-1728B52AA6E4}">
-                <adec:decorative xmlns:adec="http://schemas.microsoft.com/office/drawing/2017/decorative" val="1"/>
-              </a:ext>
-            </a:extLst>
-          </p:cNvPr>
-          <p:cNvSpPr>
-            <a:spLocks noGrp="1" noRot="1" noChangeAspect="1" noMove="1" noResize="1" noEditPoints="1" noAdjustHandles="1" noChangeArrowheads="1" noChangeShapeType="1" noTextEdit="1"/>
-          </p:cNvSpPr>
-          <p:nvPr>
-            <p:extLst>
-              <p:ext uri="{386F3935-93C4-4BCD-93E2-E3B085C9AB24}">
-                <p16:designElem xmlns:p16="http://schemas.microsoft.com/office/powerpoint/2015/main" val="1"/>
-              </p:ext>
-            </p:extLst>
-          </p:nvPr>
-        </p:nvSpPr>
-        <p:spPr>
-          <a:xfrm>
-            <a:off x="838200" y="2315691"/>
-            <a:ext cx="4343400" cy="18288"/>
-          </a:xfrm>
-          <a:custGeom>
-            <a:avLst/>
-            <a:gdLst>
-              <a:gd name="connsiteX0" fmla="*/ 0 w 4343400"/>
-              <a:gd name="connsiteY0" fmla="*/ 0 h 18288"/>
-              <a:gd name="connsiteX1" fmla="*/ 577052 w 4343400"/>
-              <a:gd name="connsiteY1" fmla="*/ 0 h 18288"/>
-              <a:gd name="connsiteX2" fmla="*/ 1067235 w 4343400"/>
-              <a:gd name="connsiteY2" fmla="*/ 0 h 18288"/>
-              <a:gd name="connsiteX3" fmla="*/ 1600853 w 4343400"/>
-              <a:gd name="connsiteY3" fmla="*/ 0 h 18288"/>
-              <a:gd name="connsiteX4" fmla="*/ 2264773 w 4343400"/>
-              <a:gd name="connsiteY4" fmla="*/ 0 h 18288"/>
-              <a:gd name="connsiteX5" fmla="*/ 2841825 w 4343400"/>
-              <a:gd name="connsiteY5" fmla="*/ 0 h 18288"/>
-              <a:gd name="connsiteX6" fmla="*/ 3375442 w 4343400"/>
-              <a:gd name="connsiteY6" fmla="*/ 0 h 18288"/>
-              <a:gd name="connsiteX7" fmla="*/ 4343400 w 4343400"/>
-              <a:gd name="connsiteY7" fmla="*/ 0 h 18288"/>
-              <a:gd name="connsiteX8" fmla="*/ 4343400 w 4343400"/>
-              <a:gd name="connsiteY8" fmla="*/ 18288 h 18288"/>
-              <a:gd name="connsiteX9" fmla="*/ 3722914 w 4343400"/>
-              <a:gd name="connsiteY9" fmla="*/ 18288 h 18288"/>
-              <a:gd name="connsiteX10" fmla="*/ 3189297 w 4343400"/>
-              <a:gd name="connsiteY10" fmla="*/ 18288 h 18288"/>
-              <a:gd name="connsiteX11" fmla="*/ 2481943 w 4343400"/>
-              <a:gd name="connsiteY11" fmla="*/ 18288 h 18288"/>
-              <a:gd name="connsiteX12" fmla="*/ 1904891 w 4343400"/>
-              <a:gd name="connsiteY12" fmla="*/ 18288 h 18288"/>
-              <a:gd name="connsiteX13" fmla="*/ 1414707 w 4343400"/>
-              <a:gd name="connsiteY13" fmla="*/ 18288 h 18288"/>
-              <a:gd name="connsiteX14" fmla="*/ 750788 w 4343400"/>
-              <a:gd name="connsiteY14" fmla="*/ 18288 h 18288"/>
-              <a:gd name="connsiteX15" fmla="*/ 0 w 4343400"/>
-              <a:gd name="connsiteY15" fmla="*/ 18288 h 18288"/>
-              <a:gd name="connsiteX16" fmla="*/ 0 w 4343400"/>
-              <a:gd name="connsiteY16" fmla="*/ 0 h 18288"/>
-            </a:gdLst>
-            <a:ahLst/>
-            <a:cxnLst>
-              <a:cxn ang="0">
-                <a:pos x="connsiteX0" y="connsiteY0"/>
-              </a:cxn>
-              <a:cxn ang="0">
-                <a:pos x="connsiteX1" y="connsiteY1"/>
-              </a:cxn>
-              <a:cxn ang="0">
-                <a:pos x="connsiteX2" y="connsiteY2"/>
-              </a:cxn>
-              <a:cxn ang="0">
-                <a:pos x="connsiteX3" y="connsiteY3"/>
-              </a:cxn>
-              <a:cxn ang="0">
-                <a:pos x="connsiteX4" y="connsiteY4"/>
-              </a:cxn>
-              <a:cxn ang="0">
-                <a:pos x="connsiteX5" y="connsiteY5"/>
-              </a:cxn>
-              <a:cxn ang="0">
-                <a:pos x="connsiteX6" y="connsiteY6"/>
-              </a:cxn>
-              <a:cxn ang="0">
-                <a:pos x="connsiteX7" y="connsiteY7"/>
-              </a:cxn>
-              <a:cxn ang="0">
-                <a:pos x="connsiteX8" y="connsiteY8"/>
-              </a:cxn>
-              <a:cxn ang="0">
-                <a:pos x="connsiteX9" y="connsiteY9"/>
-              </a:cxn>
-              <a:cxn ang="0">
-                <a:pos x="connsiteX10" y="connsiteY10"/>
-              </a:cxn>
-              <a:cxn ang="0">
-                <a:pos x="connsiteX11" y="connsiteY11"/>
-              </a:cxn>
-              <a:cxn ang="0">
-                <a:pos x="connsiteX12" y="connsiteY12"/>
-              </a:cxn>
-              <a:cxn ang="0">
-                <a:pos x="connsiteX13" y="connsiteY13"/>
-              </a:cxn>
-              <a:cxn ang="0">
-                <a:pos x="connsiteX14" y="connsiteY14"/>
-              </a:cxn>
-              <a:cxn ang="0">
-                <a:pos x="connsiteX15" y="connsiteY15"/>
-              </a:cxn>
-              <a:cxn ang="0">
-                <a:pos x="connsiteX16" y="connsiteY16"/>
-              </a:cxn>
-            </a:cxnLst>
-            <a:rect l="l" t="t" r="r" b="b"/>
-            <a:pathLst>
-              <a:path w="4343400" h="18288" fill="none" extrusionOk="0">
-                <a:moveTo>
-                  <a:pt x="0" y="0"/>
-                </a:moveTo>
-                <a:cubicBezTo>
-                  <a:pt x="233209" y="-19550"/>
-                  <a:pt x="330816" y="19068"/>
-                  <a:pt x="577052" y="0"/>
-                </a:cubicBezTo>
-                <a:cubicBezTo>
-                  <a:pt x="823288" y="-19068"/>
-                  <a:pt x="875077" y="10360"/>
-                  <a:pt x="1067235" y="0"/>
-                </a:cubicBezTo>
-                <a:cubicBezTo>
-                  <a:pt x="1259393" y="-10360"/>
-                  <a:pt x="1410699" y="2939"/>
-                  <a:pt x="1600853" y="0"/>
-                </a:cubicBezTo>
-                <a:cubicBezTo>
-                  <a:pt x="1791007" y="-2939"/>
-                  <a:pt x="2101644" y="-26225"/>
-                  <a:pt x="2264773" y="0"/>
-                </a:cubicBezTo>
-                <a:cubicBezTo>
-                  <a:pt x="2427902" y="26225"/>
-                  <a:pt x="2690426" y="-27726"/>
-                  <a:pt x="2841825" y="0"/>
-                </a:cubicBezTo>
-                <a:cubicBezTo>
-                  <a:pt x="2993224" y="27726"/>
-                  <a:pt x="3172320" y="-18569"/>
-                  <a:pt x="3375442" y="0"/>
-                </a:cubicBezTo>
-                <a:cubicBezTo>
-                  <a:pt x="3578564" y="18569"/>
-                  <a:pt x="4003119" y="21909"/>
-                  <a:pt x="4343400" y="0"/>
-                </a:cubicBezTo>
-                <a:cubicBezTo>
-                  <a:pt x="4343798" y="7429"/>
-                  <a:pt x="4343380" y="10822"/>
-                  <a:pt x="4343400" y="18288"/>
-                </a:cubicBezTo>
-                <a:cubicBezTo>
-                  <a:pt x="4109047" y="14709"/>
-                  <a:pt x="3996986" y="7919"/>
-                  <a:pt x="3722914" y="18288"/>
-                </a:cubicBezTo>
-                <a:cubicBezTo>
-                  <a:pt x="3448842" y="28657"/>
-                  <a:pt x="3340973" y="29252"/>
-                  <a:pt x="3189297" y="18288"/>
-                </a:cubicBezTo>
-                <a:cubicBezTo>
-                  <a:pt x="3037621" y="7324"/>
-                  <a:pt x="2636891" y="-9539"/>
-                  <a:pt x="2481943" y="18288"/>
-                </a:cubicBezTo>
-                <a:cubicBezTo>
-                  <a:pt x="2326995" y="46115"/>
-                  <a:pt x="2131632" y="740"/>
-                  <a:pt x="1904891" y="18288"/>
-                </a:cubicBezTo>
-                <a:cubicBezTo>
-                  <a:pt x="1678150" y="35836"/>
-                  <a:pt x="1575362" y="-3381"/>
-                  <a:pt x="1414707" y="18288"/>
-                </a:cubicBezTo>
-                <a:cubicBezTo>
-                  <a:pt x="1254052" y="39957"/>
-                  <a:pt x="1051093" y="-335"/>
-                  <a:pt x="750788" y="18288"/>
-                </a:cubicBezTo>
-                <a:cubicBezTo>
-                  <a:pt x="450483" y="36911"/>
-                  <a:pt x="293781" y="22900"/>
-                  <a:pt x="0" y="18288"/>
-                </a:cubicBezTo>
-                <a:cubicBezTo>
-                  <a:pt x="-591" y="13205"/>
-                  <a:pt x="-663" y="6329"/>
-                  <a:pt x="0" y="0"/>
-                </a:cubicBezTo>
-                <a:close/>
-              </a:path>
-              <a:path w="4343400" h="18288" stroke="0" extrusionOk="0">
-                <a:moveTo>
-                  <a:pt x="0" y="0"/>
-                </a:moveTo>
-                <a:cubicBezTo>
-                  <a:pt x="212719" y="-28531"/>
-                  <a:pt x="340561" y="-1164"/>
-                  <a:pt x="577052" y="0"/>
-                </a:cubicBezTo>
-                <a:cubicBezTo>
-                  <a:pt x="813543" y="1164"/>
-                  <a:pt x="866967" y="-9376"/>
-                  <a:pt x="1067235" y="0"/>
-                </a:cubicBezTo>
-                <a:cubicBezTo>
-                  <a:pt x="1267503" y="9376"/>
-                  <a:pt x="1485778" y="-20470"/>
-                  <a:pt x="1774589" y="0"/>
-                </a:cubicBezTo>
-                <a:cubicBezTo>
-                  <a:pt x="2063400" y="20470"/>
-                  <a:pt x="2090152" y="-14502"/>
-                  <a:pt x="2351641" y="0"/>
-                </a:cubicBezTo>
-                <a:cubicBezTo>
-                  <a:pt x="2613130" y="14502"/>
-                  <a:pt x="2802864" y="19125"/>
-                  <a:pt x="2928693" y="0"/>
-                </a:cubicBezTo>
-                <a:cubicBezTo>
-                  <a:pt x="3054522" y="-19125"/>
-                  <a:pt x="3482611" y="-2038"/>
-                  <a:pt x="3636046" y="0"/>
-                </a:cubicBezTo>
-                <a:cubicBezTo>
-                  <a:pt x="3789481" y="2038"/>
-                  <a:pt x="4012363" y="973"/>
-                  <a:pt x="4343400" y="0"/>
-                </a:cubicBezTo>
-                <a:cubicBezTo>
-                  <a:pt x="4342514" y="5429"/>
-                  <a:pt x="4344221" y="14046"/>
-                  <a:pt x="4343400" y="18288"/>
-                </a:cubicBezTo>
-                <a:cubicBezTo>
-                  <a:pt x="4078870" y="-6138"/>
-                  <a:pt x="4015967" y="29658"/>
-                  <a:pt x="3809782" y="18288"/>
-                </a:cubicBezTo>
-                <a:cubicBezTo>
-                  <a:pt x="3603597" y="6918"/>
-                  <a:pt x="3495552" y="24439"/>
-                  <a:pt x="3189297" y="18288"/>
-                </a:cubicBezTo>
-                <a:cubicBezTo>
-                  <a:pt x="2883042" y="12137"/>
-                  <a:pt x="2850610" y="32583"/>
-                  <a:pt x="2568811" y="18288"/>
-                </a:cubicBezTo>
-                <a:cubicBezTo>
-                  <a:pt x="2287012" y="3993"/>
-                  <a:pt x="2279820" y="23580"/>
-                  <a:pt x="1991759" y="18288"/>
-                </a:cubicBezTo>
-                <a:cubicBezTo>
-                  <a:pt x="1703698" y="12996"/>
-                  <a:pt x="1616455" y="23157"/>
-                  <a:pt x="1284405" y="18288"/>
-                </a:cubicBezTo>
-                <a:cubicBezTo>
-                  <a:pt x="952355" y="13419"/>
-                  <a:pt x="783530" y="16053"/>
-                  <a:pt x="577052" y="18288"/>
-                </a:cubicBezTo>
-                <a:cubicBezTo>
-                  <a:pt x="370574" y="20523"/>
-                  <a:pt x="173929" y="5195"/>
-                  <a:pt x="0" y="18288"/>
-                </a:cubicBezTo>
-                <a:cubicBezTo>
-                  <a:pt x="668" y="13665"/>
-                  <a:pt x="578" y="5675"/>
-                  <a:pt x="0" y="0"/>
-                </a:cubicBezTo>
-                <a:close/>
-              </a:path>
-            </a:pathLst>
-          </a:custGeom>
-          <a:solidFill>
-            <a:schemeClr val="accent2"/>
-          </a:solidFill>
-          <a:ln w="41275" cap="rnd">
-            <a:solidFill>
-              <a:schemeClr val="accent2"/>
-            </a:solidFill>
-            <a:round/>
-            <a:extLst>
-              <a:ext uri="{C807C97D-BFC1-408E-A445-0C87EB9F89A2}">
-                <ask:lineSketchStyleProps xmlns:ask="http://schemas.microsoft.com/office/drawing/2018/sketchyshapes" sd="1219033472">
-                  <a:prstGeom prst="rect">
-                    <a:avLst/>
-                  </a:prstGeom>
-                  <ask:type>
-                    <ask:lineSketchFreehand/>
-                  </ask:type>
-                </ask:lineSketchStyleProps>
-              </a:ext>
-            </a:extLst>
-          </a:ln>
-        </p:spPr>
-        <p:style>
-          <a:lnRef idx="2">
-            <a:schemeClr val="accent1">
-              <a:shade val="50000"/>
-            </a:schemeClr>
-          </a:lnRef>
-          <a:fillRef idx="1">
-            <a:schemeClr val="accent1"/>
-          </a:fillRef>
-          <a:effectRef idx="0">
-            <a:schemeClr val="accent1"/>
-          </a:effectRef>
-          <a:fontRef idx="minor">
-            <a:schemeClr val="lt1"/>
-          </a:fontRef>
-        </p:style>
-        <p:txBody>
-          <a:bodyPr rtlCol="0" anchor="ctr"/>
-          <a:lstStyle/>
-          <a:p>
-            <a:pPr algn="ctr"/>
-            <a:endParaRPr lang="en-US"/>
-          </a:p>
-        </p:txBody>
-      </p:sp>
-      <p:sp>
-        <p:nvSpPr>
-          <p:cNvPr id="3" name="Content Placeholder 2">
-            <a:extLst>
-              <a:ext uri="{FF2B5EF4-FFF2-40B4-BE49-F238E27FC236}">
-                <a16:creationId xmlns:a16="http://schemas.microsoft.com/office/drawing/2014/main" id="{A315FD65-E566-BE7F-355E-A043ECB11273}"/>
-              </a:ext>
-            </a:extLst>
-          </p:cNvPr>
-          <p:cNvSpPr>
-            <a:spLocks noGrp="1"/>
-          </p:cNvSpPr>
-          <p:nvPr>
-            <p:ph idx="1"/>
-          </p:nvPr>
-        </p:nvSpPr>
-        <p:spPr>
-          <a:xfrm>
-            <a:off x="383458" y="2504819"/>
-            <a:ext cx="5102942" cy="4334892"/>
-          </a:xfrm>
-        </p:spPr>
-        <p:txBody>
-          <a:bodyPr>
-            <a:normAutofit fontScale="85000" lnSpcReduction="10000"/>
-          </a:bodyPr>
-          <a:lstStyle/>
-          <a:p>
-            <a:r>
-              <a:rPr lang="en-GB" sz="2000" dirty="0">
-                <a:latin typeface="CMU Sans Serif" panose="02000603000000000000" pitchFamily="2" charset="0"/>
-                <a:ea typeface="CMU Sans Serif" panose="02000603000000000000" pitchFamily="2" charset="0"/>
-                <a:cs typeface="CMU Sans Serif" panose="02000603000000000000" pitchFamily="2" charset="0"/>
-              </a:rPr>
-              <a:t>Ordered Beta regression is an alternative type of regression explicitly designed for outcome data that has an ordinal and bounded structure. </a:t>
-            </a:r>
-          </a:p>
-          <a:p>
-            <a:r>
-              <a:rPr lang="en-GB" sz="2000" dirty="0">
-                <a:latin typeface="CMU Sans Serif" panose="02000603000000000000" pitchFamily="2" charset="0"/>
-                <a:ea typeface="CMU Sans Serif" panose="02000603000000000000" pitchFamily="2" charset="0"/>
-                <a:cs typeface="CMU Sans Serif" panose="02000603000000000000" pitchFamily="2" charset="0"/>
-              </a:rPr>
-              <a:t>It combines beta regression defined for any bounded continuous scale and the ordered logit that uses discrete categories. </a:t>
-            </a:r>
-          </a:p>
-          <a:p>
-            <a:r>
-              <a:rPr lang="en-GB" sz="2000" dirty="0">
-                <a:latin typeface="CMU Sans Serif" panose="02000603000000000000" pitchFamily="2" charset="0"/>
-                <a:ea typeface="CMU Sans Serif" panose="02000603000000000000" pitchFamily="2" charset="0"/>
-                <a:cs typeface="CMU Sans Serif" panose="02000603000000000000" pitchFamily="2" charset="0"/>
-              </a:rPr>
-              <a:t>It is beneficial as it produces intelligible estimates that respect the bounds of the outcome variable as it assumes there is an unobserved latent scale that is mapped with ordinal cut-offs for the scaled ratings.</a:t>
-            </a:r>
-          </a:p>
-          <a:p>
-            <a:r>
-              <a:rPr lang="en-GB" sz="2000" dirty="0">
-                <a:latin typeface="CMU Sans Serif" panose="02000603000000000000" pitchFamily="2" charset="0"/>
-                <a:ea typeface="CMU Sans Serif" panose="02000603000000000000" pitchFamily="2" charset="0"/>
-                <a:cs typeface="CMU Sans Serif" panose="02000603000000000000" pitchFamily="2" charset="0"/>
-              </a:rPr>
-              <a:t>The package ’</a:t>
-            </a:r>
-            <a:r>
-              <a:rPr lang="en-GB" sz="2000" dirty="0" err="1">
-                <a:latin typeface="CMU Sans Serif" panose="02000603000000000000" pitchFamily="2" charset="0"/>
-                <a:ea typeface="CMU Sans Serif" panose="02000603000000000000" pitchFamily="2" charset="0"/>
-                <a:cs typeface="CMU Sans Serif" panose="02000603000000000000" pitchFamily="2" charset="0"/>
-              </a:rPr>
-              <a:t>ordbetareg</a:t>
-            </a:r>
-            <a:r>
-              <a:rPr lang="en-GB" sz="2000" dirty="0">
-                <a:latin typeface="CMU Sans Serif" panose="02000603000000000000" pitchFamily="2" charset="0"/>
-                <a:ea typeface="CMU Sans Serif" panose="02000603000000000000" pitchFamily="2" charset="0"/>
-                <a:cs typeface="CMU Sans Serif" panose="02000603000000000000" pitchFamily="2" charset="0"/>
-              </a:rPr>
-              <a:t>’ estimates a Bayesian implementation (Markov chain Monte Carlo (MCMC) finding the posterior distribution</a:t>
-            </a:r>
-          </a:p>
-          <a:p>
-            <a:r>
-              <a:rPr lang="en-GB" sz="2000" dirty="0">
-                <a:latin typeface="CMU Sans Serif" panose="02000603000000000000" pitchFamily="2" charset="0"/>
-                <a:ea typeface="CMU Sans Serif" panose="02000603000000000000" pitchFamily="2" charset="0"/>
-                <a:cs typeface="CMU Sans Serif" panose="02000603000000000000" pitchFamily="2" charset="0"/>
-              </a:rPr>
-              <a:t>The predicted mean trust values for the groups were calculated from posterior predictions and show very similar prediction to the real means</a:t>
-            </a:r>
-          </a:p>
-        </p:txBody>
-      </p:sp>
-      <p:pic>
-        <p:nvPicPr>
-          <p:cNvPr id="17" name="Picture 16" descr="A chart with red and blue dots&#10;&#10;AI-generated content may be incorrect.">
-            <a:extLst>
-              <a:ext uri="{FF2B5EF4-FFF2-40B4-BE49-F238E27FC236}">
-                <a16:creationId xmlns:a16="http://schemas.microsoft.com/office/drawing/2014/main" id="{169EA93E-6403-F9EA-7CAC-0904AB5BBCF4}"/>
+                <a16:creationId xmlns:a16="http://schemas.microsoft.com/office/drawing/2014/main" id="{960C9821-3D42-19EB-54B0-0DB226754925}"/>
               </a:ext>
             </a:extLst>
           </p:cNvPr>
@@ -13133,8 +15377,8 @@
         </p:blipFill>
         <p:spPr>
           <a:xfrm>
-            <a:off x="6384527" y="1406183"/>
-            <a:ext cx="4906297" cy="3765583"/>
+            <a:off x="7412055" y="5596110"/>
+            <a:ext cx="3301805" cy="1106105"/>
           </a:xfrm>
           <a:prstGeom prst="rect">
             <a:avLst/>
@@ -13143,10 +15387,10 @@
       </p:pic>
       <p:pic>
         <p:nvPicPr>
-          <p:cNvPr id="10" name="Picture 9" descr="A screenshot of a computer code&#10;&#10;AI-generated content may be incorrect.">
+          <p:cNvPr id="7" name="Picture 6" descr="A table with numbers and text&#10;&#10;AI-generated content may be incorrect.">
             <a:extLst>
               <a:ext uri="{FF2B5EF4-FFF2-40B4-BE49-F238E27FC236}">
-                <a16:creationId xmlns:a16="http://schemas.microsoft.com/office/drawing/2014/main" id="{DB8EC859-66D4-39D9-3A6C-E46D0BF05AA2}"/>
+                <a16:creationId xmlns:a16="http://schemas.microsoft.com/office/drawing/2014/main" id="{87F5EA32-CBF4-21AF-E884-3848946CB9C0}"/>
               </a:ext>
             </a:extLst>
           </p:cNvPr>
@@ -13157,24 +15401,144 @@
         </p:nvPicPr>
         <p:blipFill>
           <a:blip r:embed="rId4"/>
+          <a:srcRect t="24911" r="36733"/>
           <a:stretch>
             <a:fillRect/>
           </a:stretch>
         </p:blipFill>
         <p:spPr>
           <a:xfrm>
-            <a:off x="1173033" y="1241723"/>
-            <a:ext cx="3156420" cy="970599"/>
+            <a:off x="7412055" y="4129812"/>
+            <a:ext cx="3406225" cy="970243"/>
           </a:xfrm>
           <a:prstGeom prst="rect">
             <a:avLst/>
           </a:prstGeom>
         </p:spPr>
       </p:pic>
+      <p:sp>
+        <p:nvSpPr>
+          <p:cNvPr id="4" name="TextBox 3">
+            <a:extLst>
+              <a:ext uri="{FF2B5EF4-FFF2-40B4-BE49-F238E27FC236}">
+                <a16:creationId xmlns:a16="http://schemas.microsoft.com/office/drawing/2014/main" id="{C5298F30-CB9E-26DF-86AA-C5DD53A67661}"/>
+              </a:ext>
+            </a:extLst>
+          </p:cNvPr>
+          <p:cNvSpPr txBox="1"/>
+          <p:nvPr/>
+        </p:nvSpPr>
+        <p:spPr>
+          <a:xfrm>
+            <a:off x="7307635" y="5226778"/>
+            <a:ext cx="3905318" cy="369332"/>
+          </a:xfrm>
+          <a:prstGeom prst="rect">
+            <a:avLst/>
+          </a:prstGeom>
+          <a:noFill/>
+        </p:spPr>
+        <p:txBody>
+          <a:bodyPr wrap="square" rtlCol="0">
+            <a:spAutoFit/>
+          </a:bodyPr>
+          <a:lstStyle/>
+          <a:p>
+            <a:r>
+              <a:rPr lang="en-GB" dirty="0">
+                <a:latin typeface="DM Serif Display" pitchFamily="2" charset="0"/>
+              </a:rPr>
+              <a:t>Experimental Group Trust Average</a:t>
+            </a:r>
+          </a:p>
+        </p:txBody>
+      </p:sp>
+      <p:sp>
+        <p:nvSpPr>
+          <p:cNvPr id="5" name="TextBox 4">
+            <a:extLst>
+              <a:ext uri="{FF2B5EF4-FFF2-40B4-BE49-F238E27FC236}">
+                <a16:creationId xmlns:a16="http://schemas.microsoft.com/office/drawing/2014/main" id="{A4E86C47-35AD-C192-F39E-B5810C7AAC6B}"/>
+              </a:ext>
+            </a:extLst>
+          </p:cNvPr>
+          <p:cNvSpPr txBox="1"/>
+          <p:nvPr/>
+        </p:nvSpPr>
+        <p:spPr>
+          <a:xfrm>
+            <a:off x="7433808" y="3762650"/>
+            <a:ext cx="3905318" cy="369332"/>
+          </a:xfrm>
+          <a:prstGeom prst="rect">
+            <a:avLst/>
+          </a:prstGeom>
+          <a:noFill/>
+        </p:spPr>
+        <p:txBody>
+          <a:bodyPr wrap="square" rtlCol="0">
+            <a:spAutoFit/>
+          </a:bodyPr>
+          <a:lstStyle/>
+          <a:p>
+            <a:r>
+              <a:rPr lang="en-GB" dirty="0">
+                <a:latin typeface="DM Serif Display" pitchFamily="2" charset="0"/>
+              </a:rPr>
+              <a:t>Predicted  Group Trust Average</a:t>
+            </a:r>
+          </a:p>
+        </p:txBody>
+      </p:sp>
+      <p:cxnSp>
+        <p:nvCxnSpPr>
+          <p:cNvPr id="8" name="Straight Connector 7">
+            <a:extLst>
+              <a:ext uri="{FF2B5EF4-FFF2-40B4-BE49-F238E27FC236}">
+                <a16:creationId xmlns:a16="http://schemas.microsoft.com/office/drawing/2014/main" id="{97A081E9-11A8-04BD-6031-A85626DD17DE}"/>
+              </a:ext>
+            </a:extLst>
+          </p:cNvPr>
+          <p:cNvCxnSpPr>
+            <a:cxnSpLocks/>
+          </p:cNvCxnSpPr>
+          <p:nvPr/>
+        </p:nvCxnSpPr>
+        <p:spPr>
+          <a:xfrm>
+            <a:off x="462988" y="830257"/>
+            <a:ext cx="8866207" cy="0"/>
+          </a:xfrm>
+          <a:prstGeom prst="line">
+            <a:avLst/>
+          </a:prstGeom>
+          <a:ln w="19050">
+            <a:solidFill>
+              <a:schemeClr val="accent5">
+                <a:lumMod val="75000"/>
+              </a:schemeClr>
+            </a:solidFill>
+          </a:ln>
+        </p:spPr>
+        <p:style>
+          <a:lnRef idx="1">
+            <a:schemeClr val="accent1"/>
+          </a:lnRef>
+          <a:fillRef idx="0">
+            <a:schemeClr val="accent1"/>
+          </a:fillRef>
+          <a:effectRef idx="0">
+            <a:schemeClr val="accent1"/>
+          </a:effectRef>
+          <a:fontRef idx="minor">
+            <a:schemeClr val="tx1"/>
+          </a:fontRef>
+        </p:style>
+      </p:cxnSp>
     </p:spTree>
     <p:extLst>
       <p:ext uri="{BB962C8B-B14F-4D97-AF65-F5344CB8AC3E}">
-        <p14:creationId xmlns:p14="http://schemas.microsoft.com/office/powerpoint/2010/main" val="3069715834"/>
+        <p14:creationId xmlns:p14="http://schemas.microsoft.com/office/powerpoint/2010/main" val="1404603255"/>
       </p:ext>
     </p:extLst>
   </p:cSld>
